--- a/docs/whiteboard/Procesbeschrijving-stappenplan.pptx
+++ b/docs/whiteboard/Procesbeschrijving-stappenplan.pptx
@@ -7,6 +7,7 @@
   <p:sldIdLst>
     <p:sldId id="256" r:id="rId7"/>
     <p:sldId id="257" r:id="rId9"/>
+    <p:sldId id="258" r:id="rId10"/>
   </p:sldIdLst>
   <p:sldSz cx="12191695" cy="6858000" type="screen4x3"/>
   <p:notesSz cx="6858000" cy="9144000"/>
@@ -676,7 +677,7 @@
           <a:lstStyle/>
           <a:p>
             <a:r>
-              <a:t>Formatieberekening, voorbeeld radiologie.</a:t>
+              <a:t>Formatieberekening, voorbeeld radiologie — deel 1: van bruto naar netto. De blokken komen uit het rekenblad dat wij hiervoor gebruiken.</a:t>
             </a:r>
           </a:p>
           <a:p/>
@@ -688,25 +689,95 @@
           <a:p/>
           <a:p>
             <a:r>
-              <a:t>Afwezigheid volgens begroting: vakantierechten 144,0, ziekteverzuim 75,1, bijzonder verlof 8,0, PLB 22,0 en feestdagen 50,4 — samen 300 uur, oftewel 5,7 uur per week of 15,9%.</a:t>
+              <a:t>Afwezigheid volgens begroting, per fte: vakantierechten 144,0 (2,8 u/wk, 7,7%), ziek 75,1 (1,4 u/wk, 4,0%), bijzonder verlof 8,0 (0,2 u/wk, 0,4%), PLB 22,0 (0,4 u/wk, 1,2%) en feestdagen 50,4 (1,0 u/wk, 2,7%). Totaal 300 uur, 5,7 u/wk, 15,9%. Per medewerker komt daar scholing en werkoverleg bij.</a:t>
             </a:r>
           </a:p>
           <a:p/>
           <a:p>
             <a:r>
-              <a:t>Netto inzetbaarheid: 1.579 uur, oftewel 30,3 uur per week of 84,1%.</a:t>
+              <a:t>Netto inzetbaarheid: 1.579 uur, 30,3 uur per week, 84,1%.</a:t>
+            </a:r>
+          </a:p>
+        </p:txBody>
+      </p:sp>
+      <p:sp>
+        <p:nvSpPr>
+          <p:cNvPr id="4" name="Slide Number Placeholder 3"/>
+          <p:cNvSpPr>
+            <a:spLocks noGrp="1"/>
+          </p:cNvSpPr>
+          <p:nvPr>
+            <p:ph type="sldNum" idx="5" sz="quarter"/>
+          </p:nvPr>
+        </p:nvSpPr>
+        <p:spPr/>
+      </p:sp>
+    </p:spTree>
+  </p:cSld>
+  <p:clrMapOvr>
+    <a:masterClrMapping/>
+  </p:clrMapOvr>
+</p:notes>
+</file>
+
+<file path=ppt/notesSlides/notesSlide3.xml><?xml version="1.0" encoding="utf-8"?>
+<p:notes xmlns:a="http://schemas.openxmlformats.org/drawingml/2006/main" xmlns:p="http://schemas.openxmlformats.org/presentationml/2006/main" xmlns:r="http://schemas.openxmlformats.org/officeDocument/2006/relationships">
+  <p:cSld>
+    <p:spTree>
+      <p:nvGrpSpPr>
+        <p:cNvPr id="1" name=""/>
+        <p:cNvGrpSpPr/>
+        <p:nvPr/>
+      </p:nvGrpSpPr>
+      <p:grpSpPr>
+        <a:xfrm>
+          <a:off x="0" y="0"/>
+          <a:ext cx="0" cy="0"/>
+          <a:chOff x="0" y="0"/>
+          <a:chExt cx="0" cy="0"/>
+        </a:xfrm>
+      </p:grpSpPr>
+      <p:sp>
+        <p:nvSpPr>
+          <p:cNvPr id="2" name="Slide Image Placeholder 1"/>
+          <p:cNvSpPr>
+            <a:spLocks noGrp="1"/>
+          </p:cNvSpPr>
+          <p:nvPr>
+            <p:ph type="sldImg" idx="2"/>
+          </p:nvPr>
+        </p:nvSpPr>
+        <p:spPr/>
+      </p:sp>
+      <p:sp>
+        <p:nvSpPr>
+          <p:cNvPr id="3" name="Notes Placeholder 2"/>
+          <p:cNvSpPr>
+            <a:spLocks noGrp="1"/>
+          </p:cNvSpPr>
+          <p:nvPr>
+            <p:ph type="body" idx="3" sz="quarter"/>
+          </p:nvPr>
+        </p:nvSpPr>
+        <p:spPr/>
+        <p:txBody>
+          <a:bodyPr/>
+          <a:lstStyle/>
+          <a:p>
+            <a:r>
+              <a:t>Formatieberekening, voorbeeld radiologie — deel 2: van benodigd naar resultaat.</a:t>
             </a:r>
           </a:p>
           <a:p/>
           <a:p>
             <a:r>
-              <a:t>Benodigde uren bestaan uit de indirecte uren per afdeling, de directe uren op basis van roostersleutel of sessierooster, de spoedmodaliteiten en de bereikbaarheidsdiensten.</a:t>
+              <a:t>Benodigde uren: de indirecte uren per afdeling, de directe uren op basis van de roostersleutel (sessies op basis van het sessierooster, bij radiologie uitgesplitst naar Bucky, CT, MRI, echo, angio, doorlichting, vacuümbioptie, mammografie en vaatdiagnostiek), de spoedmodaliteiten en de bereikbaarheidsdiensten. Samen geven die de benodigde capaciteit in uren.</a:t>
             </a:r>
           </a:p>
           <a:p/>
           <a:p>
             <a:r>
-              <a:t>Personeelsformatie: benodigde capaciteit in uren, bruto benodigde formatie in fte, overige afwijkingen en bruto beschikbare formatie in fte. Het verschil is de fte-(mis)match.</a:t>
+              <a:t>Personeelsformatie: benodigde capaciteit in uren, bruto benodigde formatie in fte, overige afwijkingen, bruto benodigde formatie inclusief overige afwijkingen, en de bruto beschikbare formatie in fte. Het verschil tussen benodigd en beschikbaar is de fte-(mis)match.</a:t>
             </a:r>
           </a:p>
           <a:p/>
@@ -3889,7 +3960,7 @@
                 </a:solidFill>
                 <a:latin typeface="Calibri"/>
               </a:rPr>
-              <a:t>Vier stappen — elke stap levert de input voor de volgende</a:t>
+              <a:t>Vier stappen — wat de ene stap oplevert, is de invoer van de volgende</a:t>
             </a:r>
           </a:p>
         </p:txBody>
@@ -3929,16 +4000,277 @@
           </a:fontRef>
         </p:style>
       </p:cxnSp>
-      <p:sp>
-        <p:nvSpPr>
-          <p:cNvPr id="7" name="Rounded Rectangle 6"/>
+      <p:cxnSp>
+        <p:nvCxnSpPr>
+          <p:cNvPr id="7" name="Connector 6"/>
+          <p:cNvCxnSpPr/>
+          <p:nvPr/>
+        </p:nvCxnSpPr>
+        <p:spPr>
+          <a:xfrm>
+            <a:off x="2004021" y="2157984"/>
+            <a:ext cx="8183652" cy="0"/>
+          </a:xfrm>
+          <a:prstGeom prst="line">
+            <a:avLst/>
+          </a:prstGeom>
+          <a:ln w="15875">
+            <a:solidFill>
+              <a:srgbClr val="C6D6E6"/>
+            </a:solidFill>
+          </a:ln>
+        </p:spPr>
+        <p:style>
+          <a:lnRef idx="2">
+            <a:schemeClr val="accent1"/>
+          </a:lnRef>
+          <a:fillRef idx="0">
+            <a:schemeClr val="accent1"/>
+          </a:fillRef>
+          <a:effectRef idx="1">
+            <a:schemeClr val="accent1"/>
+          </a:effectRef>
+          <a:fontRef idx="minor">
+            <a:schemeClr val="tx1"/>
+          </a:fontRef>
+        </p:style>
+      </p:cxnSp>
+      <p:sp>
+        <p:nvSpPr>
+          <p:cNvPr id="8" name="Right Arrow 7"/>
           <p:cNvSpPr/>
           <p:nvPr/>
         </p:nvSpPr>
         <p:spPr>
           <a:xfrm>
-            <a:off x="640080" y="1700784"/>
-            <a:ext cx="2535859" cy="3785615"/>
+            <a:off x="3276523" y="2066544"/>
+            <a:ext cx="182880" cy="182880"/>
+          </a:xfrm>
+          <a:prstGeom prst="rightArrow">
+            <a:avLst/>
+          </a:prstGeom>
+          <a:solidFill>
+            <a:srgbClr val="0E9A87">
+              <a:alpha val="45000"/>
+            </a:srgbClr>
+          </a:solidFill>
+          <a:ln>
+            <a:noFill/>
+          </a:ln>
+          <a:effectLst/>
+        </p:spPr>
+        <p:style>
+          <a:lnRef idx="1">
+            <a:schemeClr val="accent1"/>
+          </a:lnRef>
+          <a:fillRef idx="3">
+            <a:schemeClr val="accent1"/>
+          </a:fillRef>
+          <a:effectRef idx="2">
+            <a:schemeClr val="accent1"/>
+          </a:effectRef>
+          <a:fontRef idx="minor">
+            <a:schemeClr val="lt1"/>
+          </a:fontRef>
+        </p:style>
+        <p:txBody>
+          <a:bodyPr rtlCol="0" anchor="ctr"/>
+          <a:lstStyle/>
+          <a:p>
+            <a:pPr algn="ctr"/>
+          </a:p>
+        </p:txBody>
+      </p:sp>
+      <p:sp>
+        <p:nvSpPr>
+          <p:cNvPr id="9" name="Rounded Rectangle 8"/>
+          <p:cNvSpPr/>
+          <p:nvPr/>
+        </p:nvSpPr>
+        <p:spPr>
+          <a:xfrm>
+            <a:off x="1501101" y="1655064"/>
+            <a:ext cx="1005840" cy="1005840"/>
+          </a:xfrm>
+          <a:prstGeom prst="roundRect">
+            <a:avLst>
+              <a:gd name="adj" fmla="val 50000"/>
+            </a:avLst>
+          </a:prstGeom>
+          <a:solidFill>
+            <a:srgbClr val="DAEDF0"/>
+          </a:solidFill>
+          <a:ln>
+            <a:noFill/>
+          </a:ln>
+          <a:effectLst/>
+        </p:spPr>
+        <p:style>
+          <a:lnRef idx="1">
+            <a:schemeClr val="accent1"/>
+          </a:lnRef>
+          <a:fillRef idx="3">
+            <a:schemeClr val="accent1"/>
+          </a:fillRef>
+          <a:effectRef idx="2">
+            <a:schemeClr val="accent1"/>
+          </a:effectRef>
+          <a:fontRef idx="minor">
+            <a:schemeClr val="lt1"/>
+          </a:fontRef>
+        </p:style>
+        <p:txBody>
+          <a:bodyPr rtlCol="0" anchor="ctr"/>
+          <a:lstStyle/>
+          <a:p/>
+        </p:txBody>
+      </p:sp>
+      <p:sp>
+        <p:nvSpPr>
+          <p:cNvPr id="10" name="Rounded Rectangle 9"/>
+          <p:cNvSpPr/>
+          <p:nvPr/>
+        </p:nvSpPr>
+        <p:spPr>
+          <a:xfrm>
+            <a:off x="1619973" y="1773936"/>
+            <a:ext cx="768096" cy="768096"/>
+          </a:xfrm>
+          <a:prstGeom prst="roundRect">
+            <a:avLst>
+              <a:gd name="adj" fmla="val 50000"/>
+            </a:avLst>
+          </a:prstGeom>
+          <a:solidFill>
+            <a:srgbClr val="FFFFFF"/>
+          </a:solidFill>
+          <a:ln w="25400">
+            <a:solidFill>
+              <a:srgbClr val="0E9A87"/>
+            </a:solidFill>
+          </a:ln>
+          <a:effectLst>
+            <a:outerShdw blurRad="50000" dist="14000" dir="5400000" rotWithShape="0">
+              <a:srgbClr val="1B3A5C">
+                <a:alpha val="8000"/>
+              </a:srgbClr>
+            </a:outerShdw>
+          </a:effectLst>
+        </p:spPr>
+        <p:style>
+          <a:lnRef idx="1">
+            <a:schemeClr val="accent1"/>
+          </a:lnRef>
+          <a:fillRef idx="3">
+            <a:schemeClr val="accent1"/>
+          </a:fillRef>
+          <a:effectRef idx="2">
+            <a:schemeClr val="accent1"/>
+          </a:effectRef>
+          <a:fontRef idx="minor">
+            <a:schemeClr val="lt1"/>
+          </a:fontRef>
+        </p:style>
+        <p:txBody>
+          <a:bodyPr rtlCol="0" anchor="ctr"/>
+          <a:lstStyle/>
+          <a:p/>
+        </p:txBody>
+      </p:sp>
+      <p:sp>
+        <p:nvSpPr>
+          <p:cNvPr id="11" name="TextBox 10"/>
+          <p:cNvSpPr txBox="1"/>
+          <p:nvPr/>
+        </p:nvSpPr>
+        <p:spPr>
+          <a:xfrm>
+            <a:off x="1619973" y="1956816"/>
+            <a:ext cx="768096" cy="402336"/>
+          </a:xfrm>
+          <a:prstGeom prst="rect">
+            <a:avLst/>
+          </a:prstGeom>
+          <a:noFill/>
+        </p:spPr>
+        <p:txBody>
+          <a:bodyPr wrap="square" lIns="0" rIns="0" tIns="0" bIns="0" anchor="ctr">
+            <a:spAutoFit/>
+          </a:bodyPr>
+          <a:lstStyle/>
+          <a:p>
+            <a:pPr algn="ctr">
+              <a:lnSpc>
+                <a:spcPct val="120000"/>
+              </a:lnSpc>
+              <a:spcAft>
+                <a:spcPts val="0"/>
+              </a:spcAft>
+            </a:pPr>
+            <a:r>
+              <a:rPr sz="2000" b="1">
+                <a:solidFill>
+                  <a:srgbClr val="0E9A87"/>
+                </a:solidFill>
+                <a:latin typeface="Calibri"/>
+              </a:rPr>
+              <a:t>01</a:t>
+            </a:r>
+          </a:p>
+        </p:txBody>
+      </p:sp>
+      <p:sp>
+        <p:nvSpPr>
+          <p:cNvPr id="12" name="TextBox 11"/>
+          <p:cNvSpPr txBox="1"/>
+          <p:nvPr/>
+        </p:nvSpPr>
+        <p:spPr>
+          <a:xfrm>
+            <a:off x="758952" y="2724912"/>
+            <a:ext cx="2490139" cy="402336"/>
+          </a:xfrm>
+          <a:prstGeom prst="rect">
+            <a:avLst/>
+          </a:prstGeom>
+          <a:noFill/>
+        </p:spPr>
+        <p:txBody>
+          <a:bodyPr wrap="square" lIns="0" rIns="0" tIns="0" bIns="0" anchor="t">
+            <a:spAutoFit/>
+          </a:bodyPr>
+          <a:lstStyle/>
+          <a:p>
+            <a:pPr algn="ctr">
+              <a:lnSpc>
+                <a:spcPct val="114000"/>
+              </a:lnSpc>
+              <a:spcAft>
+                <a:spcPts val="0"/>
+              </a:spcAft>
+            </a:pPr>
+            <a:r>
+              <a:rPr sz="1600" b="1">
+                <a:solidFill>
+                  <a:srgbClr val="0D1B2A"/>
+                </a:solidFill>
+                <a:latin typeface="Calibri"/>
+              </a:rPr>
+              <a:t>Beddencapaciteit</a:t>
+            </a:r>
+          </a:p>
+        </p:txBody>
+      </p:sp>
+      <p:sp>
+        <p:nvSpPr>
+          <p:cNvPr id="13" name="Rounded Rectangle 12"/>
+          <p:cNvSpPr/>
+          <p:nvPr/>
+        </p:nvSpPr>
+        <p:spPr>
+          <a:xfrm>
+            <a:off x="758952" y="3163824"/>
+            <a:ext cx="2490139" cy="2304288"/>
           </a:xfrm>
           <a:prstGeom prst="roundRect">
             <a:avLst>
@@ -3983,14 +4315,14 @@
       </p:sp>
       <p:sp>
         <p:nvSpPr>
-          <p:cNvPr id="8" name="Rounded Rectangle 7"/>
+          <p:cNvPr id="14" name="Rounded Rectangle 13"/>
           <p:cNvSpPr/>
           <p:nvPr/>
         </p:nvSpPr>
         <p:spPr>
           <a:xfrm>
-            <a:off x="640080" y="1700784"/>
-            <a:ext cx="2535859" cy="50292"/>
+            <a:off x="758952" y="3163824"/>
+            <a:ext cx="2490139" cy="50292"/>
           </a:xfrm>
           <a:prstGeom prst="roundRect">
             <a:avLst>
@@ -4027,71 +4359,14 @@
       </p:sp>
       <p:sp>
         <p:nvSpPr>
-          <p:cNvPr id="9" name="Oval 8"/>
-          <p:cNvSpPr/>
-          <p:nvPr/>
-        </p:nvSpPr>
-        <p:spPr>
-          <a:xfrm>
-            <a:off x="832103" y="1947672"/>
-            <a:ext cx="457200" cy="457200"/>
-          </a:xfrm>
-          <a:prstGeom prst="ellipse">
-            <a:avLst/>
-          </a:prstGeom>
-          <a:solidFill>
-            <a:srgbClr val="0E9A87">
-              <a:alpha val="10000"/>
-            </a:srgbClr>
-          </a:solidFill>
-          <a:ln w="15875">
-            <a:solidFill>
-              <a:srgbClr val="0E9A87"/>
-            </a:solidFill>
-          </a:ln>
-          <a:effectLst/>
-        </p:spPr>
-        <p:style>
-          <a:lnRef idx="1">
-            <a:schemeClr val="accent1"/>
-          </a:lnRef>
-          <a:fillRef idx="3">
-            <a:schemeClr val="accent1"/>
-          </a:fillRef>
-          <a:effectRef idx="2">
-            <a:schemeClr val="accent1"/>
-          </a:effectRef>
-          <a:fontRef idx="minor">
-            <a:schemeClr val="lt1"/>
-          </a:fontRef>
-        </p:style>
-        <p:txBody>
-          <a:bodyPr rtlCol="0" anchor="ctr" wrap="none" lIns="0" rIns="0" tIns="0" bIns="0"/>
-          <a:lstStyle/>
-          <a:p>
-            <a:pPr algn="ctr"/>
-            <a:r>
-              <a:rPr sz="1300" b="1">
-                <a:solidFill>
-                  <a:srgbClr val="0E9A87"/>
-                </a:solidFill>
-                <a:latin typeface="Calibri"/>
-              </a:rPr>
-              <a:t>01</a:t>
-            </a:r>
-          </a:p>
-        </p:txBody>
-      </p:sp>
-      <p:sp>
-        <p:nvSpPr>
-          <p:cNvPr id="10" name="TextBox 9"/>
+          <p:cNvPr id="15" name="TextBox 14"/>
           <p:cNvSpPr txBox="1"/>
           <p:nvPr/>
         </p:nvSpPr>
         <p:spPr>
           <a:xfrm>
-            <a:off x="877824" y="2523744"/>
-            <a:ext cx="2060371" cy="548640"/>
+            <a:off x="941832" y="3346704"/>
+            <a:ext cx="274320" cy="347472"/>
           </a:xfrm>
           <a:prstGeom prst="rect">
             <a:avLst/>
@@ -4099,187 +4374,7 @@
           <a:noFill/>
         </p:spPr>
         <p:txBody>
-          <a:bodyPr wrap="square" lIns="0" rIns="0" tIns="0" bIns="0" anchor="t">
-            <a:spAutoFit/>
-          </a:bodyPr>
-          <a:lstStyle/>
-          <a:p>
-            <a:pPr algn="l">
-              <a:lnSpc>
-                <a:spcPct val="114000"/>
-              </a:lnSpc>
-              <a:spcAft>
-                <a:spcPts val="0"/>
-              </a:spcAft>
-            </a:pPr>
-            <a:r>
-              <a:rPr sz="1550" b="1">
-                <a:solidFill>
-                  <a:srgbClr val="0D1B2A"/>
-                </a:solidFill>
-                <a:latin typeface="Calibri"/>
-              </a:rPr>
-              <a:t>Beddencapaciteit</a:t>
-            </a:r>
-          </a:p>
-        </p:txBody>
-      </p:sp>
-      <p:sp>
-        <p:nvSpPr>
-          <p:cNvPr id="11" name="Rounded Rectangle 10"/>
-          <p:cNvSpPr/>
-          <p:nvPr/>
-        </p:nvSpPr>
-        <p:spPr>
-          <a:xfrm>
-            <a:off x="877824" y="3108960"/>
-            <a:ext cx="2060371" cy="292608"/>
-          </a:xfrm>
-          <a:prstGeom prst="roundRect">
-            <a:avLst>
-              <a:gd name="adj" fmla="val 50000"/>
-            </a:avLst>
-          </a:prstGeom>
-          <a:solidFill>
-            <a:srgbClr val="0E9A87">
-              <a:alpha val="11000"/>
-            </a:srgbClr>
-          </a:solidFill>
-          <a:ln w="12700">
-            <a:solidFill>
-              <a:srgbClr val="80C8C2"/>
-            </a:solidFill>
-          </a:ln>
-          <a:effectLst/>
-        </p:spPr>
-        <p:style>
-          <a:lnRef idx="1">
-            <a:schemeClr val="accent1"/>
-          </a:lnRef>
-          <a:fillRef idx="3">
-            <a:schemeClr val="accent1"/>
-          </a:fillRef>
-          <a:effectRef idx="2">
-            <a:schemeClr val="accent1"/>
-          </a:effectRef>
-          <a:fontRef idx="minor">
-            <a:schemeClr val="lt1"/>
-          </a:fontRef>
-        </p:style>
-        <p:txBody>
-          <a:bodyPr rtlCol="0" anchor="ctr" wrap="square" lIns="64008" rIns="64008" tIns="0" bIns="0"/>
-          <a:lstStyle/>
-          <a:p>
-            <a:pPr algn="ctr"/>
-            <a:r>
-              <a:rPr sz="1000" b="1">
-                <a:solidFill>
-                  <a:srgbClr val="0E9A87"/>
-                </a:solidFill>
-                <a:latin typeface="Calibri"/>
-              </a:rPr>
-              <a:t>bedden per week</a:t>
-            </a:r>
-          </a:p>
-        </p:txBody>
-      </p:sp>
-      <p:cxnSp>
-        <p:nvCxnSpPr>
-          <p:cNvPr id="12" name="Connector 11"/>
-          <p:cNvCxnSpPr/>
-          <p:nvPr/>
-        </p:nvCxnSpPr>
-        <p:spPr>
-          <a:xfrm>
-            <a:off x="877824" y="3566160"/>
-            <a:ext cx="2060371" cy="0"/>
-          </a:xfrm>
-          <a:prstGeom prst="line">
-            <a:avLst/>
-          </a:prstGeom>
-          <a:ln w="12700">
-            <a:solidFill>
-              <a:srgbClr val="E2E9F1"/>
-            </a:solidFill>
-          </a:ln>
-        </p:spPr>
-        <p:style>
-          <a:lnRef idx="2">
-            <a:schemeClr val="accent1"/>
-          </a:lnRef>
-          <a:fillRef idx="0">
-            <a:schemeClr val="accent1"/>
-          </a:fillRef>
-          <a:effectRef idx="1">
-            <a:schemeClr val="accent1"/>
-          </a:effectRef>
-          <a:fontRef idx="minor">
-            <a:schemeClr val="tx1"/>
-          </a:fontRef>
-        </p:style>
-      </p:cxnSp>
-      <p:sp>
-        <p:nvSpPr>
-          <p:cNvPr id="13" name="Oval 12"/>
-          <p:cNvSpPr/>
-          <p:nvPr/>
-        </p:nvSpPr>
-        <p:spPr>
-          <a:xfrm>
-            <a:off x="909828" y="3771900"/>
-            <a:ext cx="82296" cy="82296"/>
-          </a:xfrm>
-          <a:prstGeom prst="ellipse">
-            <a:avLst/>
-          </a:prstGeom>
-          <a:solidFill>
-            <a:srgbClr val="0E9A87"/>
-          </a:solidFill>
-          <a:ln>
-            <a:noFill/>
-          </a:ln>
-          <a:effectLst/>
-        </p:spPr>
-        <p:style>
-          <a:lnRef idx="1">
-            <a:schemeClr val="accent1"/>
-          </a:lnRef>
-          <a:fillRef idx="3">
-            <a:schemeClr val="accent1"/>
-          </a:fillRef>
-          <a:effectRef idx="2">
-            <a:schemeClr val="accent1"/>
-          </a:effectRef>
-          <a:fontRef idx="minor">
-            <a:schemeClr val="lt1"/>
-          </a:fontRef>
-        </p:style>
-        <p:txBody>
-          <a:bodyPr rtlCol="0" anchor="ctr"/>
-          <a:lstStyle/>
-          <a:p>
-            <a:pPr algn="ctr"/>
-          </a:p>
-        </p:txBody>
-      </p:sp>
-      <p:sp>
-        <p:nvSpPr>
-          <p:cNvPr id="14" name="TextBox 13"/>
-          <p:cNvSpPr txBox="1"/>
-          <p:nvPr/>
-        </p:nvSpPr>
-        <p:spPr>
-          <a:xfrm>
-            <a:off x="1133856" y="3712464"/>
-            <a:ext cx="1804339" cy="364743"/>
-          </a:xfrm>
-          <a:prstGeom prst="rect">
-            <a:avLst/>
-          </a:prstGeom>
-          <a:noFill/>
-        </p:spPr>
-        <p:txBody>
-          <a:bodyPr wrap="square" lIns="0" rIns="0" tIns="0" bIns="0" anchor="t">
+          <a:bodyPr wrap="square" lIns="0" rIns="0" tIns="0" bIns="0" anchor="ctr">
             <a:spAutoFit/>
           </a:bodyPr>
           <a:lstStyle/>
@@ -4293,9 +4388,51 @@
               </a:spcAft>
             </a:pPr>
             <a:r>
+              <a:rPr sz="850" b="1">
+                <a:solidFill>
+                  <a:srgbClr val="4AB3A5"/>
+                </a:solidFill>
+                <a:latin typeface="Calibri"/>
+              </a:rPr>
+              <a:t>01</a:t>
+            </a:r>
+          </a:p>
+        </p:txBody>
+      </p:sp>
+      <p:sp>
+        <p:nvSpPr>
+          <p:cNvPr id="16" name="TextBox 15"/>
+          <p:cNvSpPr txBox="1"/>
+          <p:nvPr/>
+        </p:nvSpPr>
+        <p:spPr>
+          <a:xfrm>
+            <a:off x="1234440" y="3346704"/>
+            <a:ext cx="1831771" cy="347472"/>
+          </a:xfrm>
+          <a:prstGeom prst="rect">
+            <a:avLst/>
+          </a:prstGeom>
+          <a:noFill/>
+        </p:spPr>
+        <p:txBody>
+          <a:bodyPr wrap="square" lIns="0" rIns="0" tIns="0" bIns="0" anchor="ctr">
+            <a:spAutoFit/>
+          </a:bodyPr>
+          <a:lstStyle/>
+          <a:p>
+            <a:pPr algn="l">
+              <a:lnSpc>
+                <a:spcPct val="118000"/>
+              </a:lnSpc>
+              <a:spcAft>
+                <a:spcPts val="0"/>
+              </a:spcAft>
+            </a:pPr>
+            <a:r>
               <a:rPr sz="1000" b="0">
                 <a:solidFill>
-                  <a:srgbClr val="55677C"/>
+                  <a:srgbClr val="0D1B2A"/>
                 </a:solidFill>
                 <a:latin typeface="Calibri"/>
               </a:rPr>
@@ -4304,60 +4441,51 @@
           </a:p>
         </p:txBody>
       </p:sp>
-      <p:sp>
-        <p:nvSpPr>
-          <p:cNvPr id="15" name="Oval 14"/>
-          <p:cNvSpPr/>
-          <p:nvPr/>
-        </p:nvSpPr>
-        <p:spPr>
-          <a:xfrm>
-            <a:off x="909828" y="4129024"/>
-            <a:ext cx="82296" cy="82296"/>
-          </a:xfrm>
-          <a:prstGeom prst="ellipse">
-            <a:avLst/>
-          </a:prstGeom>
-          <a:solidFill>
-            <a:srgbClr val="0E9A87"/>
-          </a:solidFill>
-          <a:ln>
-            <a:noFill/>
+      <p:cxnSp>
+        <p:nvCxnSpPr>
+          <p:cNvPr id="17" name="Connector 16"/>
+          <p:cNvCxnSpPr/>
+          <p:nvPr/>
+        </p:nvCxnSpPr>
+        <p:spPr>
+          <a:xfrm>
+            <a:off x="941832" y="3730752"/>
+            <a:ext cx="2124379" cy="0"/>
+          </a:xfrm>
+          <a:prstGeom prst="line">
+            <a:avLst/>
+          </a:prstGeom>
+          <a:ln w="9525">
+            <a:solidFill>
+              <a:srgbClr val="E2E9F1"/>
+            </a:solidFill>
           </a:ln>
-          <a:effectLst/>
         </p:spPr>
         <p:style>
-          <a:lnRef idx="1">
+          <a:lnRef idx="2">
             <a:schemeClr val="accent1"/>
           </a:lnRef>
-          <a:fillRef idx="3">
+          <a:fillRef idx="0">
             <a:schemeClr val="accent1"/>
           </a:fillRef>
-          <a:effectRef idx="2">
+          <a:effectRef idx="1">
             <a:schemeClr val="accent1"/>
           </a:effectRef>
           <a:fontRef idx="minor">
-            <a:schemeClr val="lt1"/>
+            <a:schemeClr val="tx1"/>
           </a:fontRef>
         </p:style>
-        <p:txBody>
-          <a:bodyPr rtlCol="0" anchor="ctr"/>
-          <a:lstStyle/>
-          <a:p>
-            <a:pPr algn="ctr"/>
-          </a:p>
-        </p:txBody>
-      </p:sp>
-      <p:sp>
-        <p:nvSpPr>
-          <p:cNvPr id="16" name="TextBox 15"/>
+      </p:cxnSp>
+      <p:sp>
+        <p:nvSpPr>
+          <p:cNvPr id="18" name="TextBox 17"/>
           <p:cNvSpPr txBox="1"/>
           <p:nvPr/>
         </p:nvSpPr>
         <p:spPr>
           <a:xfrm>
-            <a:off x="1133856" y="4069588"/>
-            <a:ext cx="1804339" cy="364743"/>
+            <a:off x="941832" y="3767328"/>
+            <a:ext cx="274320" cy="347472"/>
           </a:xfrm>
           <a:prstGeom prst="rect">
             <a:avLst/>
@@ -4365,7 +4493,7 @@
           <a:noFill/>
         </p:spPr>
         <p:txBody>
-          <a:bodyPr wrap="square" lIns="0" rIns="0" tIns="0" bIns="0" anchor="t">
+          <a:bodyPr wrap="square" lIns="0" rIns="0" tIns="0" bIns="0" anchor="ctr">
             <a:spAutoFit/>
           </a:bodyPr>
           <a:lstStyle/>
@@ -4379,9 +4507,51 @@
               </a:spcAft>
             </a:pPr>
             <a:r>
+              <a:rPr sz="850" b="1">
+                <a:solidFill>
+                  <a:srgbClr val="4AB3A5"/>
+                </a:solidFill>
+                <a:latin typeface="Calibri"/>
+              </a:rPr>
+              <a:t>02</a:t>
+            </a:r>
+          </a:p>
+        </p:txBody>
+      </p:sp>
+      <p:sp>
+        <p:nvSpPr>
+          <p:cNvPr id="19" name="TextBox 18"/>
+          <p:cNvSpPr txBox="1"/>
+          <p:nvPr/>
+        </p:nvSpPr>
+        <p:spPr>
+          <a:xfrm>
+            <a:off x="1234440" y="3767328"/>
+            <a:ext cx="1831771" cy="347472"/>
+          </a:xfrm>
+          <a:prstGeom prst="rect">
+            <a:avLst/>
+          </a:prstGeom>
+          <a:noFill/>
+        </p:spPr>
+        <p:txBody>
+          <a:bodyPr wrap="square" lIns="0" rIns="0" tIns="0" bIns="0" anchor="ctr">
+            <a:spAutoFit/>
+          </a:bodyPr>
+          <a:lstStyle/>
+          <a:p>
+            <a:pPr algn="l">
+              <a:lnSpc>
+                <a:spcPct val="118000"/>
+              </a:lnSpc>
+              <a:spcAft>
+                <a:spcPts val="0"/>
+              </a:spcAft>
+            </a:pPr>
+            <a:r>
               <a:rPr sz="1000" b="0">
                 <a:solidFill>
-                  <a:srgbClr val="55677C"/>
+                  <a:srgbClr val="0D1B2A"/>
                 </a:solidFill>
                 <a:latin typeface="Calibri"/>
               </a:rPr>
@@ -4390,60 +4560,51 @@
           </a:p>
         </p:txBody>
       </p:sp>
-      <p:sp>
-        <p:nvSpPr>
-          <p:cNvPr id="17" name="Oval 16"/>
-          <p:cNvSpPr/>
-          <p:nvPr/>
-        </p:nvSpPr>
-        <p:spPr>
-          <a:xfrm>
-            <a:off x="909828" y="4486148"/>
-            <a:ext cx="82296" cy="82296"/>
-          </a:xfrm>
-          <a:prstGeom prst="ellipse">
-            <a:avLst/>
-          </a:prstGeom>
-          <a:solidFill>
-            <a:srgbClr val="0E9A87"/>
-          </a:solidFill>
-          <a:ln>
-            <a:noFill/>
+      <p:cxnSp>
+        <p:nvCxnSpPr>
+          <p:cNvPr id="20" name="Connector 19"/>
+          <p:cNvCxnSpPr/>
+          <p:nvPr/>
+        </p:nvCxnSpPr>
+        <p:spPr>
+          <a:xfrm>
+            <a:off x="941832" y="4151376"/>
+            <a:ext cx="2124379" cy="0"/>
+          </a:xfrm>
+          <a:prstGeom prst="line">
+            <a:avLst/>
+          </a:prstGeom>
+          <a:ln w="9525">
+            <a:solidFill>
+              <a:srgbClr val="E2E9F1"/>
+            </a:solidFill>
           </a:ln>
-          <a:effectLst/>
         </p:spPr>
         <p:style>
-          <a:lnRef idx="1">
+          <a:lnRef idx="2">
             <a:schemeClr val="accent1"/>
           </a:lnRef>
-          <a:fillRef idx="3">
+          <a:fillRef idx="0">
             <a:schemeClr val="accent1"/>
           </a:fillRef>
-          <a:effectRef idx="2">
+          <a:effectRef idx="1">
             <a:schemeClr val="accent1"/>
           </a:effectRef>
           <a:fontRef idx="minor">
-            <a:schemeClr val="lt1"/>
+            <a:schemeClr val="tx1"/>
           </a:fontRef>
         </p:style>
-        <p:txBody>
-          <a:bodyPr rtlCol="0" anchor="ctr"/>
-          <a:lstStyle/>
-          <a:p>
-            <a:pPr algn="ctr"/>
-          </a:p>
-        </p:txBody>
-      </p:sp>
-      <p:sp>
-        <p:nvSpPr>
-          <p:cNvPr id="18" name="TextBox 17"/>
+      </p:cxnSp>
+      <p:sp>
+        <p:nvSpPr>
+          <p:cNvPr id="21" name="TextBox 20"/>
           <p:cNvSpPr txBox="1"/>
           <p:nvPr/>
         </p:nvSpPr>
         <p:spPr>
           <a:xfrm>
-            <a:off x="1133856" y="4426712"/>
-            <a:ext cx="1804339" cy="519684"/>
+            <a:off x="941832" y="4187952"/>
+            <a:ext cx="274320" cy="347472"/>
           </a:xfrm>
           <a:prstGeom prst="rect">
             <a:avLst/>
@@ -4451,7 +4612,7 @@
           <a:noFill/>
         </p:spPr>
         <p:txBody>
-          <a:bodyPr wrap="square" lIns="0" rIns="0" tIns="0" bIns="0" anchor="t">
+          <a:bodyPr wrap="square" lIns="0" rIns="0" tIns="0" bIns="0" anchor="ctr">
             <a:spAutoFit/>
           </a:bodyPr>
           <a:lstStyle/>
@@ -4465,9 +4626,51 @@
               </a:spcAft>
             </a:pPr>
             <a:r>
-              <a:rPr sz="1000" b="0">
+              <a:rPr sz="850" b="1">
                 <a:solidFill>
-                  <a:srgbClr val="55677C"/>
+                  <a:srgbClr val="4AB3A5"/>
+                </a:solidFill>
+                <a:latin typeface="Calibri"/>
+              </a:rPr>
+              <a:t>03</a:t>
+            </a:r>
+          </a:p>
+        </p:txBody>
+      </p:sp>
+      <p:sp>
+        <p:nvSpPr>
+          <p:cNvPr id="22" name="TextBox 21"/>
+          <p:cNvSpPr txBox="1"/>
+          <p:nvPr/>
+        </p:nvSpPr>
+        <p:spPr>
+          <a:xfrm>
+            <a:off x="1234440" y="4187952"/>
+            <a:ext cx="1831771" cy="347472"/>
+          </a:xfrm>
+          <a:prstGeom prst="rect">
+            <a:avLst/>
+          </a:prstGeom>
+          <a:noFill/>
+        </p:spPr>
+        <p:txBody>
+          <a:bodyPr wrap="square" lIns="0" rIns="0" tIns="0" bIns="0" anchor="ctr">
+            <a:spAutoFit/>
+          </a:bodyPr>
+          <a:lstStyle/>
+          <a:p>
+            <a:pPr algn="l">
+              <a:lnSpc>
+                <a:spcPct val="118000"/>
+              </a:lnSpc>
+              <a:spcAft>
+                <a:spcPts val="0"/>
+              </a:spcAft>
+            </a:pPr>
+            <a:r>
+              <a:rPr sz="900" b="0">
+                <a:solidFill>
+                  <a:srgbClr val="0D1B2A"/>
                 </a:solidFill>
                 <a:latin typeface="Calibri"/>
               </a:rPr>
@@ -4476,60 +4679,51 @@
           </a:p>
         </p:txBody>
       </p:sp>
-      <p:sp>
-        <p:nvSpPr>
-          <p:cNvPr id="19" name="Oval 18"/>
-          <p:cNvSpPr/>
-          <p:nvPr/>
-        </p:nvSpPr>
-        <p:spPr>
-          <a:xfrm>
-            <a:off x="909828" y="4998212"/>
-            <a:ext cx="82296" cy="82296"/>
-          </a:xfrm>
-          <a:prstGeom prst="ellipse">
-            <a:avLst/>
-          </a:prstGeom>
-          <a:solidFill>
-            <a:srgbClr val="0E9A87"/>
-          </a:solidFill>
-          <a:ln>
-            <a:noFill/>
+      <p:cxnSp>
+        <p:nvCxnSpPr>
+          <p:cNvPr id="23" name="Connector 22"/>
+          <p:cNvCxnSpPr/>
+          <p:nvPr/>
+        </p:nvCxnSpPr>
+        <p:spPr>
+          <a:xfrm>
+            <a:off x="941832" y="4572000"/>
+            <a:ext cx="2124379" cy="0"/>
+          </a:xfrm>
+          <a:prstGeom prst="line">
+            <a:avLst/>
+          </a:prstGeom>
+          <a:ln w="9525">
+            <a:solidFill>
+              <a:srgbClr val="E2E9F1"/>
+            </a:solidFill>
           </a:ln>
-          <a:effectLst/>
         </p:spPr>
         <p:style>
-          <a:lnRef idx="1">
+          <a:lnRef idx="2">
             <a:schemeClr val="accent1"/>
           </a:lnRef>
-          <a:fillRef idx="3">
+          <a:fillRef idx="0">
             <a:schemeClr val="accent1"/>
           </a:fillRef>
-          <a:effectRef idx="2">
+          <a:effectRef idx="1">
             <a:schemeClr val="accent1"/>
           </a:effectRef>
           <a:fontRef idx="minor">
-            <a:schemeClr val="lt1"/>
+            <a:schemeClr val="tx1"/>
           </a:fontRef>
         </p:style>
-        <p:txBody>
-          <a:bodyPr rtlCol="0" anchor="ctr"/>
-          <a:lstStyle/>
-          <a:p>
-            <a:pPr algn="ctr"/>
-          </a:p>
-        </p:txBody>
-      </p:sp>
-      <p:sp>
-        <p:nvSpPr>
-          <p:cNvPr id="20" name="TextBox 19"/>
+      </p:cxnSp>
+      <p:sp>
+        <p:nvSpPr>
+          <p:cNvPr id="24" name="TextBox 23"/>
           <p:cNvSpPr txBox="1"/>
           <p:nvPr/>
         </p:nvSpPr>
         <p:spPr>
           <a:xfrm>
-            <a:off x="1133856" y="4938776"/>
-            <a:ext cx="1804339" cy="364743"/>
+            <a:off x="941832" y="4608576"/>
+            <a:ext cx="274320" cy="347472"/>
           </a:xfrm>
           <a:prstGeom prst="rect">
             <a:avLst/>
@@ -4537,7 +4731,7 @@
           <a:noFill/>
         </p:spPr>
         <p:txBody>
-          <a:bodyPr wrap="square" lIns="0" rIns="0" tIns="0" bIns="0" anchor="t">
+          <a:bodyPr wrap="square" lIns="0" rIns="0" tIns="0" bIns="0" anchor="ctr">
             <a:spAutoFit/>
           </a:bodyPr>
           <a:lstStyle/>
@@ -4551,9 +4745,51 @@
               </a:spcAft>
             </a:pPr>
             <a:r>
+              <a:rPr sz="850" b="1">
+                <a:solidFill>
+                  <a:srgbClr val="4AB3A5"/>
+                </a:solidFill>
+                <a:latin typeface="Calibri"/>
+              </a:rPr>
+              <a:t>04</a:t>
+            </a:r>
+          </a:p>
+        </p:txBody>
+      </p:sp>
+      <p:sp>
+        <p:nvSpPr>
+          <p:cNvPr id="25" name="TextBox 24"/>
+          <p:cNvSpPr txBox="1"/>
+          <p:nvPr/>
+        </p:nvSpPr>
+        <p:spPr>
+          <a:xfrm>
+            <a:off x="1234440" y="4608576"/>
+            <a:ext cx="1831771" cy="347472"/>
+          </a:xfrm>
+          <a:prstGeom prst="rect">
+            <a:avLst/>
+          </a:prstGeom>
+          <a:noFill/>
+        </p:spPr>
+        <p:txBody>
+          <a:bodyPr wrap="square" lIns="0" rIns="0" tIns="0" bIns="0" anchor="ctr">
+            <a:spAutoFit/>
+          </a:bodyPr>
+          <a:lstStyle/>
+          <a:p>
+            <a:pPr algn="l">
+              <a:lnSpc>
+                <a:spcPct val="118000"/>
+              </a:lnSpc>
+              <a:spcAft>
+                <a:spcPts val="0"/>
+              </a:spcAft>
+            </a:pPr>
+            <a:r>
               <a:rPr sz="1000" b="0">
                 <a:solidFill>
-                  <a:srgbClr val="55677C"/>
+                  <a:srgbClr val="0D1B2A"/>
                 </a:solidFill>
                 <a:latin typeface="Calibri"/>
               </a:rPr>
@@ -4564,21 +4800,149 @@
       </p:sp>
       <p:sp>
         <p:nvSpPr>
-          <p:cNvPr id="21" name="Right Arrow 20"/>
+          <p:cNvPr id="26" name="Rounded Rectangle 25"/>
           <p:cNvSpPr/>
           <p:nvPr/>
         </p:nvSpPr>
         <p:spPr>
           <a:xfrm>
-            <a:off x="3217087" y="2084832"/>
-            <a:ext cx="173736" cy="173736"/>
+            <a:off x="768096" y="4956048"/>
+            <a:ext cx="2471851" cy="502920"/>
+          </a:xfrm>
+          <a:prstGeom prst="roundRect">
+            <a:avLst>
+              <a:gd name="adj" fmla="val 3000"/>
+            </a:avLst>
+          </a:prstGeom>
+          <a:solidFill>
+            <a:srgbClr val="D8ECEF"/>
+          </a:solidFill>
+          <a:ln>
+            <a:noFill/>
+          </a:ln>
+          <a:effectLst/>
+        </p:spPr>
+        <p:style>
+          <a:lnRef idx="1">
+            <a:schemeClr val="accent1"/>
+          </a:lnRef>
+          <a:fillRef idx="3">
+            <a:schemeClr val="accent1"/>
+          </a:fillRef>
+          <a:effectRef idx="2">
+            <a:schemeClr val="accent1"/>
+          </a:effectRef>
+          <a:fontRef idx="minor">
+            <a:schemeClr val="lt1"/>
+          </a:fontRef>
+        </p:style>
+        <p:txBody>
+          <a:bodyPr rtlCol="0" anchor="ctr"/>
+          <a:lstStyle/>
+          <a:p/>
+        </p:txBody>
+      </p:sp>
+      <p:sp>
+        <p:nvSpPr>
+          <p:cNvPr id="27" name="TextBox 26"/>
+          <p:cNvSpPr txBox="1"/>
+          <p:nvPr/>
+        </p:nvSpPr>
+        <p:spPr>
+          <a:xfrm>
+            <a:off x="941832" y="5001768"/>
+            <a:ext cx="2124379" cy="182880"/>
+          </a:xfrm>
+          <a:prstGeom prst="rect">
+            <a:avLst/>
+          </a:prstGeom>
+          <a:noFill/>
+        </p:spPr>
+        <p:txBody>
+          <a:bodyPr wrap="square" lIns="0" rIns="0" tIns="0" bIns="0" anchor="t">
+            <a:spAutoFit/>
+          </a:bodyPr>
+          <a:lstStyle/>
+          <a:p>
+            <a:pPr algn="l">
+              <a:lnSpc>
+                <a:spcPct val="120000"/>
+              </a:lnSpc>
+              <a:spcAft>
+                <a:spcPts val="0"/>
+              </a:spcAft>
+            </a:pPr>
+            <a:r>
+              <a:rPr sz="750" b="1" spc="140">
+                <a:solidFill>
+                  <a:srgbClr val="8B9AAA"/>
+                </a:solidFill>
+                <a:latin typeface="Calibri"/>
+              </a:rPr>
+              <a:t>LEVERT OP</a:t>
+            </a:r>
+          </a:p>
+        </p:txBody>
+      </p:sp>
+      <p:sp>
+        <p:nvSpPr>
+          <p:cNvPr id="28" name="TextBox 27"/>
+          <p:cNvSpPr txBox="1"/>
+          <p:nvPr/>
+        </p:nvSpPr>
+        <p:spPr>
+          <a:xfrm>
+            <a:off x="941832" y="5175504"/>
+            <a:ext cx="2124379" cy="237744"/>
+          </a:xfrm>
+          <a:prstGeom prst="rect">
+            <a:avLst/>
+          </a:prstGeom>
+          <a:noFill/>
+        </p:spPr>
+        <p:txBody>
+          <a:bodyPr wrap="square" lIns="0" rIns="0" tIns="0" bIns="0" anchor="t">
+            <a:spAutoFit/>
+          </a:bodyPr>
+          <a:lstStyle/>
+          <a:p>
+            <a:pPr algn="l">
+              <a:lnSpc>
+                <a:spcPct val="120000"/>
+              </a:lnSpc>
+              <a:spcAft>
+                <a:spcPts val="0"/>
+              </a:spcAft>
+            </a:pPr>
+            <a:r>
+              <a:rPr sz="1150" b="1">
+                <a:solidFill>
+                  <a:srgbClr val="0E9A87"/>
+                </a:solidFill>
+                <a:latin typeface="Calibri"/>
+              </a:rPr>
+              <a:t>bedden per week</a:t>
+            </a:r>
+          </a:p>
+        </p:txBody>
+      </p:sp>
+      <p:sp>
+        <p:nvSpPr>
+          <p:cNvPr id="29" name="Right Arrow 28"/>
+          <p:cNvSpPr/>
+          <p:nvPr/>
+        </p:nvSpPr>
+        <p:spPr>
+          <a:xfrm>
+            <a:off x="6004407" y="2066544"/>
+            <a:ext cx="182880" cy="182880"/>
           </a:xfrm>
           <a:prstGeom prst="rightArrow">
             <a:avLst/>
           </a:prstGeom>
           <a:solidFill>
-            <a:srgbClr val="0E9A87">
-              <a:alpha val="55000"/>
+            <a:srgbClr val="1F6FB2">
+              <a:alpha val="45000"/>
             </a:srgbClr>
           </a:solidFill>
           <a:ln>
@@ -4610,14 +4974,194 @@
       </p:sp>
       <p:sp>
         <p:nvSpPr>
-          <p:cNvPr id="22" name="Rounded Rectangle 21"/>
+          <p:cNvPr id="30" name="Rounded Rectangle 29"/>
           <p:cNvSpPr/>
           <p:nvPr/>
         </p:nvSpPr>
         <p:spPr>
           <a:xfrm>
-            <a:off x="3431971" y="1700784"/>
-            <a:ext cx="2535859" cy="3785615"/>
+            <a:off x="4228985" y="1655064"/>
+            <a:ext cx="1005840" cy="1005840"/>
+          </a:xfrm>
+          <a:prstGeom prst="roundRect">
+            <a:avLst>
+              <a:gd name="adj" fmla="val 50000"/>
+            </a:avLst>
+          </a:prstGeom>
+          <a:solidFill>
+            <a:srgbClr val="DCE8F5"/>
+          </a:solidFill>
+          <a:ln>
+            <a:noFill/>
+          </a:ln>
+          <a:effectLst/>
+        </p:spPr>
+        <p:style>
+          <a:lnRef idx="1">
+            <a:schemeClr val="accent1"/>
+          </a:lnRef>
+          <a:fillRef idx="3">
+            <a:schemeClr val="accent1"/>
+          </a:fillRef>
+          <a:effectRef idx="2">
+            <a:schemeClr val="accent1"/>
+          </a:effectRef>
+          <a:fontRef idx="minor">
+            <a:schemeClr val="lt1"/>
+          </a:fontRef>
+        </p:style>
+        <p:txBody>
+          <a:bodyPr rtlCol="0" anchor="ctr"/>
+          <a:lstStyle/>
+          <a:p/>
+        </p:txBody>
+      </p:sp>
+      <p:sp>
+        <p:nvSpPr>
+          <p:cNvPr id="31" name="Rounded Rectangle 30"/>
+          <p:cNvSpPr/>
+          <p:nvPr/>
+        </p:nvSpPr>
+        <p:spPr>
+          <a:xfrm>
+            <a:off x="4347857" y="1773936"/>
+            <a:ext cx="768096" cy="768096"/>
+          </a:xfrm>
+          <a:prstGeom prst="roundRect">
+            <a:avLst>
+              <a:gd name="adj" fmla="val 50000"/>
+            </a:avLst>
+          </a:prstGeom>
+          <a:solidFill>
+            <a:srgbClr val="FFFFFF"/>
+          </a:solidFill>
+          <a:ln w="25400">
+            <a:solidFill>
+              <a:srgbClr val="1F6FB2"/>
+            </a:solidFill>
+          </a:ln>
+          <a:effectLst>
+            <a:outerShdw blurRad="50000" dist="14000" dir="5400000" rotWithShape="0">
+              <a:srgbClr val="1B3A5C">
+                <a:alpha val="8000"/>
+              </a:srgbClr>
+            </a:outerShdw>
+          </a:effectLst>
+        </p:spPr>
+        <p:style>
+          <a:lnRef idx="1">
+            <a:schemeClr val="accent1"/>
+          </a:lnRef>
+          <a:fillRef idx="3">
+            <a:schemeClr val="accent1"/>
+          </a:fillRef>
+          <a:effectRef idx="2">
+            <a:schemeClr val="accent1"/>
+          </a:effectRef>
+          <a:fontRef idx="minor">
+            <a:schemeClr val="lt1"/>
+          </a:fontRef>
+        </p:style>
+        <p:txBody>
+          <a:bodyPr rtlCol="0" anchor="ctr"/>
+          <a:lstStyle/>
+          <a:p/>
+        </p:txBody>
+      </p:sp>
+      <p:sp>
+        <p:nvSpPr>
+          <p:cNvPr id="32" name="TextBox 31"/>
+          <p:cNvSpPr txBox="1"/>
+          <p:nvPr/>
+        </p:nvSpPr>
+        <p:spPr>
+          <a:xfrm>
+            <a:off x="4347857" y="1956816"/>
+            <a:ext cx="768096" cy="402336"/>
+          </a:xfrm>
+          <a:prstGeom prst="rect">
+            <a:avLst/>
+          </a:prstGeom>
+          <a:noFill/>
+        </p:spPr>
+        <p:txBody>
+          <a:bodyPr wrap="square" lIns="0" rIns="0" tIns="0" bIns="0" anchor="ctr">
+            <a:spAutoFit/>
+          </a:bodyPr>
+          <a:lstStyle/>
+          <a:p>
+            <a:pPr algn="ctr">
+              <a:lnSpc>
+                <a:spcPct val="120000"/>
+              </a:lnSpc>
+              <a:spcAft>
+                <a:spcPts val="0"/>
+              </a:spcAft>
+            </a:pPr>
+            <a:r>
+              <a:rPr sz="2000" b="1">
+                <a:solidFill>
+                  <a:srgbClr val="1F6FB2"/>
+                </a:solidFill>
+                <a:latin typeface="Calibri"/>
+              </a:rPr>
+              <a:t>02</a:t>
+            </a:r>
+          </a:p>
+        </p:txBody>
+      </p:sp>
+      <p:sp>
+        <p:nvSpPr>
+          <p:cNvPr id="33" name="TextBox 32"/>
+          <p:cNvSpPr txBox="1"/>
+          <p:nvPr/>
+        </p:nvSpPr>
+        <p:spPr>
+          <a:xfrm>
+            <a:off x="3486835" y="2724912"/>
+            <a:ext cx="2490139" cy="402336"/>
+          </a:xfrm>
+          <a:prstGeom prst="rect">
+            <a:avLst/>
+          </a:prstGeom>
+          <a:noFill/>
+        </p:spPr>
+        <p:txBody>
+          <a:bodyPr wrap="square" lIns="0" rIns="0" tIns="0" bIns="0" anchor="t">
+            <a:spAutoFit/>
+          </a:bodyPr>
+          <a:lstStyle/>
+          <a:p>
+            <a:pPr algn="ctr">
+              <a:lnSpc>
+                <a:spcPct val="114000"/>
+              </a:lnSpc>
+              <a:spcAft>
+                <a:spcPts val="0"/>
+              </a:spcAft>
+            </a:pPr>
+            <a:r>
+              <a:rPr sz="1600" b="1">
+                <a:solidFill>
+                  <a:srgbClr val="0D1B2A"/>
+                </a:solidFill>
+                <a:latin typeface="Calibri"/>
+              </a:rPr>
+              <a:t>Personele formatie</a:t>
+            </a:r>
+          </a:p>
+        </p:txBody>
+      </p:sp>
+      <p:sp>
+        <p:nvSpPr>
+          <p:cNvPr id="34" name="Rounded Rectangle 33"/>
+          <p:cNvSpPr/>
+          <p:nvPr/>
+        </p:nvSpPr>
+        <p:spPr>
+          <a:xfrm>
+            <a:off x="3486835" y="3163824"/>
+            <a:ext cx="2490139" cy="2304288"/>
           </a:xfrm>
           <a:prstGeom prst="roundRect">
             <a:avLst>
@@ -4662,14 +5206,14 @@
       </p:sp>
       <p:sp>
         <p:nvSpPr>
-          <p:cNvPr id="23" name="Rounded Rectangle 22"/>
+          <p:cNvPr id="35" name="Rounded Rectangle 34"/>
           <p:cNvSpPr/>
           <p:nvPr/>
         </p:nvSpPr>
         <p:spPr>
           <a:xfrm>
-            <a:off x="3431971" y="1700784"/>
-            <a:ext cx="2535859" cy="50292"/>
+            <a:off x="3486835" y="3163824"/>
+            <a:ext cx="2490139" cy="50292"/>
           </a:xfrm>
           <a:prstGeom prst="roundRect">
             <a:avLst>
@@ -4706,71 +5250,14 @@
       </p:sp>
       <p:sp>
         <p:nvSpPr>
-          <p:cNvPr id="24" name="Oval 23"/>
-          <p:cNvSpPr/>
-          <p:nvPr/>
-        </p:nvSpPr>
-        <p:spPr>
-          <a:xfrm>
-            <a:off x="3623995" y="1947672"/>
-            <a:ext cx="457200" cy="457200"/>
-          </a:xfrm>
-          <a:prstGeom prst="ellipse">
-            <a:avLst/>
-          </a:prstGeom>
-          <a:solidFill>
-            <a:srgbClr val="1F6FB2">
-              <a:alpha val="10000"/>
-            </a:srgbClr>
-          </a:solidFill>
-          <a:ln w="15875">
-            <a:solidFill>
-              <a:srgbClr val="1F6FB2"/>
-            </a:solidFill>
-          </a:ln>
-          <a:effectLst/>
-        </p:spPr>
-        <p:style>
-          <a:lnRef idx="1">
-            <a:schemeClr val="accent1"/>
-          </a:lnRef>
-          <a:fillRef idx="3">
-            <a:schemeClr val="accent1"/>
-          </a:fillRef>
-          <a:effectRef idx="2">
-            <a:schemeClr val="accent1"/>
-          </a:effectRef>
-          <a:fontRef idx="minor">
-            <a:schemeClr val="lt1"/>
-          </a:fontRef>
-        </p:style>
-        <p:txBody>
-          <a:bodyPr rtlCol="0" anchor="ctr" wrap="none" lIns="0" rIns="0" tIns="0" bIns="0"/>
-          <a:lstStyle/>
-          <a:p>
-            <a:pPr algn="ctr"/>
-            <a:r>
-              <a:rPr sz="1300" b="1">
-                <a:solidFill>
-                  <a:srgbClr val="1F6FB2"/>
-                </a:solidFill>
-                <a:latin typeface="Calibri"/>
-              </a:rPr>
-              <a:t>02</a:t>
-            </a:r>
-          </a:p>
-        </p:txBody>
-      </p:sp>
-      <p:sp>
-        <p:nvSpPr>
-          <p:cNvPr id="25" name="TextBox 24"/>
+          <p:cNvPr id="36" name="TextBox 35"/>
           <p:cNvSpPr txBox="1"/>
           <p:nvPr/>
         </p:nvSpPr>
         <p:spPr>
           <a:xfrm>
-            <a:off x="3669715" y="2523744"/>
-            <a:ext cx="2060371" cy="548640"/>
+            <a:off x="3669715" y="3346704"/>
+            <a:ext cx="274320" cy="347472"/>
           </a:xfrm>
           <a:prstGeom prst="rect">
             <a:avLst/>
@@ -4778,187 +5265,7 @@
           <a:noFill/>
         </p:spPr>
         <p:txBody>
-          <a:bodyPr wrap="square" lIns="0" rIns="0" tIns="0" bIns="0" anchor="t">
-            <a:spAutoFit/>
-          </a:bodyPr>
-          <a:lstStyle/>
-          <a:p>
-            <a:pPr algn="l">
-              <a:lnSpc>
-                <a:spcPct val="114000"/>
-              </a:lnSpc>
-              <a:spcAft>
-                <a:spcPts val="0"/>
-              </a:spcAft>
-            </a:pPr>
-            <a:r>
-              <a:rPr sz="1550" b="1">
-                <a:solidFill>
-                  <a:srgbClr val="0D1B2A"/>
-                </a:solidFill>
-                <a:latin typeface="Calibri"/>
-              </a:rPr>
-              <a:t>Personele formatie</a:t>
-            </a:r>
-          </a:p>
-        </p:txBody>
-      </p:sp>
-      <p:sp>
-        <p:nvSpPr>
-          <p:cNvPr id="26" name="Rounded Rectangle 25"/>
-          <p:cNvSpPr/>
-          <p:nvPr/>
-        </p:nvSpPr>
-        <p:spPr>
-          <a:xfrm>
-            <a:off x="3669715" y="3108960"/>
-            <a:ext cx="2060371" cy="292608"/>
-          </a:xfrm>
-          <a:prstGeom prst="roundRect">
-            <a:avLst>
-              <a:gd name="adj" fmla="val 50000"/>
-            </a:avLst>
-          </a:prstGeom>
-          <a:solidFill>
-            <a:srgbClr val="1F6FB2">
-              <a:alpha val="11000"/>
-            </a:srgbClr>
-          </a:solidFill>
-          <a:ln w="12700">
-            <a:solidFill>
-              <a:srgbClr val="88B2D7"/>
-            </a:solidFill>
-          </a:ln>
-          <a:effectLst/>
-        </p:spPr>
-        <p:style>
-          <a:lnRef idx="1">
-            <a:schemeClr val="accent1"/>
-          </a:lnRef>
-          <a:fillRef idx="3">
-            <a:schemeClr val="accent1"/>
-          </a:fillRef>
-          <a:effectRef idx="2">
-            <a:schemeClr val="accent1"/>
-          </a:effectRef>
-          <a:fontRef idx="minor">
-            <a:schemeClr val="lt1"/>
-          </a:fontRef>
-        </p:style>
-        <p:txBody>
-          <a:bodyPr rtlCol="0" anchor="ctr" wrap="square" lIns="64008" rIns="64008" tIns="0" bIns="0"/>
-          <a:lstStyle/>
-          <a:p>
-            <a:pPr algn="ctr"/>
-            <a:r>
-              <a:rPr sz="1000" b="1">
-                <a:solidFill>
-                  <a:srgbClr val="1F6FB2"/>
-                </a:solidFill>
-                <a:latin typeface="Calibri"/>
-              </a:rPr>
-              <a:t>fte per afdeling</a:t>
-            </a:r>
-          </a:p>
-        </p:txBody>
-      </p:sp>
-      <p:cxnSp>
-        <p:nvCxnSpPr>
-          <p:cNvPr id="27" name="Connector 26"/>
-          <p:cNvCxnSpPr/>
-          <p:nvPr/>
-        </p:nvCxnSpPr>
-        <p:spPr>
-          <a:xfrm>
-            <a:off x="3669715" y="3566160"/>
-            <a:ext cx="2060372" cy="0"/>
-          </a:xfrm>
-          <a:prstGeom prst="line">
-            <a:avLst/>
-          </a:prstGeom>
-          <a:ln w="12700">
-            <a:solidFill>
-              <a:srgbClr val="E2E9F1"/>
-            </a:solidFill>
-          </a:ln>
-        </p:spPr>
-        <p:style>
-          <a:lnRef idx="2">
-            <a:schemeClr val="accent1"/>
-          </a:lnRef>
-          <a:fillRef idx="0">
-            <a:schemeClr val="accent1"/>
-          </a:fillRef>
-          <a:effectRef idx="1">
-            <a:schemeClr val="accent1"/>
-          </a:effectRef>
-          <a:fontRef idx="minor">
-            <a:schemeClr val="tx1"/>
-          </a:fontRef>
-        </p:style>
-      </p:cxnSp>
-      <p:sp>
-        <p:nvSpPr>
-          <p:cNvPr id="28" name="Oval 27"/>
-          <p:cNvSpPr/>
-          <p:nvPr/>
-        </p:nvSpPr>
-        <p:spPr>
-          <a:xfrm>
-            <a:off x="3701719" y="3771900"/>
-            <a:ext cx="82296" cy="82296"/>
-          </a:xfrm>
-          <a:prstGeom prst="ellipse">
-            <a:avLst/>
-          </a:prstGeom>
-          <a:solidFill>
-            <a:srgbClr val="1F6FB2"/>
-          </a:solidFill>
-          <a:ln>
-            <a:noFill/>
-          </a:ln>
-          <a:effectLst/>
-        </p:spPr>
-        <p:style>
-          <a:lnRef idx="1">
-            <a:schemeClr val="accent1"/>
-          </a:lnRef>
-          <a:fillRef idx="3">
-            <a:schemeClr val="accent1"/>
-          </a:fillRef>
-          <a:effectRef idx="2">
-            <a:schemeClr val="accent1"/>
-          </a:effectRef>
-          <a:fontRef idx="minor">
-            <a:schemeClr val="lt1"/>
-          </a:fontRef>
-        </p:style>
-        <p:txBody>
-          <a:bodyPr rtlCol="0" anchor="ctr"/>
-          <a:lstStyle/>
-          <a:p>
-            <a:pPr algn="ctr"/>
-          </a:p>
-        </p:txBody>
-      </p:sp>
-      <p:sp>
-        <p:nvSpPr>
-          <p:cNvPr id="29" name="TextBox 28"/>
-          <p:cNvSpPr txBox="1"/>
-          <p:nvPr/>
-        </p:nvSpPr>
-        <p:spPr>
-          <a:xfrm>
-            <a:off x="3925747" y="3712464"/>
-            <a:ext cx="1804339" cy="364743"/>
-          </a:xfrm>
-          <a:prstGeom prst="rect">
-            <a:avLst/>
-          </a:prstGeom>
-          <a:noFill/>
-        </p:spPr>
-        <p:txBody>
-          <a:bodyPr wrap="square" lIns="0" rIns="0" tIns="0" bIns="0" anchor="t">
+          <a:bodyPr wrap="square" lIns="0" rIns="0" tIns="0" bIns="0" anchor="ctr">
             <a:spAutoFit/>
           </a:bodyPr>
           <a:lstStyle/>
@@ -4972,9 +5279,51 @@
               </a:spcAft>
             </a:pPr>
             <a:r>
+              <a:rPr sz="850" b="1">
+                <a:solidFill>
+                  <a:srgbClr val="5793C5"/>
+                </a:solidFill>
+                <a:latin typeface="Calibri"/>
+              </a:rPr>
+              <a:t>01</a:t>
+            </a:r>
+          </a:p>
+        </p:txBody>
+      </p:sp>
+      <p:sp>
+        <p:nvSpPr>
+          <p:cNvPr id="37" name="TextBox 36"/>
+          <p:cNvSpPr txBox="1"/>
+          <p:nvPr/>
+        </p:nvSpPr>
+        <p:spPr>
+          <a:xfrm>
+            <a:off x="3962323" y="3346704"/>
+            <a:ext cx="1831771" cy="347472"/>
+          </a:xfrm>
+          <a:prstGeom prst="rect">
+            <a:avLst/>
+          </a:prstGeom>
+          <a:noFill/>
+        </p:spPr>
+        <p:txBody>
+          <a:bodyPr wrap="square" lIns="0" rIns="0" tIns="0" bIns="0" anchor="ctr">
+            <a:spAutoFit/>
+          </a:bodyPr>
+          <a:lstStyle/>
+          <a:p>
+            <a:pPr algn="l">
+              <a:lnSpc>
+                <a:spcPct val="118000"/>
+              </a:lnSpc>
+              <a:spcAft>
+                <a:spcPts val="0"/>
+              </a:spcAft>
+            </a:pPr>
+            <a:r>
               <a:rPr sz="1000" b="0">
                 <a:solidFill>
-                  <a:srgbClr val="55677C"/>
+                  <a:srgbClr val="0D1B2A"/>
                 </a:solidFill>
                 <a:latin typeface="Calibri"/>
               </a:rPr>
@@ -4983,60 +5332,51 @@
           </a:p>
         </p:txBody>
       </p:sp>
-      <p:sp>
-        <p:nvSpPr>
-          <p:cNvPr id="30" name="Oval 29"/>
-          <p:cNvSpPr/>
-          <p:nvPr/>
-        </p:nvSpPr>
-        <p:spPr>
-          <a:xfrm>
-            <a:off x="3701719" y="4232317"/>
-            <a:ext cx="82296" cy="82296"/>
-          </a:xfrm>
-          <a:prstGeom prst="ellipse">
-            <a:avLst/>
-          </a:prstGeom>
-          <a:solidFill>
-            <a:srgbClr val="1F6FB2"/>
-          </a:solidFill>
-          <a:ln>
-            <a:noFill/>
+      <p:cxnSp>
+        <p:nvCxnSpPr>
+          <p:cNvPr id="38" name="Connector 37"/>
+          <p:cNvCxnSpPr/>
+          <p:nvPr/>
+        </p:nvCxnSpPr>
+        <p:spPr>
+          <a:xfrm>
+            <a:off x="3669715" y="3730752"/>
+            <a:ext cx="2124380" cy="0"/>
+          </a:xfrm>
+          <a:prstGeom prst="line">
+            <a:avLst/>
+          </a:prstGeom>
+          <a:ln w="9525">
+            <a:solidFill>
+              <a:srgbClr val="E2E9F1"/>
+            </a:solidFill>
           </a:ln>
-          <a:effectLst/>
         </p:spPr>
         <p:style>
-          <a:lnRef idx="1">
+          <a:lnRef idx="2">
             <a:schemeClr val="accent1"/>
           </a:lnRef>
-          <a:fillRef idx="3">
+          <a:fillRef idx="0">
             <a:schemeClr val="accent1"/>
           </a:fillRef>
-          <a:effectRef idx="2">
+          <a:effectRef idx="1">
             <a:schemeClr val="accent1"/>
           </a:effectRef>
           <a:fontRef idx="minor">
-            <a:schemeClr val="lt1"/>
+            <a:schemeClr val="tx1"/>
           </a:fontRef>
         </p:style>
-        <p:txBody>
-          <a:bodyPr rtlCol="0" anchor="ctr"/>
-          <a:lstStyle/>
-          <a:p>
-            <a:pPr algn="ctr"/>
-          </a:p>
-        </p:txBody>
-      </p:sp>
-      <p:sp>
-        <p:nvSpPr>
-          <p:cNvPr id="31" name="TextBox 30"/>
+      </p:cxnSp>
+      <p:sp>
+        <p:nvSpPr>
+          <p:cNvPr id="39" name="TextBox 38"/>
           <p:cNvSpPr txBox="1"/>
           <p:nvPr/>
         </p:nvSpPr>
         <p:spPr>
           <a:xfrm>
-            <a:off x="3925747" y="4172881"/>
-            <a:ext cx="1804339" cy="209803"/>
+            <a:off x="3669715" y="3767328"/>
+            <a:ext cx="274320" cy="347472"/>
           </a:xfrm>
           <a:prstGeom prst="rect">
             <a:avLst/>
@@ -5044,7 +5384,7 @@
           <a:noFill/>
         </p:spPr>
         <p:txBody>
-          <a:bodyPr wrap="square" lIns="0" rIns="0" tIns="0" bIns="0" anchor="t">
+          <a:bodyPr wrap="square" lIns="0" rIns="0" tIns="0" bIns="0" anchor="ctr">
             <a:spAutoFit/>
           </a:bodyPr>
           <a:lstStyle/>
@@ -5058,9 +5398,51 @@
               </a:spcAft>
             </a:pPr>
             <a:r>
+              <a:rPr sz="850" b="1">
+                <a:solidFill>
+                  <a:srgbClr val="5793C5"/>
+                </a:solidFill>
+                <a:latin typeface="Calibri"/>
+              </a:rPr>
+              <a:t>02</a:t>
+            </a:r>
+          </a:p>
+        </p:txBody>
+      </p:sp>
+      <p:sp>
+        <p:nvSpPr>
+          <p:cNvPr id="40" name="TextBox 39"/>
+          <p:cNvSpPr txBox="1"/>
+          <p:nvPr/>
+        </p:nvSpPr>
+        <p:spPr>
+          <a:xfrm>
+            <a:off x="3962323" y="3767328"/>
+            <a:ext cx="1831771" cy="347472"/>
+          </a:xfrm>
+          <a:prstGeom prst="rect">
+            <a:avLst/>
+          </a:prstGeom>
+          <a:noFill/>
+        </p:spPr>
+        <p:txBody>
+          <a:bodyPr wrap="square" lIns="0" rIns="0" tIns="0" bIns="0" anchor="ctr">
+            <a:spAutoFit/>
+          </a:bodyPr>
+          <a:lstStyle/>
+          <a:p>
+            <a:pPr algn="l">
+              <a:lnSpc>
+                <a:spcPct val="118000"/>
+              </a:lnSpc>
+              <a:spcAft>
+                <a:spcPts val="0"/>
+              </a:spcAft>
+            </a:pPr>
+            <a:r>
               <a:rPr sz="1000" b="0">
                 <a:solidFill>
-                  <a:srgbClr val="55677C"/>
+                  <a:srgbClr val="0D1B2A"/>
                 </a:solidFill>
                 <a:latin typeface="Calibri"/>
               </a:rPr>
@@ -5069,60 +5451,51 @@
           </a:p>
         </p:txBody>
       </p:sp>
-      <p:sp>
-        <p:nvSpPr>
-          <p:cNvPr id="32" name="Oval 31"/>
-          <p:cNvSpPr/>
-          <p:nvPr/>
-        </p:nvSpPr>
-        <p:spPr>
-          <a:xfrm>
-            <a:off x="3701719" y="4537794"/>
-            <a:ext cx="82296" cy="82296"/>
-          </a:xfrm>
-          <a:prstGeom prst="ellipse">
-            <a:avLst/>
-          </a:prstGeom>
-          <a:solidFill>
-            <a:srgbClr val="1F6FB2"/>
-          </a:solidFill>
-          <a:ln>
-            <a:noFill/>
+      <p:cxnSp>
+        <p:nvCxnSpPr>
+          <p:cNvPr id="41" name="Connector 40"/>
+          <p:cNvCxnSpPr/>
+          <p:nvPr/>
+        </p:nvCxnSpPr>
+        <p:spPr>
+          <a:xfrm>
+            <a:off x="3669715" y="4151376"/>
+            <a:ext cx="2124380" cy="0"/>
+          </a:xfrm>
+          <a:prstGeom prst="line">
+            <a:avLst/>
+          </a:prstGeom>
+          <a:ln w="9525">
+            <a:solidFill>
+              <a:srgbClr val="E2E9F1"/>
+            </a:solidFill>
           </a:ln>
-          <a:effectLst/>
         </p:spPr>
         <p:style>
-          <a:lnRef idx="1">
+          <a:lnRef idx="2">
             <a:schemeClr val="accent1"/>
           </a:lnRef>
-          <a:fillRef idx="3">
+          <a:fillRef idx="0">
             <a:schemeClr val="accent1"/>
           </a:fillRef>
-          <a:effectRef idx="2">
+          <a:effectRef idx="1">
             <a:schemeClr val="accent1"/>
           </a:effectRef>
           <a:fontRef idx="minor">
-            <a:schemeClr val="lt1"/>
+            <a:schemeClr val="tx1"/>
           </a:fontRef>
         </p:style>
-        <p:txBody>
-          <a:bodyPr rtlCol="0" anchor="ctr"/>
-          <a:lstStyle/>
-          <a:p>
-            <a:pPr algn="ctr"/>
-          </a:p>
-        </p:txBody>
-      </p:sp>
-      <p:sp>
-        <p:nvSpPr>
-          <p:cNvPr id="33" name="TextBox 32"/>
+      </p:cxnSp>
+      <p:sp>
+        <p:nvSpPr>
+          <p:cNvPr id="42" name="TextBox 41"/>
           <p:cNvSpPr txBox="1"/>
           <p:nvPr/>
         </p:nvSpPr>
         <p:spPr>
           <a:xfrm>
-            <a:off x="3925747" y="4478358"/>
-            <a:ext cx="1804339" cy="364743"/>
+            <a:off x="3669715" y="4187952"/>
+            <a:ext cx="274320" cy="347472"/>
           </a:xfrm>
           <a:prstGeom prst="rect">
             <a:avLst/>
@@ -5130,7 +5503,7 @@
           <a:noFill/>
         </p:spPr>
         <p:txBody>
-          <a:bodyPr wrap="square" lIns="0" rIns="0" tIns="0" bIns="0" anchor="t">
+          <a:bodyPr wrap="square" lIns="0" rIns="0" tIns="0" bIns="0" anchor="ctr">
             <a:spAutoFit/>
           </a:bodyPr>
           <a:lstStyle/>
@@ -5144,9 +5517,51 @@
               </a:spcAft>
             </a:pPr>
             <a:r>
+              <a:rPr sz="850" b="1">
+                <a:solidFill>
+                  <a:srgbClr val="5793C5"/>
+                </a:solidFill>
+                <a:latin typeface="Calibri"/>
+              </a:rPr>
+              <a:t>03</a:t>
+            </a:r>
+          </a:p>
+        </p:txBody>
+      </p:sp>
+      <p:sp>
+        <p:nvSpPr>
+          <p:cNvPr id="43" name="TextBox 42"/>
+          <p:cNvSpPr txBox="1"/>
+          <p:nvPr/>
+        </p:nvSpPr>
+        <p:spPr>
+          <a:xfrm>
+            <a:off x="3962323" y="4187952"/>
+            <a:ext cx="1831771" cy="347472"/>
+          </a:xfrm>
+          <a:prstGeom prst="rect">
+            <a:avLst/>
+          </a:prstGeom>
+          <a:noFill/>
+        </p:spPr>
+        <p:txBody>
+          <a:bodyPr wrap="square" lIns="0" rIns="0" tIns="0" bIns="0" anchor="ctr">
+            <a:spAutoFit/>
+          </a:bodyPr>
+          <a:lstStyle/>
+          <a:p>
+            <a:pPr algn="l">
+              <a:lnSpc>
+                <a:spcPct val="118000"/>
+              </a:lnSpc>
+              <a:spcAft>
+                <a:spcPts val="0"/>
+              </a:spcAft>
+            </a:pPr>
+            <a:r>
               <a:rPr sz="1000" b="0">
                 <a:solidFill>
-                  <a:srgbClr val="55677C"/>
+                  <a:srgbClr val="0D1B2A"/>
                 </a:solidFill>
                 <a:latin typeface="Calibri"/>
               </a:rPr>
@@ -5155,60 +5570,51 @@
           </a:p>
         </p:txBody>
       </p:sp>
-      <p:sp>
-        <p:nvSpPr>
-          <p:cNvPr id="34" name="Oval 33"/>
-          <p:cNvSpPr/>
-          <p:nvPr/>
-        </p:nvSpPr>
-        <p:spPr>
-          <a:xfrm>
-            <a:off x="3701719" y="4998212"/>
-            <a:ext cx="82296" cy="82296"/>
-          </a:xfrm>
-          <a:prstGeom prst="ellipse">
-            <a:avLst/>
-          </a:prstGeom>
-          <a:solidFill>
-            <a:srgbClr val="1F6FB2"/>
-          </a:solidFill>
-          <a:ln>
-            <a:noFill/>
+      <p:cxnSp>
+        <p:nvCxnSpPr>
+          <p:cNvPr id="44" name="Connector 43"/>
+          <p:cNvCxnSpPr/>
+          <p:nvPr/>
+        </p:nvCxnSpPr>
+        <p:spPr>
+          <a:xfrm>
+            <a:off x="3669715" y="4572000"/>
+            <a:ext cx="2124380" cy="0"/>
+          </a:xfrm>
+          <a:prstGeom prst="line">
+            <a:avLst/>
+          </a:prstGeom>
+          <a:ln w="9525">
+            <a:solidFill>
+              <a:srgbClr val="E2E9F1"/>
+            </a:solidFill>
           </a:ln>
-          <a:effectLst/>
         </p:spPr>
         <p:style>
-          <a:lnRef idx="1">
+          <a:lnRef idx="2">
             <a:schemeClr val="accent1"/>
           </a:lnRef>
-          <a:fillRef idx="3">
+          <a:fillRef idx="0">
             <a:schemeClr val="accent1"/>
           </a:fillRef>
-          <a:effectRef idx="2">
+          <a:effectRef idx="1">
             <a:schemeClr val="accent1"/>
           </a:effectRef>
           <a:fontRef idx="minor">
-            <a:schemeClr val="lt1"/>
+            <a:schemeClr val="tx1"/>
           </a:fontRef>
         </p:style>
-        <p:txBody>
-          <a:bodyPr rtlCol="0" anchor="ctr"/>
-          <a:lstStyle/>
-          <a:p>
-            <a:pPr algn="ctr"/>
-          </a:p>
-        </p:txBody>
-      </p:sp>
-      <p:sp>
-        <p:nvSpPr>
-          <p:cNvPr id="35" name="TextBox 34"/>
+      </p:cxnSp>
+      <p:sp>
+        <p:nvSpPr>
+          <p:cNvPr id="45" name="TextBox 44"/>
           <p:cNvSpPr txBox="1"/>
           <p:nvPr/>
         </p:nvSpPr>
         <p:spPr>
           <a:xfrm>
-            <a:off x="3925747" y="4938776"/>
-            <a:ext cx="1804339" cy="364743"/>
+            <a:off x="3669715" y="4608576"/>
+            <a:ext cx="274320" cy="347472"/>
           </a:xfrm>
           <a:prstGeom prst="rect">
             <a:avLst/>
@@ -5216,7 +5622,7 @@
           <a:noFill/>
         </p:spPr>
         <p:txBody>
-          <a:bodyPr wrap="square" lIns="0" rIns="0" tIns="0" bIns="0" anchor="t">
+          <a:bodyPr wrap="square" lIns="0" rIns="0" tIns="0" bIns="0" anchor="ctr">
             <a:spAutoFit/>
           </a:bodyPr>
           <a:lstStyle/>
@@ -5230,9 +5636,51 @@
               </a:spcAft>
             </a:pPr>
             <a:r>
+              <a:rPr sz="850" b="1">
+                <a:solidFill>
+                  <a:srgbClr val="5793C5"/>
+                </a:solidFill>
+                <a:latin typeface="Calibri"/>
+              </a:rPr>
+              <a:t>04</a:t>
+            </a:r>
+          </a:p>
+        </p:txBody>
+      </p:sp>
+      <p:sp>
+        <p:nvSpPr>
+          <p:cNvPr id="46" name="TextBox 45"/>
+          <p:cNvSpPr txBox="1"/>
+          <p:nvPr/>
+        </p:nvSpPr>
+        <p:spPr>
+          <a:xfrm>
+            <a:off x="3962323" y="4608576"/>
+            <a:ext cx="1831771" cy="347472"/>
+          </a:xfrm>
+          <a:prstGeom prst="rect">
+            <a:avLst/>
+          </a:prstGeom>
+          <a:noFill/>
+        </p:spPr>
+        <p:txBody>
+          <a:bodyPr wrap="square" lIns="0" rIns="0" tIns="0" bIns="0" anchor="ctr">
+            <a:spAutoFit/>
+          </a:bodyPr>
+          <a:lstStyle/>
+          <a:p>
+            <a:pPr algn="l">
+              <a:lnSpc>
+                <a:spcPct val="118000"/>
+              </a:lnSpc>
+              <a:spcAft>
+                <a:spcPts val="0"/>
+              </a:spcAft>
+            </a:pPr>
+            <a:r>
               <a:rPr sz="1000" b="0">
                 <a:solidFill>
-                  <a:srgbClr val="55677C"/>
+                  <a:srgbClr val="0D1B2A"/>
                 </a:solidFill>
                 <a:latin typeface="Calibri"/>
               </a:rPr>
@@ -5243,21 +5691,149 @@
       </p:sp>
       <p:sp>
         <p:nvSpPr>
-          <p:cNvPr id="36" name="Right Arrow 35"/>
+          <p:cNvPr id="47" name="Rounded Rectangle 46"/>
           <p:cNvSpPr/>
           <p:nvPr/>
         </p:nvSpPr>
         <p:spPr>
           <a:xfrm>
-            <a:off x="6008979" y="2084832"/>
-            <a:ext cx="173736" cy="173736"/>
+            <a:off x="3495979" y="4956048"/>
+            <a:ext cx="2471851" cy="502920"/>
+          </a:xfrm>
+          <a:prstGeom prst="roundRect">
+            <a:avLst>
+              <a:gd name="adj" fmla="val 3000"/>
+            </a:avLst>
+          </a:prstGeom>
+          <a:solidFill>
+            <a:srgbClr val="DAE7F4"/>
+          </a:solidFill>
+          <a:ln>
+            <a:noFill/>
+          </a:ln>
+          <a:effectLst/>
+        </p:spPr>
+        <p:style>
+          <a:lnRef idx="1">
+            <a:schemeClr val="accent1"/>
+          </a:lnRef>
+          <a:fillRef idx="3">
+            <a:schemeClr val="accent1"/>
+          </a:fillRef>
+          <a:effectRef idx="2">
+            <a:schemeClr val="accent1"/>
+          </a:effectRef>
+          <a:fontRef idx="minor">
+            <a:schemeClr val="lt1"/>
+          </a:fontRef>
+        </p:style>
+        <p:txBody>
+          <a:bodyPr rtlCol="0" anchor="ctr"/>
+          <a:lstStyle/>
+          <a:p/>
+        </p:txBody>
+      </p:sp>
+      <p:sp>
+        <p:nvSpPr>
+          <p:cNvPr id="48" name="TextBox 47"/>
+          <p:cNvSpPr txBox="1"/>
+          <p:nvPr/>
+        </p:nvSpPr>
+        <p:spPr>
+          <a:xfrm>
+            <a:off x="3669715" y="5001768"/>
+            <a:ext cx="2124379" cy="182880"/>
+          </a:xfrm>
+          <a:prstGeom prst="rect">
+            <a:avLst/>
+          </a:prstGeom>
+          <a:noFill/>
+        </p:spPr>
+        <p:txBody>
+          <a:bodyPr wrap="square" lIns="0" rIns="0" tIns="0" bIns="0" anchor="t">
+            <a:spAutoFit/>
+          </a:bodyPr>
+          <a:lstStyle/>
+          <a:p>
+            <a:pPr algn="l">
+              <a:lnSpc>
+                <a:spcPct val="120000"/>
+              </a:lnSpc>
+              <a:spcAft>
+                <a:spcPts val="0"/>
+              </a:spcAft>
+            </a:pPr>
+            <a:r>
+              <a:rPr sz="750" b="1" spc="140">
+                <a:solidFill>
+                  <a:srgbClr val="8B9AAA"/>
+                </a:solidFill>
+                <a:latin typeface="Calibri"/>
+              </a:rPr>
+              <a:t>LEVERT OP</a:t>
+            </a:r>
+          </a:p>
+        </p:txBody>
+      </p:sp>
+      <p:sp>
+        <p:nvSpPr>
+          <p:cNvPr id="49" name="TextBox 48"/>
+          <p:cNvSpPr txBox="1"/>
+          <p:nvPr/>
+        </p:nvSpPr>
+        <p:spPr>
+          <a:xfrm>
+            <a:off x="3669715" y="5175504"/>
+            <a:ext cx="2124379" cy="237744"/>
+          </a:xfrm>
+          <a:prstGeom prst="rect">
+            <a:avLst/>
+          </a:prstGeom>
+          <a:noFill/>
+        </p:spPr>
+        <p:txBody>
+          <a:bodyPr wrap="square" lIns="0" rIns="0" tIns="0" bIns="0" anchor="t">
+            <a:spAutoFit/>
+          </a:bodyPr>
+          <a:lstStyle/>
+          <a:p>
+            <a:pPr algn="l">
+              <a:lnSpc>
+                <a:spcPct val="120000"/>
+              </a:lnSpc>
+              <a:spcAft>
+                <a:spcPts val="0"/>
+              </a:spcAft>
+            </a:pPr>
+            <a:r>
+              <a:rPr sz="1150" b="1">
+                <a:solidFill>
+                  <a:srgbClr val="1F6FB2"/>
+                </a:solidFill>
+                <a:latin typeface="Calibri"/>
+              </a:rPr>
+              <a:t>fte per afdeling</a:t>
+            </a:r>
+          </a:p>
+        </p:txBody>
+      </p:sp>
+      <p:sp>
+        <p:nvSpPr>
+          <p:cNvPr id="50" name="Right Arrow 49"/>
+          <p:cNvSpPr/>
+          <p:nvPr/>
+        </p:nvSpPr>
+        <p:spPr>
+          <a:xfrm>
+            <a:off x="8732291" y="2066544"/>
+            <a:ext cx="182880" cy="182880"/>
           </a:xfrm>
           <a:prstGeom prst="rightArrow">
             <a:avLst/>
           </a:prstGeom>
           <a:solidFill>
-            <a:srgbClr val="1F6FB2">
-              <a:alpha val="55000"/>
+            <a:srgbClr val="6B4BA8">
+              <a:alpha val="45000"/>
             </a:srgbClr>
           </a:solidFill>
           <a:ln>
@@ -5289,14 +5865,194 @@
       </p:sp>
       <p:sp>
         <p:nvSpPr>
-          <p:cNvPr id="37" name="Rounded Rectangle 36"/>
+          <p:cNvPr id="51" name="Rounded Rectangle 50"/>
           <p:cNvSpPr/>
           <p:nvPr/>
         </p:nvSpPr>
         <p:spPr>
           <a:xfrm>
-            <a:off x="6223863" y="1700784"/>
-            <a:ext cx="2535859" cy="3785615"/>
+            <a:off x="6956869" y="1655064"/>
+            <a:ext cx="1005840" cy="1005840"/>
+          </a:xfrm>
+          <a:prstGeom prst="roundRect">
+            <a:avLst>
+              <a:gd name="adj" fmla="val 50000"/>
+            </a:avLst>
+          </a:prstGeom>
+          <a:solidFill>
+            <a:srgbClr val="E4E5F4"/>
+          </a:solidFill>
+          <a:ln>
+            <a:noFill/>
+          </a:ln>
+          <a:effectLst/>
+        </p:spPr>
+        <p:style>
+          <a:lnRef idx="1">
+            <a:schemeClr val="accent1"/>
+          </a:lnRef>
+          <a:fillRef idx="3">
+            <a:schemeClr val="accent1"/>
+          </a:fillRef>
+          <a:effectRef idx="2">
+            <a:schemeClr val="accent1"/>
+          </a:effectRef>
+          <a:fontRef idx="minor">
+            <a:schemeClr val="lt1"/>
+          </a:fontRef>
+        </p:style>
+        <p:txBody>
+          <a:bodyPr rtlCol="0" anchor="ctr"/>
+          <a:lstStyle/>
+          <a:p/>
+        </p:txBody>
+      </p:sp>
+      <p:sp>
+        <p:nvSpPr>
+          <p:cNvPr id="52" name="Rounded Rectangle 51"/>
+          <p:cNvSpPr/>
+          <p:nvPr/>
+        </p:nvSpPr>
+        <p:spPr>
+          <a:xfrm>
+            <a:off x="7075741" y="1773936"/>
+            <a:ext cx="768096" cy="768096"/>
+          </a:xfrm>
+          <a:prstGeom prst="roundRect">
+            <a:avLst>
+              <a:gd name="adj" fmla="val 50000"/>
+            </a:avLst>
+          </a:prstGeom>
+          <a:solidFill>
+            <a:srgbClr val="FFFFFF"/>
+          </a:solidFill>
+          <a:ln w="25400">
+            <a:solidFill>
+              <a:srgbClr val="6B4BA8"/>
+            </a:solidFill>
+          </a:ln>
+          <a:effectLst>
+            <a:outerShdw blurRad="50000" dist="14000" dir="5400000" rotWithShape="0">
+              <a:srgbClr val="1B3A5C">
+                <a:alpha val="8000"/>
+              </a:srgbClr>
+            </a:outerShdw>
+          </a:effectLst>
+        </p:spPr>
+        <p:style>
+          <a:lnRef idx="1">
+            <a:schemeClr val="accent1"/>
+          </a:lnRef>
+          <a:fillRef idx="3">
+            <a:schemeClr val="accent1"/>
+          </a:fillRef>
+          <a:effectRef idx="2">
+            <a:schemeClr val="accent1"/>
+          </a:effectRef>
+          <a:fontRef idx="minor">
+            <a:schemeClr val="lt1"/>
+          </a:fontRef>
+        </p:style>
+        <p:txBody>
+          <a:bodyPr rtlCol="0" anchor="ctr"/>
+          <a:lstStyle/>
+          <a:p/>
+        </p:txBody>
+      </p:sp>
+      <p:sp>
+        <p:nvSpPr>
+          <p:cNvPr id="53" name="TextBox 52"/>
+          <p:cNvSpPr txBox="1"/>
+          <p:nvPr/>
+        </p:nvSpPr>
+        <p:spPr>
+          <a:xfrm>
+            <a:off x="7075741" y="1956816"/>
+            <a:ext cx="768096" cy="402336"/>
+          </a:xfrm>
+          <a:prstGeom prst="rect">
+            <a:avLst/>
+          </a:prstGeom>
+          <a:noFill/>
+        </p:spPr>
+        <p:txBody>
+          <a:bodyPr wrap="square" lIns="0" rIns="0" tIns="0" bIns="0" anchor="ctr">
+            <a:spAutoFit/>
+          </a:bodyPr>
+          <a:lstStyle/>
+          <a:p>
+            <a:pPr algn="ctr">
+              <a:lnSpc>
+                <a:spcPct val="120000"/>
+              </a:lnSpc>
+              <a:spcAft>
+                <a:spcPts val="0"/>
+              </a:spcAft>
+            </a:pPr>
+            <a:r>
+              <a:rPr sz="2000" b="1">
+                <a:solidFill>
+                  <a:srgbClr val="6B4BA8"/>
+                </a:solidFill>
+                <a:latin typeface="Calibri"/>
+              </a:rPr>
+              <a:t>03</a:t>
+            </a:r>
+          </a:p>
+        </p:txBody>
+      </p:sp>
+      <p:sp>
+        <p:nvSpPr>
+          <p:cNvPr id="54" name="TextBox 53"/>
+          <p:cNvSpPr txBox="1"/>
+          <p:nvPr/>
+        </p:nvSpPr>
+        <p:spPr>
+          <a:xfrm>
+            <a:off x="6214719" y="2724912"/>
+            <a:ext cx="2490139" cy="402336"/>
+          </a:xfrm>
+          <a:prstGeom prst="rect">
+            <a:avLst/>
+          </a:prstGeom>
+          <a:noFill/>
+        </p:spPr>
+        <p:txBody>
+          <a:bodyPr wrap="square" lIns="0" rIns="0" tIns="0" bIns="0" anchor="t">
+            <a:spAutoFit/>
+          </a:bodyPr>
+          <a:lstStyle/>
+          <a:p>
+            <a:pPr algn="ctr">
+              <a:lnSpc>
+                <a:spcPct val="114000"/>
+              </a:lnSpc>
+              <a:spcAft>
+                <a:spcPts val="0"/>
+              </a:spcAft>
+            </a:pPr>
+            <a:r>
+              <a:rPr sz="1600" b="1">
+                <a:solidFill>
+                  <a:srgbClr val="0D1B2A"/>
+                </a:solidFill>
+                <a:latin typeface="Calibri"/>
+              </a:rPr>
+              <a:t>Personele planning</a:t>
+            </a:r>
+          </a:p>
+        </p:txBody>
+      </p:sp>
+      <p:sp>
+        <p:nvSpPr>
+          <p:cNvPr id="55" name="Rounded Rectangle 54"/>
+          <p:cNvSpPr/>
+          <p:nvPr/>
+        </p:nvSpPr>
+        <p:spPr>
+          <a:xfrm>
+            <a:off x="6214719" y="3163824"/>
+            <a:ext cx="2490139" cy="2304288"/>
           </a:xfrm>
           <a:prstGeom prst="roundRect">
             <a:avLst>
@@ -5341,14 +6097,14 @@
       </p:sp>
       <p:sp>
         <p:nvSpPr>
-          <p:cNvPr id="38" name="Rounded Rectangle 37"/>
+          <p:cNvPr id="56" name="Rounded Rectangle 55"/>
           <p:cNvSpPr/>
           <p:nvPr/>
         </p:nvSpPr>
         <p:spPr>
           <a:xfrm>
-            <a:off x="6223863" y="1700784"/>
-            <a:ext cx="2535859" cy="50292"/>
+            <a:off x="6214719" y="3163824"/>
+            <a:ext cx="2490139" cy="50292"/>
           </a:xfrm>
           <a:prstGeom prst="roundRect">
             <a:avLst>
@@ -5385,71 +6141,14 @@
       </p:sp>
       <p:sp>
         <p:nvSpPr>
-          <p:cNvPr id="39" name="Oval 38"/>
-          <p:cNvSpPr/>
-          <p:nvPr/>
-        </p:nvSpPr>
-        <p:spPr>
-          <a:xfrm>
-            <a:off x="6415887" y="1947672"/>
-            <a:ext cx="457200" cy="457200"/>
-          </a:xfrm>
-          <a:prstGeom prst="ellipse">
-            <a:avLst/>
-          </a:prstGeom>
-          <a:solidFill>
-            <a:srgbClr val="6B4BA8">
-              <a:alpha val="10000"/>
-            </a:srgbClr>
-          </a:solidFill>
-          <a:ln w="15875">
-            <a:solidFill>
-              <a:srgbClr val="6B4BA8"/>
-            </a:solidFill>
-          </a:ln>
-          <a:effectLst/>
-        </p:spPr>
-        <p:style>
-          <a:lnRef idx="1">
-            <a:schemeClr val="accent1"/>
-          </a:lnRef>
-          <a:fillRef idx="3">
-            <a:schemeClr val="accent1"/>
-          </a:fillRef>
-          <a:effectRef idx="2">
-            <a:schemeClr val="accent1"/>
-          </a:effectRef>
-          <a:fontRef idx="minor">
-            <a:schemeClr val="lt1"/>
-          </a:fontRef>
-        </p:style>
-        <p:txBody>
-          <a:bodyPr rtlCol="0" anchor="ctr" wrap="none" lIns="0" rIns="0" tIns="0" bIns="0"/>
-          <a:lstStyle/>
-          <a:p>
-            <a:pPr algn="ctr"/>
-            <a:r>
-              <a:rPr sz="1300" b="1">
-                <a:solidFill>
-                  <a:srgbClr val="6B4BA8"/>
-                </a:solidFill>
-                <a:latin typeface="Calibri"/>
-              </a:rPr>
-              <a:t>03</a:t>
-            </a:r>
-          </a:p>
-        </p:txBody>
-      </p:sp>
-      <p:sp>
-        <p:nvSpPr>
-          <p:cNvPr id="40" name="TextBox 39"/>
+          <p:cNvPr id="57" name="TextBox 56"/>
           <p:cNvSpPr txBox="1"/>
           <p:nvPr/>
         </p:nvSpPr>
         <p:spPr>
           <a:xfrm>
-            <a:off x="6461607" y="2523744"/>
-            <a:ext cx="2060371" cy="548640"/>
+            <a:off x="6397599" y="3346704"/>
+            <a:ext cx="274320" cy="347472"/>
           </a:xfrm>
           <a:prstGeom prst="rect">
             <a:avLst/>
@@ -5457,187 +6156,7 @@
           <a:noFill/>
         </p:spPr>
         <p:txBody>
-          <a:bodyPr wrap="square" lIns="0" rIns="0" tIns="0" bIns="0" anchor="t">
-            <a:spAutoFit/>
-          </a:bodyPr>
-          <a:lstStyle/>
-          <a:p>
-            <a:pPr algn="l">
-              <a:lnSpc>
-                <a:spcPct val="114000"/>
-              </a:lnSpc>
-              <a:spcAft>
-                <a:spcPts val="0"/>
-              </a:spcAft>
-            </a:pPr>
-            <a:r>
-              <a:rPr sz="1550" b="1">
-                <a:solidFill>
-                  <a:srgbClr val="0D1B2A"/>
-                </a:solidFill>
-                <a:latin typeface="Calibri"/>
-              </a:rPr>
-              <a:t>Personele planning</a:t>
-            </a:r>
-          </a:p>
-        </p:txBody>
-      </p:sp>
-      <p:sp>
-        <p:nvSpPr>
-          <p:cNvPr id="41" name="Rounded Rectangle 40"/>
-          <p:cNvSpPr/>
-          <p:nvPr/>
-        </p:nvSpPr>
-        <p:spPr>
-          <a:xfrm>
-            <a:off x="6461607" y="3108960"/>
-            <a:ext cx="2060371" cy="292608"/>
-          </a:xfrm>
-          <a:prstGeom prst="roundRect">
-            <a:avLst>
-              <a:gd name="adj" fmla="val 50000"/>
-            </a:avLst>
-          </a:prstGeom>
-          <a:solidFill>
-            <a:srgbClr val="6B4BA8">
-              <a:alpha val="11000"/>
-            </a:srgbClr>
-          </a:solidFill>
-          <a:ln w="12700">
-            <a:solidFill>
-              <a:srgbClr val="AEA0D2"/>
-            </a:solidFill>
-          </a:ln>
-          <a:effectLst/>
-        </p:spPr>
-        <p:style>
-          <a:lnRef idx="1">
-            <a:schemeClr val="accent1"/>
-          </a:lnRef>
-          <a:fillRef idx="3">
-            <a:schemeClr val="accent1"/>
-          </a:fillRef>
-          <a:effectRef idx="2">
-            <a:schemeClr val="accent1"/>
-          </a:effectRef>
-          <a:fontRef idx="minor">
-            <a:schemeClr val="lt1"/>
-          </a:fontRef>
-        </p:style>
-        <p:txBody>
-          <a:bodyPr rtlCol="0" anchor="ctr" wrap="square" lIns="64008" rIns="64008" tIns="0" bIns="0"/>
-          <a:lstStyle/>
-          <a:p>
-            <a:pPr algn="ctr"/>
-            <a:r>
-              <a:rPr sz="1000" b="1">
-                <a:solidFill>
-                  <a:srgbClr val="6B4BA8"/>
-                </a:solidFill>
-                <a:latin typeface="Calibri"/>
-              </a:rPr>
-              <a:t>het rooster</a:t>
-            </a:r>
-          </a:p>
-        </p:txBody>
-      </p:sp>
-      <p:cxnSp>
-        <p:nvCxnSpPr>
-          <p:cNvPr id="42" name="Connector 41"/>
-          <p:cNvCxnSpPr/>
-          <p:nvPr/>
-        </p:nvCxnSpPr>
-        <p:spPr>
-          <a:xfrm>
-            <a:off x="6461607" y="3566160"/>
-            <a:ext cx="2060372" cy="0"/>
-          </a:xfrm>
-          <a:prstGeom prst="line">
-            <a:avLst/>
-          </a:prstGeom>
-          <a:ln w="12700">
-            <a:solidFill>
-              <a:srgbClr val="E2E9F1"/>
-            </a:solidFill>
-          </a:ln>
-        </p:spPr>
-        <p:style>
-          <a:lnRef idx="2">
-            <a:schemeClr val="accent1"/>
-          </a:lnRef>
-          <a:fillRef idx="0">
-            <a:schemeClr val="accent1"/>
-          </a:fillRef>
-          <a:effectRef idx="1">
-            <a:schemeClr val="accent1"/>
-          </a:effectRef>
-          <a:fontRef idx="minor">
-            <a:schemeClr val="tx1"/>
-          </a:fontRef>
-        </p:style>
-      </p:cxnSp>
-      <p:sp>
-        <p:nvSpPr>
-          <p:cNvPr id="43" name="Oval 42"/>
-          <p:cNvSpPr/>
-          <p:nvPr/>
-        </p:nvSpPr>
-        <p:spPr>
-          <a:xfrm>
-            <a:off x="6493611" y="3771900"/>
-            <a:ext cx="82296" cy="82296"/>
-          </a:xfrm>
-          <a:prstGeom prst="ellipse">
-            <a:avLst/>
-          </a:prstGeom>
-          <a:solidFill>
-            <a:srgbClr val="6B4BA8"/>
-          </a:solidFill>
-          <a:ln>
-            <a:noFill/>
-          </a:ln>
-          <a:effectLst/>
-        </p:spPr>
-        <p:style>
-          <a:lnRef idx="1">
-            <a:schemeClr val="accent1"/>
-          </a:lnRef>
-          <a:fillRef idx="3">
-            <a:schemeClr val="accent1"/>
-          </a:fillRef>
-          <a:effectRef idx="2">
-            <a:schemeClr val="accent1"/>
-          </a:effectRef>
-          <a:fontRef idx="minor">
-            <a:schemeClr val="lt1"/>
-          </a:fontRef>
-        </p:style>
-        <p:txBody>
-          <a:bodyPr rtlCol="0" anchor="ctr"/>
-          <a:lstStyle/>
-          <a:p>
-            <a:pPr algn="ctr"/>
-          </a:p>
-        </p:txBody>
-      </p:sp>
-      <p:sp>
-        <p:nvSpPr>
-          <p:cNvPr id="44" name="TextBox 43"/>
-          <p:cNvSpPr txBox="1"/>
-          <p:nvPr/>
-        </p:nvSpPr>
-        <p:spPr>
-          <a:xfrm>
-            <a:off x="6717639" y="3712464"/>
-            <a:ext cx="1804339" cy="209803"/>
-          </a:xfrm>
-          <a:prstGeom prst="rect">
-            <a:avLst/>
-          </a:prstGeom>
-          <a:noFill/>
-        </p:spPr>
-        <p:txBody>
-          <a:bodyPr wrap="square" lIns="0" rIns="0" tIns="0" bIns="0" anchor="t">
+          <a:bodyPr wrap="square" lIns="0" rIns="0" tIns="0" bIns="0" anchor="ctr">
             <a:spAutoFit/>
           </a:bodyPr>
           <a:lstStyle/>
@@ -5651,9 +6170,51 @@
               </a:spcAft>
             </a:pPr>
             <a:r>
+              <a:rPr sz="850" b="1">
+                <a:solidFill>
+                  <a:srgbClr val="9078BE"/>
+                </a:solidFill>
+                <a:latin typeface="Calibri"/>
+              </a:rPr>
+              <a:t>01</a:t>
+            </a:r>
+          </a:p>
+        </p:txBody>
+      </p:sp>
+      <p:sp>
+        <p:nvSpPr>
+          <p:cNvPr id="58" name="TextBox 57"/>
+          <p:cNvSpPr txBox="1"/>
+          <p:nvPr/>
+        </p:nvSpPr>
+        <p:spPr>
+          <a:xfrm>
+            <a:off x="6690207" y="3346704"/>
+            <a:ext cx="1831771" cy="347472"/>
+          </a:xfrm>
+          <a:prstGeom prst="rect">
+            <a:avLst/>
+          </a:prstGeom>
+          <a:noFill/>
+        </p:spPr>
+        <p:txBody>
+          <a:bodyPr wrap="square" lIns="0" rIns="0" tIns="0" bIns="0" anchor="ctr">
+            <a:spAutoFit/>
+          </a:bodyPr>
+          <a:lstStyle/>
+          <a:p>
+            <a:pPr algn="l">
+              <a:lnSpc>
+                <a:spcPct val="118000"/>
+              </a:lnSpc>
+              <a:spcAft>
+                <a:spcPts val="0"/>
+              </a:spcAft>
+            </a:pPr>
+            <a:r>
               <a:rPr sz="1000" b="0">
                 <a:solidFill>
-                  <a:srgbClr val="55677C"/>
+                  <a:srgbClr val="0D1B2A"/>
                 </a:solidFill>
                 <a:latin typeface="Calibri"/>
               </a:rPr>
@@ -5662,60 +6223,51 @@
           </a:p>
         </p:txBody>
       </p:sp>
-      <p:sp>
-        <p:nvSpPr>
-          <p:cNvPr id="45" name="Oval 44"/>
-          <p:cNvSpPr/>
-          <p:nvPr/>
-        </p:nvSpPr>
-        <p:spPr>
-          <a:xfrm>
-            <a:off x="6493611" y="4180670"/>
-            <a:ext cx="82296" cy="82296"/>
-          </a:xfrm>
-          <a:prstGeom prst="ellipse">
-            <a:avLst/>
-          </a:prstGeom>
-          <a:solidFill>
-            <a:srgbClr val="6B4BA8"/>
-          </a:solidFill>
-          <a:ln>
-            <a:noFill/>
+      <p:cxnSp>
+        <p:nvCxnSpPr>
+          <p:cNvPr id="59" name="Connector 58"/>
+          <p:cNvCxnSpPr/>
+          <p:nvPr/>
+        </p:nvCxnSpPr>
+        <p:spPr>
+          <a:xfrm>
+            <a:off x="6397599" y="3730752"/>
+            <a:ext cx="2124380" cy="0"/>
+          </a:xfrm>
+          <a:prstGeom prst="line">
+            <a:avLst/>
+          </a:prstGeom>
+          <a:ln w="9525">
+            <a:solidFill>
+              <a:srgbClr val="E2E9F1"/>
+            </a:solidFill>
           </a:ln>
-          <a:effectLst/>
         </p:spPr>
         <p:style>
-          <a:lnRef idx="1">
+          <a:lnRef idx="2">
             <a:schemeClr val="accent1"/>
           </a:lnRef>
-          <a:fillRef idx="3">
+          <a:fillRef idx="0">
             <a:schemeClr val="accent1"/>
           </a:fillRef>
-          <a:effectRef idx="2">
+          <a:effectRef idx="1">
             <a:schemeClr val="accent1"/>
           </a:effectRef>
           <a:fontRef idx="minor">
-            <a:schemeClr val="lt1"/>
+            <a:schemeClr val="tx1"/>
           </a:fontRef>
         </p:style>
-        <p:txBody>
-          <a:bodyPr rtlCol="0" anchor="ctr"/>
-          <a:lstStyle/>
-          <a:p>
-            <a:pPr algn="ctr"/>
-          </a:p>
-        </p:txBody>
-      </p:sp>
-      <p:sp>
-        <p:nvSpPr>
-          <p:cNvPr id="46" name="TextBox 45"/>
+      </p:cxnSp>
+      <p:sp>
+        <p:nvSpPr>
+          <p:cNvPr id="60" name="TextBox 59"/>
           <p:cNvSpPr txBox="1"/>
           <p:nvPr/>
         </p:nvSpPr>
         <p:spPr>
           <a:xfrm>
-            <a:off x="6717639" y="4121234"/>
-            <a:ext cx="1804339" cy="209803"/>
+            <a:off x="6397599" y="3767328"/>
+            <a:ext cx="274320" cy="347472"/>
           </a:xfrm>
           <a:prstGeom prst="rect">
             <a:avLst/>
@@ -5723,7 +6275,7 @@
           <a:noFill/>
         </p:spPr>
         <p:txBody>
-          <a:bodyPr wrap="square" lIns="0" rIns="0" tIns="0" bIns="0" anchor="t">
+          <a:bodyPr wrap="square" lIns="0" rIns="0" tIns="0" bIns="0" anchor="ctr">
             <a:spAutoFit/>
           </a:bodyPr>
           <a:lstStyle/>
@@ -5737,9 +6289,51 @@
               </a:spcAft>
             </a:pPr>
             <a:r>
+              <a:rPr sz="850" b="1">
+                <a:solidFill>
+                  <a:srgbClr val="9078BE"/>
+                </a:solidFill>
+                <a:latin typeface="Calibri"/>
+              </a:rPr>
+              <a:t>02</a:t>
+            </a:r>
+          </a:p>
+        </p:txBody>
+      </p:sp>
+      <p:sp>
+        <p:nvSpPr>
+          <p:cNvPr id="61" name="TextBox 60"/>
+          <p:cNvSpPr txBox="1"/>
+          <p:nvPr/>
+        </p:nvSpPr>
+        <p:spPr>
+          <a:xfrm>
+            <a:off x="6690207" y="3767328"/>
+            <a:ext cx="1831771" cy="347472"/>
+          </a:xfrm>
+          <a:prstGeom prst="rect">
+            <a:avLst/>
+          </a:prstGeom>
+          <a:noFill/>
+        </p:spPr>
+        <p:txBody>
+          <a:bodyPr wrap="square" lIns="0" rIns="0" tIns="0" bIns="0" anchor="ctr">
+            <a:spAutoFit/>
+          </a:bodyPr>
+          <a:lstStyle/>
+          <a:p>
+            <a:pPr algn="l">
+              <a:lnSpc>
+                <a:spcPct val="118000"/>
+              </a:lnSpc>
+              <a:spcAft>
+                <a:spcPts val="0"/>
+              </a:spcAft>
+            </a:pPr>
+            <a:r>
               <a:rPr sz="1000" b="0">
                 <a:solidFill>
-                  <a:srgbClr val="55677C"/>
+                  <a:srgbClr val="0D1B2A"/>
                 </a:solidFill>
                 <a:latin typeface="Calibri"/>
               </a:rPr>
@@ -5748,60 +6342,51 @@
           </a:p>
         </p:txBody>
       </p:sp>
-      <p:sp>
-        <p:nvSpPr>
-          <p:cNvPr id="47" name="Oval 46"/>
-          <p:cNvSpPr/>
-          <p:nvPr/>
-        </p:nvSpPr>
-        <p:spPr>
-          <a:xfrm>
-            <a:off x="6493611" y="4589441"/>
-            <a:ext cx="82296" cy="82296"/>
-          </a:xfrm>
-          <a:prstGeom prst="ellipse">
-            <a:avLst/>
-          </a:prstGeom>
-          <a:solidFill>
-            <a:srgbClr val="6B4BA8"/>
-          </a:solidFill>
-          <a:ln>
-            <a:noFill/>
+      <p:cxnSp>
+        <p:nvCxnSpPr>
+          <p:cNvPr id="62" name="Connector 61"/>
+          <p:cNvCxnSpPr/>
+          <p:nvPr/>
+        </p:nvCxnSpPr>
+        <p:spPr>
+          <a:xfrm>
+            <a:off x="6397599" y="4151376"/>
+            <a:ext cx="2124380" cy="0"/>
+          </a:xfrm>
+          <a:prstGeom prst="line">
+            <a:avLst/>
+          </a:prstGeom>
+          <a:ln w="9525">
+            <a:solidFill>
+              <a:srgbClr val="E2E9F1"/>
+            </a:solidFill>
           </a:ln>
-          <a:effectLst/>
         </p:spPr>
         <p:style>
-          <a:lnRef idx="1">
+          <a:lnRef idx="2">
             <a:schemeClr val="accent1"/>
           </a:lnRef>
-          <a:fillRef idx="3">
+          <a:fillRef idx="0">
             <a:schemeClr val="accent1"/>
           </a:fillRef>
-          <a:effectRef idx="2">
+          <a:effectRef idx="1">
             <a:schemeClr val="accent1"/>
           </a:effectRef>
           <a:fontRef idx="minor">
-            <a:schemeClr val="lt1"/>
+            <a:schemeClr val="tx1"/>
           </a:fontRef>
         </p:style>
-        <p:txBody>
-          <a:bodyPr rtlCol="0" anchor="ctr"/>
-          <a:lstStyle/>
-          <a:p>
-            <a:pPr algn="ctr"/>
-          </a:p>
-        </p:txBody>
-      </p:sp>
-      <p:sp>
-        <p:nvSpPr>
-          <p:cNvPr id="48" name="TextBox 47"/>
+      </p:cxnSp>
+      <p:sp>
+        <p:nvSpPr>
+          <p:cNvPr id="63" name="TextBox 62"/>
           <p:cNvSpPr txBox="1"/>
           <p:nvPr/>
         </p:nvSpPr>
         <p:spPr>
           <a:xfrm>
-            <a:off x="6717639" y="4530005"/>
-            <a:ext cx="1804339" cy="209803"/>
+            <a:off x="6397599" y="4187952"/>
+            <a:ext cx="274320" cy="347472"/>
           </a:xfrm>
           <a:prstGeom prst="rect">
             <a:avLst/>
@@ -5809,7 +6394,7 @@
           <a:noFill/>
         </p:spPr>
         <p:txBody>
-          <a:bodyPr wrap="square" lIns="0" rIns="0" tIns="0" bIns="0" anchor="t">
+          <a:bodyPr wrap="square" lIns="0" rIns="0" tIns="0" bIns="0" anchor="ctr">
             <a:spAutoFit/>
           </a:bodyPr>
           <a:lstStyle/>
@@ -5823,9 +6408,51 @@
               </a:spcAft>
             </a:pPr>
             <a:r>
+              <a:rPr sz="850" b="1">
+                <a:solidFill>
+                  <a:srgbClr val="9078BE"/>
+                </a:solidFill>
+                <a:latin typeface="Calibri"/>
+              </a:rPr>
+              <a:t>03</a:t>
+            </a:r>
+          </a:p>
+        </p:txBody>
+      </p:sp>
+      <p:sp>
+        <p:nvSpPr>
+          <p:cNvPr id="64" name="TextBox 63"/>
+          <p:cNvSpPr txBox="1"/>
+          <p:nvPr/>
+        </p:nvSpPr>
+        <p:spPr>
+          <a:xfrm>
+            <a:off x="6690207" y="4187952"/>
+            <a:ext cx="1831771" cy="347472"/>
+          </a:xfrm>
+          <a:prstGeom prst="rect">
+            <a:avLst/>
+          </a:prstGeom>
+          <a:noFill/>
+        </p:spPr>
+        <p:txBody>
+          <a:bodyPr wrap="square" lIns="0" rIns="0" tIns="0" bIns="0" anchor="ctr">
+            <a:spAutoFit/>
+          </a:bodyPr>
+          <a:lstStyle/>
+          <a:p>
+            <a:pPr algn="l">
+              <a:lnSpc>
+                <a:spcPct val="118000"/>
+              </a:lnSpc>
+              <a:spcAft>
+                <a:spcPts val="0"/>
+              </a:spcAft>
+            </a:pPr>
+            <a:r>
               <a:rPr sz="1000" b="0">
                 <a:solidFill>
-                  <a:srgbClr val="55677C"/>
+                  <a:srgbClr val="0D1B2A"/>
                 </a:solidFill>
                 <a:latin typeface="Calibri"/>
               </a:rPr>
@@ -5834,60 +6461,51 @@
           </a:p>
         </p:txBody>
       </p:sp>
-      <p:sp>
-        <p:nvSpPr>
-          <p:cNvPr id="49" name="Oval 48"/>
-          <p:cNvSpPr/>
-          <p:nvPr/>
-        </p:nvSpPr>
-        <p:spPr>
-          <a:xfrm>
-            <a:off x="6493611" y="4998211"/>
-            <a:ext cx="82296" cy="82296"/>
-          </a:xfrm>
-          <a:prstGeom prst="ellipse">
-            <a:avLst/>
-          </a:prstGeom>
-          <a:solidFill>
-            <a:srgbClr val="C87E12"/>
-          </a:solidFill>
-          <a:ln>
-            <a:noFill/>
+      <p:cxnSp>
+        <p:nvCxnSpPr>
+          <p:cNvPr id="65" name="Connector 64"/>
+          <p:cNvCxnSpPr/>
+          <p:nvPr/>
+        </p:nvCxnSpPr>
+        <p:spPr>
+          <a:xfrm>
+            <a:off x="6397599" y="4572000"/>
+            <a:ext cx="2124380" cy="0"/>
+          </a:xfrm>
+          <a:prstGeom prst="line">
+            <a:avLst/>
+          </a:prstGeom>
+          <a:ln w="9525">
+            <a:solidFill>
+              <a:srgbClr val="E2E9F1"/>
+            </a:solidFill>
           </a:ln>
-          <a:effectLst/>
         </p:spPr>
         <p:style>
-          <a:lnRef idx="1">
+          <a:lnRef idx="2">
             <a:schemeClr val="accent1"/>
           </a:lnRef>
-          <a:fillRef idx="3">
+          <a:fillRef idx="0">
             <a:schemeClr val="accent1"/>
           </a:fillRef>
-          <a:effectRef idx="2">
+          <a:effectRef idx="1">
             <a:schemeClr val="accent1"/>
           </a:effectRef>
           <a:fontRef idx="minor">
-            <a:schemeClr val="lt1"/>
+            <a:schemeClr val="tx1"/>
           </a:fontRef>
         </p:style>
-        <p:txBody>
-          <a:bodyPr rtlCol="0" anchor="ctr"/>
-          <a:lstStyle/>
-          <a:p>
-            <a:pPr algn="ctr"/>
-          </a:p>
-        </p:txBody>
-      </p:sp>
-      <p:sp>
-        <p:nvSpPr>
-          <p:cNvPr id="50" name="TextBox 49"/>
+      </p:cxnSp>
+      <p:sp>
+        <p:nvSpPr>
+          <p:cNvPr id="66" name="TextBox 65"/>
           <p:cNvSpPr txBox="1"/>
           <p:nvPr/>
         </p:nvSpPr>
         <p:spPr>
           <a:xfrm>
-            <a:off x="6717639" y="4938775"/>
-            <a:ext cx="1804339" cy="364743"/>
+            <a:off x="6397599" y="4608576"/>
+            <a:ext cx="274320" cy="347472"/>
           </a:xfrm>
           <a:prstGeom prst="rect">
             <a:avLst/>
@@ -5895,7 +6513,7 @@
           <a:noFill/>
         </p:spPr>
         <p:txBody>
-          <a:bodyPr wrap="square" lIns="0" rIns="0" tIns="0" bIns="0" anchor="t">
+          <a:bodyPr wrap="square" lIns="0" rIns="0" tIns="0" bIns="0" anchor="ctr">
             <a:spAutoFit/>
           </a:bodyPr>
           <a:lstStyle/>
@@ -5909,6 +6527,48 @@
               </a:spcAft>
             </a:pPr>
             <a:r>
+              <a:rPr sz="850" b="1">
+                <a:solidFill>
+                  <a:srgbClr val="C87E12"/>
+                </a:solidFill>
+                <a:latin typeface="Calibri"/>
+              </a:rPr>
+              <a:t>04</a:t>
+            </a:r>
+          </a:p>
+        </p:txBody>
+      </p:sp>
+      <p:sp>
+        <p:nvSpPr>
+          <p:cNvPr id="67" name="TextBox 66"/>
+          <p:cNvSpPr txBox="1"/>
+          <p:nvPr/>
+        </p:nvSpPr>
+        <p:spPr>
+          <a:xfrm>
+            <a:off x="6690207" y="4608576"/>
+            <a:ext cx="1831771" cy="347472"/>
+          </a:xfrm>
+          <a:prstGeom prst="rect">
+            <a:avLst/>
+          </a:prstGeom>
+          <a:noFill/>
+        </p:spPr>
+        <p:txBody>
+          <a:bodyPr wrap="square" lIns="0" rIns="0" tIns="0" bIns="0" anchor="ctr">
+            <a:spAutoFit/>
+          </a:bodyPr>
+          <a:lstStyle/>
+          <a:p>
+            <a:pPr algn="l">
+              <a:lnSpc>
+                <a:spcPct val="118000"/>
+              </a:lnSpc>
+              <a:spcAft>
+                <a:spcPts val="0"/>
+              </a:spcAft>
+            </a:pPr>
+            <a:r>
               <a:rPr sz="1000" b="0">
                 <a:solidFill>
                   <a:srgbClr val="C87E12"/>
@@ -5922,22 +6582,22 @@
       </p:sp>
       <p:sp>
         <p:nvSpPr>
-          <p:cNvPr id="51" name="Right Arrow 50"/>
+          <p:cNvPr id="68" name="Rounded Rectangle 67"/>
           <p:cNvSpPr/>
           <p:nvPr/>
         </p:nvSpPr>
         <p:spPr>
           <a:xfrm>
-            <a:off x="8800871" y="2084832"/>
-            <a:ext cx="173736" cy="173736"/>
-          </a:xfrm>
-          <a:prstGeom prst="rightArrow">
-            <a:avLst/>
+            <a:off x="6223863" y="4956048"/>
+            <a:ext cx="2471851" cy="502920"/>
+          </a:xfrm>
+          <a:prstGeom prst="roundRect">
+            <a:avLst>
+              <a:gd name="adj" fmla="val 3000"/>
+            </a:avLst>
           </a:prstGeom>
           <a:solidFill>
-            <a:srgbClr val="6B4BA8">
-              <a:alpha val="55000"/>
-            </a:srgbClr>
+            <a:srgbClr val="E2E3F3"/>
           </a:solidFill>
           <a:ln>
             <a:noFill/>
@@ -5961,21 +6621,283 @@
         <p:txBody>
           <a:bodyPr rtlCol="0" anchor="ctr"/>
           <a:lstStyle/>
-          <a:p>
-            <a:pPr algn="ctr"/>
-          </a:p>
-        </p:txBody>
-      </p:sp>
-      <p:sp>
-        <p:nvSpPr>
-          <p:cNvPr id="52" name="Rounded Rectangle 51"/>
+          <a:p/>
+        </p:txBody>
+      </p:sp>
+      <p:sp>
+        <p:nvSpPr>
+          <p:cNvPr id="69" name="TextBox 68"/>
+          <p:cNvSpPr txBox="1"/>
+          <p:nvPr/>
+        </p:nvSpPr>
+        <p:spPr>
+          <a:xfrm>
+            <a:off x="6397599" y="5001768"/>
+            <a:ext cx="2124379" cy="182880"/>
+          </a:xfrm>
+          <a:prstGeom prst="rect">
+            <a:avLst/>
+          </a:prstGeom>
+          <a:noFill/>
+        </p:spPr>
+        <p:txBody>
+          <a:bodyPr wrap="square" lIns="0" rIns="0" tIns="0" bIns="0" anchor="t">
+            <a:spAutoFit/>
+          </a:bodyPr>
+          <a:lstStyle/>
+          <a:p>
+            <a:pPr algn="l">
+              <a:lnSpc>
+                <a:spcPct val="120000"/>
+              </a:lnSpc>
+              <a:spcAft>
+                <a:spcPts val="0"/>
+              </a:spcAft>
+            </a:pPr>
+            <a:r>
+              <a:rPr sz="750" b="1" spc="140">
+                <a:solidFill>
+                  <a:srgbClr val="8B9AAA"/>
+                </a:solidFill>
+                <a:latin typeface="Calibri"/>
+              </a:rPr>
+              <a:t>LEVERT OP</a:t>
+            </a:r>
+          </a:p>
+        </p:txBody>
+      </p:sp>
+      <p:sp>
+        <p:nvSpPr>
+          <p:cNvPr id="70" name="TextBox 69"/>
+          <p:cNvSpPr txBox="1"/>
+          <p:nvPr/>
+        </p:nvSpPr>
+        <p:spPr>
+          <a:xfrm>
+            <a:off x="6397599" y="5175504"/>
+            <a:ext cx="2124379" cy="237744"/>
+          </a:xfrm>
+          <a:prstGeom prst="rect">
+            <a:avLst/>
+          </a:prstGeom>
+          <a:noFill/>
+        </p:spPr>
+        <p:txBody>
+          <a:bodyPr wrap="square" lIns="0" rIns="0" tIns="0" bIns="0" anchor="t">
+            <a:spAutoFit/>
+          </a:bodyPr>
+          <a:lstStyle/>
+          <a:p>
+            <a:pPr algn="l">
+              <a:lnSpc>
+                <a:spcPct val="120000"/>
+              </a:lnSpc>
+              <a:spcAft>
+                <a:spcPts val="0"/>
+              </a:spcAft>
+            </a:pPr>
+            <a:r>
+              <a:rPr sz="1150" b="1">
+                <a:solidFill>
+                  <a:srgbClr val="6B4BA8"/>
+                </a:solidFill>
+                <a:latin typeface="Calibri"/>
+              </a:rPr>
+              <a:t>het rooster</a:t>
+            </a:r>
+          </a:p>
+        </p:txBody>
+      </p:sp>
+      <p:sp>
+        <p:nvSpPr>
+          <p:cNvPr id="71" name="Rounded Rectangle 70"/>
           <p:cNvSpPr/>
           <p:nvPr/>
         </p:nvSpPr>
         <p:spPr>
           <a:xfrm>
-            <a:off x="9015755" y="1700784"/>
-            <a:ext cx="2535859" cy="3785615"/>
+            <a:off x="9684753" y="1655064"/>
+            <a:ext cx="1005840" cy="1005840"/>
+          </a:xfrm>
+          <a:prstGeom prst="roundRect">
+            <a:avLst>
+              <a:gd name="adj" fmla="val 50000"/>
+            </a:avLst>
+          </a:prstGeom>
+          <a:solidFill>
+            <a:srgbClr val="EDEAE5"/>
+          </a:solidFill>
+          <a:ln>
+            <a:noFill/>
+          </a:ln>
+          <a:effectLst/>
+        </p:spPr>
+        <p:style>
+          <a:lnRef idx="1">
+            <a:schemeClr val="accent1"/>
+          </a:lnRef>
+          <a:fillRef idx="3">
+            <a:schemeClr val="accent1"/>
+          </a:fillRef>
+          <a:effectRef idx="2">
+            <a:schemeClr val="accent1"/>
+          </a:effectRef>
+          <a:fontRef idx="minor">
+            <a:schemeClr val="lt1"/>
+          </a:fontRef>
+        </p:style>
+        <p:txBody>
+          <a:bodyPr rtlCol="0" anchor="ctr"/>
+          <a:lstStyle/>
+          <a:p/>
+        </p:txBody>
+      </p:sp>
+      <p:sp>
+        <p:nvSpPr>
+          <p:cNvPr id="72" name="Rounded Rectangle 71"/>
+          <p:cNvSpPr/>
+          <p:nvPr/>
+        </p:nvSpPr>
+        <p:spPr>
+          <a:xfrm>
+            <a:off x="9803625" y="1773936"/>
+            <a:ext cx="768096" cy="768096"/>
+          </a:xfrm>
+          <a:prstGeom prst="roundRect">
+            <a:avLst>
+              <a:gd name="adj" fmla="val 50000"/>
+            </a:avLst>
+          </a:prstGeom>
+          <a:solidFill>
+            <a:srgbClr val="FFFFFF"/>
+          </a:solidFill>
+          <a:ln w="25400">
+            <a:solidFill>
+              <a:srgbClr val="C87E12"/>
+            </a:solidFill>
+          </a:ln>
+          <a:effectLst>
+            <a:outerShdw blurRad="50000" dist="14000" dir="5400000" rotWithShape="0">
+              <a:srgbClr val="1B3A5C">
+                <a:alpha val="8000"/>
+              </a:srgbClr>
+            </a:outerShdw>
+          </a:effectLst>
+        </p:spPr>
+        <p:style>
+          <a:lnRef idx="1">
+            <a:schemeClr val="accent1"/>
+          </a:lnRef>
+          <a:fillRef idx="3">
+            <a:schemeClr val="accent1"/>
+          </a:fillRef>
+          <a:effectRef idx="2">
+            <a:schemeClr val="accent1"/>
+          </a:effectRef>
+          <a:fontRef idx="minor">
+            <a:schemeClr val="lt1"/>
+          </a:fontRef>
+        </p:style>
+        <p:txBody>
+          <a:bodyPr rtlCol="0" anchor="ctr"/>
+          <a:lstStyle/>
+          <a:p/>
+        </p:txBody>
+      </p:sp>
+      <p:sp>
+        <p:nvSpPr>
+          <p:cNvPr id="73" name="TextBox 72"/>
+          <p:cNvSpPr txBox="1"/>
+          <p:nvPr/>
+        </p:nvSpPr>
+        <p:spPr>
+          <a:xfrm>
+            <a:off x="9803625" y="1956816"/>
+            <a:ext cx="768096" cy="402336"/>
+          </a:xfrm>
+          <a:prstGeom prst="rect">
+            <a:avLst/>
+          </a:prstGeom>
+          <a:noFill/>
+        </p:spPr>
+        <p:txBody>
+          <a:bodyPr wrap="square" lIns="0" rIns="0" tIns="0" bIns="0" anchor="ctr">
+            <a:spAutoFit/>
+          </a:bodyPr>
+          <a:lstStyle/>
+          <a:p>
+            <a:pPr algn="ctr">
+              <a:lnSpc>
+                <a:spcPct val="120000"/>
+              </a:lnSpc>
+              <a:spcAft>
+                <a:spcPts val="0"/>
+              </a:spcAft>
+            </a:pPr>
+            <a:r>
+              <a:rPr sz="2000" b="1">
+                <a:solidFill>
+                  <a:srgbClr val="C87E12"/>
+                </a:solidFill>
+                <a:latin typeface="Calibri"/>
+              </a:rPr>
+              <a:t>04</a:t>
+            </a:r>
+          </a:p>
+        </p:txBody>
+      </p:sp>
+      <p:sp>
+        <p:nvSpPr>
+          <p:cNvPr id="74" name="TextBox 73"/>
+          <p:cNvSpPr txBox="1"/>
+          <p:nvPr/>
+        </p:nvSpPr>
+        <p:spPr>
+          <a:xfrm>
+            <a:off x="8942603" y="2724912"/>
+            <a:ext cx="2490139" cy="402336"/>
+          </a:xfrm>
+          <a:prstGeom prst="rect">
+            <a:avLst/>
+          </a:prstGeom>
+          <a:noFill/>
+        </p:spPr>
+        <p:txBody>
+          <a:bodyPr wrap="square" lIns="0" rIns="0" tIns="0" bIns="0" anchor="t">
+            <a:spAutoFit/>
+          </a:bodyPr>
+          <a:lstStyle/>
+          <a:p>
+            <a:pPr algn="ctr">
+              <a:lnSpc>
+                <a:spcPct val="114000"/>
+              </a:lnSpc>
+              <a:spcAft>
+                <a:spcPts val="0"/>
+              </a:spcAft>
+            </a:pPr>
+            <a:r>
+              <a:rPr sz="1600" b="1">
+                <a:solidFill>
+                  <a:srgbClr val="0D1B2A"/>
+                </a:solidFill>
+                <a:latin typeface="Calibri"/>
+              </a:rPr>
+              <a:t>Financiële begroting</a:t>
+            </a:r>
+          </a:p>
+        </p:txBody>
+      </p:sp>
+      <p:sp>
+        <p:nvSpPr>
+          <p:cNvPr id="75" name="Rounded Rectangle 74"/>
+          <p:cNvSpPr/>
+          <p:nvPr/>
+        </p:nvSpPr>
+        <p:spPr>
+          <a:xfrm>
+            <a:off x="8942603" y="3163824"/>
+            <a:ext cx="2490139" cy="2304288"/>
           </a:xfrm>
           <a:prstGeom prst="roundRect">
             <a:avLst>
@@ -6020,14 +6942,14 @@
       </p:sp>
       <p:sp>
         <p:nvSpPr>
-          <p:cNvPr id="53" name="Rounded Rectangle 52"/>
+          <p:cNvPr id="76" name="Rounded Rectangle 75"/>
           <p:cNvSpPr/>
           <p:nvPr/>
         </p:nvSpPr>
         <p:spPr>
           <a:xfrm>
-            <a:off x="9015755" y="1700784"/>
-            <a:ext cx="2535859" cy="50292"/>
+            <a:off x="8942603" y="3163824"/>
+            <a:ext cx="2490139" cy="50292"/>
           </a:xfrm>
           <a:prstGeom prst="roundRect">
             <a:avLst>
@@ -6064,71 +6986,14 @@
       </p:sp>
       <p:sp>
         <p:nvSpPr>
-          <p:cNvPr id="54" name="Oval 53"/>
-          <p:cNvSpPr/>
-          <p:nvPr/>
-        </p:nvSpPr>
-        <p:spPr>
-          <a:xfrm>
-            <a:off x="9207779" y="1947672"/>
-            <a:ext cx="457200" cy="457200"/>
-          </a:xfrm>
-          <a:prstGeom prst="ellipse">
-            <a:avLst/>
-          </a:prstGeom>
-          <a:solidFill>
-            <a:srgbClr val="C87E12">
-              <a:alpha val="10000"/>
-            </a:srgbClr>
-          </a:solidFill>
-          <a:ln w="15875">
-            <a:solidFill>
-              <a:srgbClr val="C87E12"/>
-            </a:solidFill>
-          </a:ln>
-          <a:effectLst/>
-        </p:spPr>
-        <p:style>
-          <a:lnRef idx="1">
-            <a:schemeClr val="accent1"/>
-          </a:lnRef>
-          <a:fillRef idx="3">
-            <a:schemeClr val="accent1"/>
-          </a:fillRef>
-          <a:effectRef idx="2">
-            <a:schemeClr val="accent1"/>
-          </a:effectRef>
-          <a:fontRef idx="minor">
-            <a:schemeClr val="lt1"/>
-          </a:fontRef>
-        </p:style>
-        <p:txBody>
-          <a:bodyPr rtlCol="0" anchor="ctr" wrap="none" lIns="0" rIns="0" tIns="0" bIns="0"/>
-          <a:lstStyle/>
-          <a:p>
-            <a:pPr algn="ctr"/>
-            <a:r>
-              <a:rPr sz="1300" b="1">
-                <a:solidFill>
-                  <a:srgbClr val="C87E12"/>
-                </a:solidFill>
-                <a:latin typeface="Calibri"/>
-              </a:rPr>
-              <a:t>04</a:t>
-            </a:r>
-          </a:p>
-        </p:txBody>
-      </p:sp>
-      <p:sp>
-        <p:nvSpPr>
-          <p:cNvPr id="55" name="TextBox 54"/>
+          <p:cNvPr id="77" name="TextBox 76"/>
           <p:cNvSpPr txBox="1"/>
           <p:nvPr/>
         </p:nvSpPr>
         <p:spPr>
           <a:xfrm>
-            <a:off x="9253499" y="2523744"/>
-            <a:ext cx="2060371" cy="548640"/>
+            <a:off x="9125483" y="3346704"/>
+            <a:ext cx="274320" cy="347472"/>
           </a:xfrm>
           <a:prstGeom prst="rect">
             <a:avLst/>
@@ -6136,187 +7001,7 @@
           <a:noFill/>
         </p:spPr>
         <p:txBody>
-          <a:bodyPr wrap="square" lIns="0" rIns="0" tIns="0" bIns="0" anchor="t">
-            <a:spAutoFit/>
-          </a:bodyPr>
-          <a:lstStyle/>
-          <a:p>
-            <a:pPr algn="l">
-              <a:lnSpc>
-                <a:spcPct val="114000"/>
-              </a:lnSpc>
-              <a:spcAft>
-                <a:spcPts val="0"/>
-              </a:spcAft>
-            </a:pPr>
-            <a:r>
-              <a:rPr sz="1550" b="1">
-                <a:solidFill>
-                  <a:srgbClr val="0D1B2A"/>
-                </a:solidFill>
-                <a:latin typeface="Calibri"/>
-              </a:rPr>
-              <a:t>Financiële begroting</a:t>
-            </a:r>
-          </a:p>
-        </p:txBody>
-      </p:sp>
-      <p:sp>
-        <p:nvSpPr>
-          <p:cNvPr id="56" name="Rounded Rectangle 55"/>
-          <p:cNvSpPr/>
-          <p:nvPr/>
-        </p:nvSpPr>
-        <p:spPr>
-          <a:xfrm>
-            <a:off x="9253499" y="3108960"/>
-            <a:ext cx="2060371" cy="292608"/>
-          </a:xfrm>
-          <a:prstGeom prst="roundRect">
-            <a:avLst>
-              <a:gd name="adj" fmla="val 50000"/>
-            </a:avLst>
-          </a:prstGeom>
-          <a:solidFill>
-            <a:srgbClr val="C87E12">
-              <a:alpha val="11000"/>
-            </a:srgbClr>
-          </a:solidFill>
-          <a:ln w="12700">
-            <a:solidFill>
-              <a:srgbClr val="DCBA87"/>
-            </a:solidFill>
-          </a:ln>
-          <a:effectLst/>
-        </p:spPr>
-        <p:style>
-          <a:lnRef idx="1">
-            <a:schemeClr val="accent1"/>
-          </a:lnRef>
-          <a:fillRef idx="3">
-            <a:schemeClr val="accent1"/>
-          </a:fillRef>
-          <a:effectRef idx="2">
-            <a:schemeClr val="accent1"/>
-          </a:effectRef>
-          <a:fontRef idx="minor">
-            <a:schemeClr val="lt1"/>
-          </a:fontRef>
-        </p:style>
-        <p:txBody>
-          <a:bodyPr rtlCol="0" anchor="ctr" wrap="square" lIns="64008" rIns="64008" tIns="0" bIns="0"/>
-          <a:lstStyle/>
-          <a:p>
-            <a:pPr algn="ctr"/>
-            <a:r>
-              <a:rPr sz="1000" b="1">
-                <a:solidFill>
-                  <a:srgbClr val="C87E12"/>
-                </a:solidFill>
-                <a:latin typeface="Calibri"/>
-              </a:rPr>
-              <a:t>fte-(mis)match</a:t>
-            </a:r>
-          </a:p>
-        </p:txBody>
-      </p:sp>
-      <p:cxnSp>
-        <p:nvCxnSpPr>
-          <p:cNvPr id="57" name="Connector 56"/>
-          <p:cNvCxnSpPr/>
-          <p:nvPr/>
-        </p:nvCxnSpPr>
-        <p:spPr>
-          <a:xfrm>
-            <a:off x="9253499" y="3566160"/>
-            <a:ext cx="2060372" cy="0"/>
-          </a:xfrm>
-          <a:prstGeom prst="line">
-            <a:avLst/>
-          </a:prstGeom>
-          <a:ln w="12700">
-            <a:solidFill>
-              <a:srgbClr val="E2E9F1"/>
-            </a:solidFill>
-          </a:ln>
-        </p:spPr>
-        <p:style>
-          <a:lnRef idx="2">
-            <a:schemeClr val="accent1"/>
-          </a:lnRef>
-          <a:fillRef idx="0">
-            <a:schemeClr val="accent1"/>
-          </a:fillRef>
-          <a:effectRef idx="1">
-            <a:schemeClr val="accent1"/>
-          </a:effectRef>
-          <a:fontRef idx="minor">
-            <a:schemeClr val="tx1"/>
-          </a:fontRef>
-        </p:style>
-      </p:cxnSp>
-      <p:sp>
-        <p:nvSpPr>
-          <p:cNvPr id="58" name="Oval 57"/>
-          <p:cNvSpPr/>
-          <p:nvPr/>
-        </p:nvSpPr>
-        <p:spPr>
-          <a:xfrm>
-            <a:off x="9285503" y="3771900"/>
-            <a:ext cx="82296" cy="82296"/>
-          </a:xfrm>
-          <a:prstGeom prst="ellipse">
-            <a:avLst/>
-          </a:prstGeom>
-          <a:solidFill>
-            <a:srgbClr val="C87E12"/>
-          </a:solidFill>
-          <a:ln>
-            <a:noFill/>
-          </a:ln>
-          <a:effectLst/>
-        </p:spPr>
-        <p:style>
-          <a:lnRef idx="1">
-            <a:schemeClr val="accent1"/>
-          </a:lnRef>
-          <a:fillRef idx="3">
-            <a:schemeClr val="accent1"/>
-          </a:fillRef>
-          <a:effectRef idx="2">
-            <a:schemeClr val="accent1"/>
-          </a:effectRef>
-          <a:fontRef idx="minor">
-            <a:schemeClr val="lt1"/>
-          </a:fontRef>
-        </p:style>
-        <p:txBody>
-          <a:bodyPr rtlCol="0" anchor="ctr"/>
-          <a:lstStyle/>
-          <a:p>
-            <a:pPr algn="ctr"/>
-          </a:p>
-        </p:txBody>
-      </p:sp>
-      <p:sp>
-        <p:nvSpPr>
-          <p:cNvPr id="59" name="TextBox 58"/>
-          <p:cNvSpPr txBox="1"/>
-          <p:nvPr/>
-        </p:nvSpPr>
-        <p:spPr>
-          <a:xfrm>
-            <a:off x="9509531" y="3712464"/>
-            <a:ext cx="1804339" cy="364743"/>
-          </a:xfrm>
-          <a:prstGeom prst="rect">
-            <a:avLst/>
-          </a:prstGeom>
-          <a:noFill/>
-        </p:spPr>
-        <p:txBody>
-          <a:bodyPr wrap="square" lIns="0" rIns="0" tIns="0" bIns="0" anchor="t">
+          <a:bodyPr wrap="square" lIns="0" rIns="0" tIns="0" bIns="0" anchor="ctr">
             <a:spAutoFit/>
           </a:bodyPr>
           <a:lstStyle/>
@@ -6330,9 +7015,51 @@
               </a:spcAft>
             </a:pPr>
             <a:r>
+              <a:rPr sz="850" b="1">
+                <a:solidFill>
+                  <a:srgbClr val="D69E4D"/>
+                </a:solidFill>
+                <a:latin typeface="Calibri"/>
+              </a:rPr>
+              <a:t>01</a:t>
+            </a:r>
+          </a:p>
+        </p:txBody>
+      </p:sp>
+      <p:sp>
+        <p:nvSpPr>
+          <p:cNvPr id="78" name="TextBox 77"/>
+          <p:cNvSpPr txBox="1"/>
+          <p:nvPr/>
+        </p:nvSpPr>
+        <p:spPr>
+          <a:xfrm>
+            <a:off x="9418091" y="3346704"/>
+            <a:ext cx="1831771" cy="347472"/>
+          </a:xfrm>
+          <a:prstGeom prst="rect">
+            <a:avLst/>
+          </a:prstGeom>
+          <a:noFill/>
+        </p:spPr>
+        <p:txBody>
+          <a:bodyPr wrap="square" lIns="0" rIns="0" tIns="0" bIns="0" anchor="ctr">
+            <a:spAutoFit/>
+          </a:bodyPr>
+          <a:lstStyle/>
+          <a:p>
+            <a:pPr algn="l">
+              <a:lnSpc>
+                <a:spcPct val="118000"/>
+              </a:lnSpc>
+              <a:spcAft>
+                <a:spcPts val="0"/>
+              </a:spcAft>
+            </a:pPr>
+            <a:r>
               <a:rPr sz="1000" b="0">
                 <a:solidFill>
-                  <a:srgbClr val="55677C"/>
+                  <a:srgbClr val="0D1B2A"/>
                 </a:solidFill>
                 <a:latin typeface="Calibri"/>
               </a:rPr>
@@ -6341,60 +7068,51 @@
           </a:p>
         </p:txBody>
       </p:sp>
-      <p:sp>
-        <p:nvSpPr>
-          <p:cNvPr id="60" name="Oval 59"/>
-          <p:cNvSpPr/>
-          <p:nvPr/>
-        </p:nvSpPr>
-        <p:spPr>
-          <a:xfrm>
-            <a:off x="9285503" y="4232317"/>
-            <a:ext cx="82296" cy="82296"/>
-          </a:xfrm>
-          <a:prstGeom prst="ellipse">
-            <a:avLst/>
-          </a:prstGeom>
-          <a:solidFill>
-            <a:srgbClr val="C87E12"/>
-          </a:solidFill>
-          <a:ln>
-            <a:noFill/>
+      <p:cxnSp>
+        <p:nvCxnSpPr>
+          <p:cNvPr id="79" name="Connector 78"/>
+          <p:cNvCxnSpPr/>
+          <p:nvPr/>
+        </p:nvCxnSpPr>
+        <p:spPr>
+          <a:xfrm>
+            <a:off x="9125483" y="3730752"/>
+            <a:ext cx="2124380" cy="0"/>
+          </a:xfrm>
+          <a:prstGeom prst="line">
+            <a:avLst/>
+          </a:prstGeom>
+          <a:ln w="9525">
+            <a:solidFill>
+              <a:srgbClr val="E2E9F1"/>
+            </a:solidFill>
           </a:ln>
-          <a:effectLst/>
         </p:spPr>
         <p:style>
-          <a:lnRef idx="1">
+          <a:lnRef idx="2">
             <a:schemeClr val="accent1"/>
           </a:lnRef>
-          <a:fillRef idx="3">
+          <a:fillRef idx="0">
             <a:schemeClr val="accent1"/>
           </a:fillRef>
-          <a:effectRef idx="2">
+          <a:effectRef idx="1">
             <a:schemeClr val="accent1"/>
           </a:effectRef>
           <a:fontRef idx="minor">
-            <a:schemeClr val="lt1"/>
+            <a:schemeClr val="tx1"/>
           </a:fontRef>
         </p:style>
-        <p:txBody>
-          <a:bodyPr rtlCol="0" anchor="ctr"/>
-          <a:lstStyle/>
-          <a:p>
-            <a:pPr algn="ctr"/>
-          </a:p>
-        </p:txBody>
-      </p:sp>
-      <p:sp>
-        <p:nvSpPr>
-          <p:cNvPr id="61" name="TextBox 60"/>
+      </p:cxnSp>
+      <p:sp>
+        <p:nvSpPr>
+          <p:cNvPr id="80" name="TextBox 79"/>
           <p:cNvSpPr txBox="1"/>
           <p:nvPr/>
         </p:nvSpPr>
         <p:spPr>
           <a:xfrm>
-            <a:off x="9509531" y="4172881"/>
-            <a:ext cx="1804339" cy="364743"/>
+            <a:off x="9125483" y="3767328"/>
+            <a:ext cx="274320" cy="347472"/>
           </a:xfrm>
           <a:prstGeom prst="rect">
             <a:avLst/>
@@ -6402,7 +7120,7 @@
           <a:noFill/>
         </p:spPr>
         <p:txBody>
-          <a:bodyPr wrap="square" lIns="0" rIns="0" tIns="0" bIns="0" anchor="t">
+          <a:bodyPr wrap="square" lIns="0" rIns="0" tIns="0" bIns="0" anchor="ctr">
             <a:spAutoFit/>
           </a:bodyPr>
           <a:lstStyle/>
@@ -6416,9 +7134,51 @@
               </a:spcAft>
             </a:pPr>
             <a:r>
+              <a:rPr sz="850" b="1">
+                <a:solidFill>
+                  <a:srgbClr val="D69E4D"/>
+                </a:solidFill>
+                <a:latin typeface="Calibri"/>
+              </a:rPr>
+              <a:t>02</a:t>
+            </a:r>
+          </a:p>
+        </p:txBody>
+      </p:sp>
+      <p:sp>
+        <p:nvSpPr>
+          <p:cNvPr id="81" name="TextBox 80"/>
+          <p:cNvSpPr txBox="1"/>
+          <p:nvPr/>
+        </p:nvSpPr>
+        <p:spPr>
+          <a:xfrm>
+            <a:off x="9418091" y="3767328"/>
+            <a:ext cx="1831771" cy="347472"/>
+          </a:xfrm>
+          <a:prstGeom prst="rect">
+            <a:avLst/>
+          </a:prstGeom>
+          <a:noFill/>
+        </p:spPr>
+        <p:txBody>
+          <a:bodyPr wrap="square" lIns="0" rIns="0" tIns="0" bIns="0" anchor="ctr">
+            <a:spAutoFit/>
+          </a:bodyPr>
+          <a:lstStyle/>
+          <a:p>
+            <a:pPr algn="l">
+              <a:lnSpc>
+                <a:spcPct val="118000"/>
+              </a:lnSpc>
+              <a:spcAft>
+                <a:spcPts val="0"/>
+              </a:spcAft>
+            </a:pPr>
+            <a:r>
               <a:rPr sz="1000" b="0">
                 <a:solidFill>
-                  <a:srgbClr val="55677C"/>
+                  <a:srgbClr val="0D1B2A"/>
                 </a:solidFill>
                 <a:latin typeface="Calibri"/>
               </a:rPr>
@@ -6427,60 +7187,51 @@
           </a:p>
         </p:txBody>
       </p:sp>
-      <p:sp>
-        <p:nvSpPr>
-          <p:cNvPr id="62" name="Oval 61"/>
-          <p:cNvSpPr/>
-          <p:nvPr/>
-        </p:nvSpPr>
-        <p:spPr>
-          <a:xfrm>
-            <a:off x="9285503" y="4692734"/>
-            <a:ext cx="82296" cy="82296"/>
-          </a:xfrm>
-          <a:prstGeom prst="ellipse">
-            <a:avLst/>
-          </a:prstGeom>
-          <a:solidFill>
-            <a:srgbClr val="C87E12"/>
-          </a:solidFill>
-          <a:ln>
-            <a:noFill/>
+      <p:cxnSp>
+        <p:nvCxnSpPr>
+          <p:cNvPr id="82" name="Connector 81"/>
+          <p:cNvCxnSpPr/>
+          <p:nvPr/>
+        </p:nvCxnSpPr>
+        <p:spPr>
+          <a:xfrm>
+            <a:off x="9125483" y="4151376"/>
+            <a:ext cx="2124380" cy="0"/>
+          </a:xfrm>
+          <a:prstGeom prst="line">
+            <a:avLst/>
+          </a:prstGeom>
+          <a:ln w="9525">
+            <a:solidFill>
+              <a:srgbClr val="E2E9F1"/>
+            </a:solidFill>
           </a:ln>
-          <a:effectLst/>
         </p:spPr>
         <p:style>
-          <a:lnRef idx="1">
+          <a:lnRef idx="2">
             <a:schemeClr val="accent1"/>
           </a:lnRef>
-          <a:fillRef idx="3">
+          <a:fillRef idx="0">
             <a:schemeClr val="accent1"/>
           </a:fillRef>
-          <a:effectRef idx="2">
+          <a:effectRef idx="1">
             <a:schemeClr val="accent1"/>
           </a:effectRef>
           <a:fontRef idx="minor">
-            <a:schemeClr val="lt1"/>
+            <a:schemeClr val="tx1"/>
           </a:fontRef>
         </p:style>
-        <p:txBody>
-          <a:bodyPr rtlCol="0" anchor="ctr"/>
-          <a:lstStyle/>
-          <a:p>
-            <a:pPr algn="ctr"/>
-          </a:p>
-        </p:txBody>
-      </p:sp>
-      <p:sp>
-        <p:nvSpPr>
-          <p:cNvPr id="63" name="TextBox 62"/>
+      </p:cxnSp>
+      <p:sp>
+        <p:nvSpPr>
+          <p:cNvPr id="83" name="TextBox 82"/>
           <p:cNvSpPr txBox="1"/>
           <p:nvPr/>
         </p:nvSpPr>
         <p:spPr>
           <a:xfrm>
-            <a:off x="9509531" y="4633298"/>
-            <a:ext cx="1804339" cy="209803"/>
+            <a:off x="9125483" y="4187952"/>
+            <a:ext cx="274320" cy="347472"/>
           </a:xfrm>
           <a:prstGeom prst="rect">
             <a:avLst/>
@@ -6488,7 +7239,7 @@
           <a:noFill/>
         </p:spPr>
         <p:txBody>
-          <a:bodyPr wrap="square" lIns="0" rIns="0" tIns="0" bIns="0" anchor="t">
+          <a:bodyPr wrap="square" lIns="0" rIns="0" tIns="0" bIns="0" anchor="ctr">
             <a:spAutoFit/>
           </a:bodyPr>
           <a:lstStyle/>
@@ -6502,9 +7253,51 @@
               </a:spcAft>
             </a:pPr>
             <a:r>
+              <a:rPr sz="850" b="1">
+                <a:solidFill>
+                  <a:srgbClr val="D69E4D"/>
+                </a:solidFill>
+                <a:latin typeface="Calibri"/>
+              </a:rPr>
+              <a:t>03</a:t>
+            </a:r>
+          </a:p>
+        </p:txBody>
+      </p:sp>
+      <p:sp>
+        <p:nvSpPr>
+          <p:cNvPr id="84" name="TextBox 83"/>
+          <p:cNvSpPr txBox="1"/>
+          <p:nvPr/>
+        </p:nvSpPr>
+        <p:spPr>
+          <a:xfrm>
+            <a:off x="9418091" y="4187952"/>
+            <a:ext cx="1831771" cy="347472"/>
+          </a:xfrm>
+          <a:prstGeom prst="rect">
+            <a:avLst/>
+          </a:prstGeom>
+          <a:noFill/>
+        </p:spPr>
+        <p:txBody>
+          <a:bodyPr wrap="square" lIns="0" rIns="0" tIns="0" bIns="0" anchor="ctr">
+            <a:spAutoFit/>
+          </a:bodyPr>
+          <a:lstStyle/>
+          <a:p>
+            <a:pPr algn="l">
+              <a:lnSpc>
+                <a:spcPct val="118000"/>
+              </a:lnSpc>
+              <a:spcAft>
+                <a:spcPts val="0"/>
+              </a:spcAft>
+            </a:pPr>
+            <a:r>
               <a:rPr sz="1000" b="0">
                 <a:solidFill>
-                  <a:srgbClr val="55677C"/>
+                  <a:srgbClr val="0D1B2A"/>
                 </a:solidFill>
                 <a:latin typeface="Calibri"/>
               </a:rPr>
@@ -6513,60 +7306,51 @@
           </a:p>
         </p:txBody>
       </p:sp>
-      <p:sp>
-        <p:nvSpPr>
-          <p:cNvPr id="64" name="Oval 63"/>
-          <p:cNvSpPr/>
-          <p:nvPr/>
-        </p:nvSpPr>
-        <p:spPr>
-          <a:xfrm>
-            <a:off x="9285503" y="4998212"/>
-            <a:ext cx="82296" cy="82296"/>
-          </a:xfrm>
-          <a:prstGeom prst="ellipse">
-            <a:avLst/>
-          </a:prstGeom>
-          <a:solidFill>
-            <a:srgbClr val="C87E12"/>
-          </a:solidFill>
-          <a:ln>
-            <a:noFill/>
+      <p:cxnSp>
+        <p:nvCxnSpPr>
+          <p:cNvPr id="85" name="Connector 84"/>
+          <p:cNvCxnSpPr/>
+          <p:nvPr/>
+        </p:nvCxnSpPr>
+        <p:spPr>
+          <a:xfrm>
+            <a:off x="9125483" y="4572000"/>
+            <a:ext cx="2124380" cy="0"/>
+          </a:xfrm>
+          <a:prstGeom prst="line">
+            <a:avLst/>
+          </a:prstGeom>
+          <a:ln w="9525">
+            <a:solidFill>
+              <a:srgbClr val="E2E9F1"/>
+            </a:solidFill>
           </a:ln>
-          <a:effectLst/>
         </p:spPr>
         <p:style>
-          <a:lnRef idx="1">
+          <a:lnRef idx="2">
             <a:schemeClr val="accent1"/>
           </a:lnRef>
-          <a:fillRef idx="3">
+          <a:fillRef idx="0">
             <a:schemeClr val="accent1"/>
           </a:fillRef>
-          <a:effectRef idx="2">
+          <a:effectRef idx="1">
             <a:schemeClr val="accent1"/>
           </a:effectRef>
           <a:fontRef idx="minor">
-            <a:schemeClr val="lt1"/>
+            <a:schemeClr val="tx1"/>
           </a:fontRef>
         </p:style>
-        <p:txBody>
-          <a:bodyPr rtlCol="0" anchor="ctr"/>
-          <a:lstStyle/>
-          <a:p>
-            <a:pPr algn="ctr"/>
-          </a:p>
-        </p:txBody>
-      </p:sp>
-      <p:sp>
-        <p:nvSpPr>
-          <p:cNvPr id="65" name="TextBox 64"/>
+      </p:cxnSp>
+      <p:sp>
+        <p:nvSpPr>
+          <p:cNvPr id="86" name="TextBox 85"/>
           <p:cNvSpPr txBox="1"/>
           <p:nvPr/>
         </p:nvSpPr>
         <p:spPr>
           <a:xfrm>
-            <a:off x="9509531" y="4938776"/>
-            <a:ext cx="1804339" cy="364743"/>
+            <a:off x="9125483" y="4608576"/>
+            <a:ext cx="274320" cy="347472"/>
           </a:xfrm>
           <a:prstGeom prst="rect">
             <a:avLst/>
@@ -6574,7 +7358,7 @@
           <a:noFill/>
         </p:spPr>
         <p:txBody>
-          <a:bodyPr wrap="square" lIns="0" rIns="0" tIns="0" bIns="0" anchor="t">
+          <a:bodyPr wrap="square" lIns="0" rIns="0" tIns="0" bIns="0" anchor="ctr">
             <a:spAutoFit/>
           </a:bodyPr>
           <a:lstStyle/>
@@ -6588,9 +7372,51 @@
               </a:spcAft>
             </a:pPr>
             <a:r>
+              <a:rPr sz="850" b="1">
+                <a:solidFill>
+                  <a:srgbClr val="D69E4D"/>
+                </a:solidFill>
+                <a:latin typeface="Calibri"/>
+              </a:rPr>
+              <a:t>04</a:t>
+            </a:r>
+          </a:p>
+        </p:txBody>
+      </p:sp>
+      <p:sp>
+        <p:nvSpPr>
+          <p:cNvPr id="87" name="TextBox 86"/>
+          <p:cNvSpPr txBox="1"/>
+          <p:nvPr/>
+        </p:nvSpPr>
+        <p:spPr>
+          <a:xfrm>
+            <a:off x="9418091" y="4608576"/>
+            <a:ext cx="1831771" cy="347472"/>
+          </a:xfrm>
+          <a:prstGeom prst="rect">
+            <a:avLst/>
+          </a:prstGeom>
+          <a:noFill/>
+        </p:spPr>
+        <p:txBody>
+          <a:bodyPr wrap="square" lIns="0" rIns="0" tIns="0" bIns="0" anchor="ctr">
+            <a:spAutoFit/>
+          </a:bodyPr>
+          <a:lstStyle/>
+          <a:p>
+            <a:pPr algn="l">
+              <a:lnSpc>
+                <a:spcPct val="118000"/>
+              </a:lnSpc>
+              <a:spcAft>
+                <a:spcPts val="0"/>
+              </a:spcAft>
+            </a:pPr>
+            <a:r>
               <a:rPr sz="1000" b="0">
                 <a:solidFill>
-                  <a:srgbClr val="55677C"/>
+                  <a:srgbClr val="0D1B2A"/>
                 </a:solidFill>
                 <a:latin typeface="Calibri"/>
               </a:rPr>
@@ -6601,14 +7427,142 @@
       </p:sp>
       <p:sp>
         <p:nvSpPr>
-          <p:cNvPr id="66" name="Rounded Rectangle 65"/>
+          <p:cNvPr id="88" name="Rounded Rectangle 87"/>
           <p:cNvSpPr/>
           <p:nvPr/>
         </p:nvSpPr>
         <p:spPr>
           <a:xfrm>
-            <a:off x="640080" y="5632704"/>
-            <a:ext cx="10911535" cy="566928"/>
+            <a:off x="8951747" y="4956048"/>
+            <a:ext cx="2471851" cy="502920"/>
+          </a:xfrm>
+          <a:prstGeom prst="roundRect">
+            <a:avLst>
+              <a:gd name="adj" fmla="val 3000"/>
+            </a:avLst>
+          </a:prstGeom>
+          <a:solidFill>
+            <a:srgbClr val="ECE9E2"/>
+          </a:solidFill>
+          <a:ln>
+            <a:noFill/>
+          </a:ln>
+          <a:effectLst/>
+        </p:spPr>
+        <p:style>
+          <a:lnRef idx="1">
+            <a:schemeClr val="accent1"/>
+          </a:lnRef>
+          <a:fillRef idx="3">
+            <a:schemeClr val="accent1"/>
+          </a:fillRef>
+          <a:effectRef idx="2">
+            <a:schemeClr val="accent1"/>
+          </a:effectRef>
+          <a:fontRef idx="minor">
+            <a:schemeClr val="lt1"/>
+          </a:fontRef>
+        </p:style>
+        <p:txBody>
+          <a:bodyPr rtlCol="0" anchor="ctr"/>
+          <a:lstStyle/>
+          <a:p/>
+        </p:txBody>
+      </p:sp>
+      <p:sp>
+        <p:nvSpPr>
+          <p:cNvPr id="89" name="TextBox 88"/>
+          <p:cNvSpPr txBox="1"/>
+          <p:nvPr/>
+        </p:nvSpPr>
+        <p:spPr>
+          <a:xfrm>
+            <a:off x="9125483" y="5001768"/>
+            <a:ext cx="2124379" cy="182880"/>
+          </a:xfrm>
+          <a:prstGeom prst="rect">
+            <a:avLst/>
+          </a:prstGeom>
+          <a:noFill/>
+        </p:spPr>
+        <p:txBody>
+          <a:bodyPr wrap="square" lIns="0" rIns="0" tIns="0" bIns="0" anchor="t">
+            <a:spAutoFit/>
+          </a:bodyPr>
+          <a:lstStyle/>
+          <a:p>
+            <a:pPr algn="l">
+              <a:lnSpc>
+                <a:spcPct val="120000"/>
+              </a:lnSpc>
+              <a:spcAft>
+                <a:spcPts val="0"/>
+              </a:spcAft>
+            </a:pPr>
+            <a:r>
+              <a:rPr sz="750" b="1" spc="140">
+                <a:solidFill>
+                  <a:srgbClr val="8B9AAA"/>
+                </a:solidFill>
+                <a:latin typeface="Calibri"/>
+              </a:rPr>
+              <a:t>LEVERT OP</a:t>
+            </a:r>
+          </a:p>
+        </p:txBody>
+      </p:sp>
+      <p:sp>
+        <p:nvSpPr>
+          <p:cNvPr id="90" name="TextBox 89"/>
+          <p:cNvSpPr txBox="1"/>
+          <p:nvPr/>
+        </p:nvSpPr>
+        <p:spPr>
+          <a:xfrm>
+            <a:off x="9125483" y="5175504"/>
+            <a:ext cx="2124379" cy="237744"/>
+          </a:xfrm>
+          <a:prstGeom prst="rect">
+            <a:avLst/>
+          </a:prstGeom>
+          <a:noFill/>
+        </p:spPr>
+        <p:txBody>
+          <a:bodyPr wrap="square" lIns="0" rIns="0" tIns="0" bIns="0" anchor="t">
+            <a:spAutoFit/>
+          </a:bodyPr>
+          <a:lstStyle/>
+          <a:p>
+            <a:pPr algn="l">
+              <a:lnSpc>
+                <a:spcPct val="120000"/>
+              </a:lnSpc>
+              <a:spcAft>
+                <a:spcPts val="0"/>
+              </a:spcAft>
+            </a:pPr>
+            <a:r>
+              <a:rPr sz="1150" b="1">
+                <a:solidFill>
+                  <a:srgbClr val="C87E12"/>
+                </a:solidFill>
+                <a:latin typeface="Calibri"/>
+              </a:rPr>
+              <a:t>fte-(mis)match</a:t>
+            </a:r>
+          </a:p>
+        </p:txBody>
+      </p:sp>
+      <p:sp>
+        <p:nvSpPr>
+          <p:cNvPr id="91" name="Rounded Rectangle 90"/>
+          <p:cNvSpPr/>
+          <p:nvPr/>
+        </p:nvSpPr>
+        <p:spPr>
+          <a:xfrm>
+            <a:off x="640080" y="5650992"/>
+            <a:ext cx="10911535" cy="548640"/>
           </a:xfrm>
           <a:prstGeom prst="roundRect">
             <a:avLst>
@@ -6653,14 +7607,14 @@
       </p:sp>
       <p:sp>
         <p:nvSpPr>
-          <p:cNvPr id="67" name="Rounded Rectangle 66"/>
+          <p:cNvPr id="92" name="Rounded Rectangle 91"/>
           <p:cNvSpPr/>
           <p:nvPr/>
         </p:nvSpPr>
         <p:spPr>
           <a:xfrm>
-            <a:off x="640080" y="5632704"/>
-            <a:ext cx="50292" cy="566928"/>
+            <a:off x="640080" y="5650992"/>
+            <a:ext cx="50292" cy="548640"/>
           </a:xfrm>
           <a:prstGeom prst="roundRect">
             <a:avLst>
@@ -6697,14 +7651,14 @@
       </p:sp>
       <p:sp>
         <p:nvSpPr>
-          <p:cNvPr id="68" name="TextBox 67"/>
+          <p:cNvPr id="93" name="TextBox 92"/>
           <p:cNvSpPr txBox="1"/>
           <p:nvPr/>
         </p:nvSpPr>
         <p:spPr>
           <a:xfrm>
-            <a:off x="969264" y="5715000"/>
-            <a:ext cx="9997135" cy="402336"/>
+            <a:off x="969264" y="5733288"/>
+            <a:ext cx="9997135" cy="384048"/>
           </a:xfrm>
           <a:prstGeom prst="rect">
             <a:avLst/>
@@ -6758,7 +7712,7 @@
       </p:sp>
       <p:cxnSp>
         <p:nvCxnSpPr>
-          <p:cNvPr id="69" name="Connector 68"/>
+          <p:cNvPr id="94" name="Connector 93"/>
           <p:cNvCxnSpPr/>
           <p:nvPr/>
         </p:nvCxnSpPr>
@@ -6793,7 +7747,7 @@
       </p:cxnSp>
       <p:sp>
         <p:nvSpPr>
-          <p:cNvPr id="70" name="TextBox 69"/>
+          <p:cNvPr id="95" name="TextBox 94"/>
           <p:cNvSpPr txBox="1"/>
           <p:nvPr/>
         </p:nvSpPr>
@@ -6835,7 +7789,7 @@
       </p:sp>
       <p:sp>
         <p:nvSpPr>
-          <p:cNvPr id="71" name="TextBox 70"/>
+          <p:cNvPr id="96" name="TextBox 95"/>
           <p:cNvSpPr txBox="1"/>
           <p:nvPr/>
         </p:nvSpPr>
@@ -6976,7 +7930,7 @@
             <a:r>
               <a:rPr sz="1050" b="1" spc="220">
                 <a:solidFill>
-                  <a:srgbClr val="1F6FB2"/>
+                  <a:srgbClr val="0E9A87"/>
                 </a:solidFill>
                 <a:latin typeface="Calibri"/>
               </a:rPr>
@@ -7022,7 +7976,7 @@
                 </a:solidFill>
                 <a:latin typeface="Calibri"/>
               </a:rPr>
-              <a:t>Formatieberekening</a:t>
+              <a:t>Formatieberekening · 1</a:t>
             </a:r>
           </a:p>
         </p:txBody>
@@ -7064,7 +8018,7 @@
                 </a:solidFill>
                 <a:latin typeface="Calibri"/>
               </a:rPr>
-              <a:t>Voorbeeld radiologie — van bruto arbeidsduur naar de fte-(mis)match</a:t>
+              <a:t>Voorbeeld radiologie — van bruto arbeidsduur naar netto inzetbaarheid</a:t>
             </a:r>
           </a:p>
         </p:txBody>
@@ -7104,37 +8058,53 @@
           </a:fontRef>
         </p:style>
       </p:cxnSp>
-      <p:sp>
-        <p:nvSpPr>
-          <p:cNvPr id="7" name="Rounded Rectangle 6"/>
+      <p:pic>
+        <p:nvPicPr>
+          <p:cNvPr id="7" name="Picture 6" descr="1-bruto.png"/>
+          <p:cNvPicPr>
+            <a:picLocks noChangeAspect="1"/>
+          </p:cNvPicPr>
+          <p:nvPr/>
+        </p:nvPicPr>
+        <p:blipFill>
+          <a:blip r:embed="rId2"/>
+          <a:stretch>
+            <a:fillRect/>
+          </a:stretch>
+        </p:blipFill>
+        <p:spPr>
+          <a:xfrm>
+            <a:off x="5242255" y="1700784"/>
+            <a:ext cx="6309360" cy="1217034"/>
+          </a:xfrm>
+          <a:prstGeom prst="rect">
+            <a:avLst/>
+          </a:prstGeom>
+        </p:spPr>
+      </p:pic>
+      <p:sp>
+        <p:nvSpPr>
+          <p:cNvPr id="8" name="Rounded Rectangle 7"/>
           <p:cNvSpPr/>
           <p:nvPr/>
         </p:nvSpPr>
         <p:spPr>
           <a:xfrm>
-            <a:off x="640080" y="1700784"/>
-            <a:ext cx="2021372" cy="932688"/>
+            <a:off x="5205679" y="1664208"/>
+            <a:ext cx="6382512" cy="1290186"/>
           </a:xfrm>
           <a:prstGeom prst="roundRect">
             <a:avLst>
-              <a:gd name="adj" fmla="val 3000"/>
+              <a:gd name="adj" fmla="val 2000"/>
             </a:avLst>
           </a:prstGeom>
-          <a:solidFill>
-            <a:srgbClr val="D6EBEE"/>
-          </a:solidFill>
-          <a:ln w="15875">
+          <a:noFill/>
+          <a:ln w="12700">
             <a:solidFill>
-              <a:srgbClr val="9BD3D0"/>
+              <a:srgbClr val="E2E9F1"/>
             </a:solidFill>
           </a:ln>
-          <a:effectLst>
-            <a:outerShdw blurRad="60000" dist="18000" dir="5400000" rotWithShape="0">
-              <a:srgbClr val="1B3A5C">
-                <a:alpha val="7000"/>
-              </a:srgbClr>
-            </a:outerShdw>
-          </a:effectLst>
+          <a:effectLst/>
         </p:spPr>
         <p:style>
           <a:lnRef idx="1">
@@ -7158,14 +8128,58 @@
       </p:sp>
       <p:sp>
         <p:nvSpPr>
-          <p:cNvPr id="8" name="TextBox 7"/>
+          <p:cNvPr id="9" name="Rounded Rectangle 8"/>
+          <p:cNvSpPr/>
+          <p:nvPr/>
+        </p:nvSpPr>
+        <p:spPr>
+          <a:xfrm>
+            <a:off x="640080" y="1700784"/>
+            <a:ext cx="50292" cy="1217034"/>
+          </a:xfrm>
+          <a:prstGeom prst="roundRect">
+            <a:avLst>
+              <a:gd name="adj" fmla="val 50000"/>
+            </a:avLst>
+          </a:prstGeom>
+          <a:solidFill>
+            <a:srgbClr val="0E9A87"/>
+          </a:solidFill>
+          <a:ln>
+            <a:noFill/>
+          </a:ln>
+          <a:effectLst/>
+        </p:spPr>
+        <p:style>
+          <a:lnRef idx="1">
+            <a:schemeClr val="accent1"/>
+          </a:lnRef>
+          <a:fillRef idx="3">
+            <a:schemeClr val="accent1"/>
+          </a:fillRef>
+          <a:effectRef idx="2">
+            <a:schemeClr val="accent1"/>
+          </a:effectRef>
+          <a:fontRef idx="minor">
+            <a:schemeClr val="lt1"/>
+          </a:fontRef>
+        </p:style>
+        <p:txBody>
+          <a:bodyPr rtlCol="0" anchor="ctr"/>
+          <a:lstStyle/>
+          <a:p/>
+        </p:txBody>
+      </p:sp>
+      <p:sp>
+        <p:nvSpPr>
+          <p:cNvPr id="10" name="TextBox 9"/>
           <p:cNvSpPr txBox="1"/>
           <p:nvPr/>
         </p:nvSpPr>
         <p:spPr>
           <a:xfrm>
-            <a:off x="804671" y="1828800"/>
-            <a:ext cx="1692188" cy="310896"/>
+            <a:off x="877824" y="1737360"/>
+            <a:ext cx="4053535" cy="365760"/>
           </a:xfrm>
           <a:prstGeom prst="rect">
             <a:avLst/>
@@ -7178,7 +8192,7 @@
           </a:bodyPr>
           <a:lstStyle/>
           <a:p>
-            <a:pPr algn="ctr">
+            <a:pPr algn="l">
               <a:lnSpc>
                 <a:spcPct val="120000"/>
               </a:lnSpc>
@@ -7187,7 +8201,7 @@
               </a:spcAft>
             </a:pPr>
             <a:r>
-              <a:rPr sz="1650" b="1">
+              <a:rPr sz="1700" b="1">
                 <a:solidFill>
                   <a:srgbClr val="0E9A87"/>
                 </a:solidFill>
@@ -7200,14 +8214,14 @@
       </p:sp>
       <p:sp>
         <p:nvSpPr>
-          <p:cNvPr id="9" name="TextBox 8"/>
+          <p:cNvPr id="11" name="TextBox 10"/>
           <p:cNvSpPr txBox="1"/>
           <p:nvPr/>
         </p:nvSpPr>
         <p:spPr>
           <a:xfrm>
-            <a:off x="804671" y="2212848"/>
-            <a:ext cx="1692188" cy="310896"/>
+            <a:off x="877824" y="2066544"/>
+            <a:ext cx="4053535" cy="219456"/>
           </a:xfrm>
           <a:prstGeom prst="rect">
             <a:avLst/>
@@ -7220,147 +8234,7 @@
           </a:bodyPr>
           <a:lstStyle/>
           <a:p>
-            <a:pPr algn="ctr">
-              <a:lnSpc>
-                <a:spcPct val="116000"/>
-              </a:lnSpc>
-              <a:spcAft>
-                <a:spcPts val="0"/>
-              </a:spcAft>
-            </a:pPr>
-            <a:r>
-              <a:rPr sz="950" b="0">
-                <a:solidFill>
-                  <a:srgbClr val="55677C"/>
-                </a:solidFill>
-                <a:latin typeface="Calibri"/>
-              </a:rPr>
-              <a:t>vanuit HR en F&amp;C</a:t>
-            </a:r>
-          </a:p>
-        </p:txBody>
-      </p:sp>
-      <p:sp>
-        <p:nvSpPr>
-          <p:cNvPr id="10" name="Right Arrow 9"/>
-          <p:cNvSpPr/>
-          <p:nvPr/>
-        </p:nvSpPr>
-        <p:spPr>
-          <a:xfrm>
-            <a:off x="2684312" y="2084832"/>
-            <a:ext cx="155448" cy="155448"/>
-          </a:xfrm>
-          <a:prstGeom prst="rightArrow">
-            <a:avLst/>
-          </a:prstGeom>
-          <a:solidFill>
-            <a:srgbClr val="0E9A87">
-              <a:alpha val="55000"/>
-            </a:srgbClr>
-          </a:solidFill>
-          <a:ln>
-            <a:noFill/>
-          </a:ln>
-          <a:effectLst/>
-        </p:spPr>
-        <p:style>
-          <a:lnRef idx="1">
-            <a:schemeClr val="accent1"/>
-          </a:lnRef>
-          <a:fillRef idx="3">
-            <a:schemeClr val="accent1"/>
-          </a:fillRef>
-          <a:effectRef idx="2">
-            <a:schemeClr val="accent1"/>
-          </a:effectRef>
-          <a:fontRef idx="minor">
-            <a:schemeClr val="lt1"/>
-          </a:fontRef>
-        </p:style>
-        <p:txBody>
-          <a:bodyPr rtlCol="0" anchor="ctr"/>
-          <a:lstStyle/>
-          <a:p>
-            <a:pPr algn="ctr"/>
-          </a:p>
-        </p:txBody>
-      </p:sp>
-      <p:sp>
-        <p:nvSpPr>
-          <p:cNvPr id="11" name="Rounded Rectangle 10"/>
-          <p:cNvSpPr/>
-          <p:nvPr/>
-        </p:nvSpPr>
-        <p:spPr>
-          <a:xfrm>
-            <a:off x="2862620" y="1700784"/>
-            <a:ext cx="2021372" cy="932688"/>
-          </a:xfrm>
-          <a:prstGeom prst="roundRect">
-            <a:avLst>
-              <a:gd name="adj" fmla="val 3000"/>
-            </a:avLst>
-          </a:prstGeom>
-          <a:solidFill>
-            <a:srgbClr val="ECE8E0"/>
-          </a:solidFill>
-          <a:ln w="15875">
-            <a:solidFill>
-              <a:srgbClr val="E1C8A3"/>
-            </a:solidFill>
-          </a:ln>
-          <a:effectLst>
-            <a:outerShdw blurRad="60000" dist="18000" dir="5400000" rotWithShape="0">
-              <a:srgbClr val="1B3A5C">
-                <a:alpha val="7000"/>
-              </a:srgbClr>
-            </a:outerShdw>
-          </a:effectLst>
-        </p:spPr>
-        <p:style>
-          <a:lnRef idx="1">
-            <a:schemeClr val="accent1"/>
-          </a:lnRef>
-          <a:fillRef idx="3">
-            <a:schemeClr val="accent1"/>
-          </a:fillRef>
-          <a:effectRef idx="2">
-            <a:schemeClr val="accent1"/>
-          </a:effectRef>
-          <a:fontRef idx="minor">
-            <a:schemeClr val="lt1"/>
-          </a:fontRef>
-        </p:style>
-        <p:txBody>
-          <a:bodyPr rtlCol="0" anchor="ctr"/>
-          <a:lstStyle/>
-          <a:p/>
-        </p:txBody>
-      </p:sp>
-      <p:sp>
-        <p:nvSpPr>
-          <p:cNvPr id="12" name="TextBox 11"/>
-          <p:cNvSpPr txBox="1"/>
-          <p:nvPr/>
-        </p:nvSpPr>
-        <p:spPr>
-          <a:xfrm>
-            <a:off x="3027212" y="1828800"/>
-            <a:ext cx="1692188" cy="310896"/>
-          </a:xfrm>
-          <a:prstGeom prst="rect">
-            <a:avLst/>
-          </a:prstGeom>
-          <a:noFill/>
-        </p:spPr>
-        <p:txBody>
-          <a:bodyPr wrap="square" lIns="0" rIns="0" tIns="0" bIns="0" anchor="t">
-            <a:spAutoFit/>
-          </a:bodyPr>
-          <a:lstStyle/>
-          <a:p>
-            <a:pPr algn="ctr">
+            <a:pPr algn="l">
               <a:lnSpc>
                 <a:spcPct val="120000"/>
               </a:lnSpc>
@@ -7369,167 +8243,27 @@
               </a:spcAft>
             </a:pPr>
             <a:r>
-              <a:rPr sz="1650" b="1">
-                <a:solidFill>
-                  <a:srgbClr val="C87E12"/>
-                </a:solidFill>
-                <a:latin typeface="Calibri"/>
-              </a:rPr>
-              <a:t>Afwezigheid</a:t>
-            </a:r>
-          </a:p>
-        </p:txBody>
-      </p:sp>
-      <p:sp>
-        <p:nvSpPr>
-          <p:cNvPr id="13" name="TextBox 12"/>
-          <p:cNvSpPr txBox="1"/>
-          <p:nvPr/>
-        </p:nvSpPr>
-        <p:spPr>
-          <a:xfrm>
-            <a:off x="3027212" y="2212848"/>
-            <a:ext cx="1692188" cy="310896"/>
-          </a:xfrm>
-          <a:prstGeom prst="rect">
-            <a:avLst/>
-          </a:prstGeom>
-          <a:noFill/>
-        </p:spPr>
-        <p:txBody>
-          <a:bodyPr wrap="square" lIns="0" rIns="0" tIns="0" bIns="0" anchor="t">
-            <a:spAutoFit/>
-          </a:bodyPr>
-          <a:lstStyle/>
-          <a:p>
-            <a:pPr algn="ctr">
-              <a:lnSpc>
-                <a:spcPct val="116000"/>
-              </a:lnSpc>
-              <a:spcAft>
-                <a:spcPts val="0"/>
-              </a:spcAft>
-            </a:pPr>
-            <a:r>
-              <a:rPr sz="950" b="0">
+              <a:rPr sz="1000" b="0">
                 <a:solidFill>
                   <a:srgbClr val="55677C"/>
                 </a:solidFill>
                 <a:latin typeface="Calibri"/>
               </a:rPr>
-              <a:t>vanuit HR en F&amp;C</a:t>
-            </a:r>
-          </a:p>
-        </p:txBody>
-      </p:sp>
-      <p:sp>
-        <p:nvSpPr>
-          <p:cNvPr id="14" name="Right Arrow 13"/>
-          <p:cNvSpPr/>
-          <p:nvPr/>
-        </p:nvSpPr>
-        <p:spPr>
-          <a:xfrm>
-            <a:off x="4906853" y="2084832"/>
-            <a:ext cx="155448" cy="155448"/>
-          </a:xfrm>
-          <a:prstGeom prst="rightArrow">
-            <a:avLst/>
-          </a:prstGeom>
-          <a:solidFill>
-            <a:srgbClr val="C87E12">
-              <a:alpha val="55000"/>
-            </a:srgbClr>
-          </a:solidFill>
-          <a:ln>
-            <a:noFill/>
-          </a:ln>
-          <a:effectLst/>
-        </p:spPr>
-        <p:style>
-          <a:lnRef idx="1">
-            <a:schemeClr val="accent1"/>
-          </a:lnRef>
-          <a:fillRef idx="3">
-            <a:schemeClr val="accent1"/>
-          </a:fillRef>
-          <a:effectRef idx="2">
-            <a:schemeClr val="accent1"/>
-          </a:effectRef>
-          <a:fontRef idx="minor">
-            <a:schemeClr val="lt1"/>
-          </a:fontRef>
-        </p:style>
-        <p:txBody>
-          <a:bodyPr rtlCol="0" anchor="ctr"/>
-          <a:lstStyle/>
-          <a:p>
-            <a:pPr algn="ctr"/>
-          </a:p>
-        </p:txBody>
-      </p:sp>
-      <p:sp>
-        <p:nvSpPr>
-          <p:cNvPr id="15" name="Rounded Rectangle 14"/>
-          <p:cNvSpPr/>
-          <p:nvPr/>
-        </p:nvSpPr>
-        <p:spPr>
-          <a:xfrm>
-            <a:off x="5085161" y="1700784"/>
-            <a:ext cx="2021372" cy="932688"/>
-          </a:xfrm>
-          <a:prstGeom prst="roundRect">
-            <a:avLst>
-              <a:gd name="adj" fmla="val 3000"/>
-            </a:avLst>
-          </a:prstGeom>
-          <a:solidFill>
-            <a:srgbClr val="D8E6F3"/>
-          </a:solidFill>
-          <a:ln w="15875">
-            <a:solidFill>
-              <a:srgbClr val="A1C3E0"/>
-            </a:solidFill>
-          </a:ln>
-          <a:effectLst>
-            <a:outerShdw blurRad="60000" dist="18000" dir="5400000" rotWithShape="0">
-              <a:srgbClr val="1B3A5C">
-                <a:alpha val="7000"/>
-              </a:srgbClr>
-            </a:outerShdw>
-          </a:effectLst>
-        </p:spPr>
-        <p:style>
-          <a:lnRef idx="1">
-            <a:schemeClr val="accent1"/>
-          </a:lnRef>
-          <a:fillRef idx="3">
-            <a:schemeClr val="accent1"/>
-          </a:fillRef>
-          <a:effectRef idx="2">
-            <a:schemeClr val="accent1"/>
-          </a:effectRef>
-          <a:fontRef idx="minor">
-            <a:schemeClr val="lt1"/>
-          </a:fontRef>
-        </p:style>
-        <p:txBody>
-          <a:bodyPr rtlCol="0" anchor="ctr"/>
-          <a:lstStyle/>
-          <a:p/>
-        </p:txBody>
-      </p:sp>
-      <p:sp>
-        <p:nvSpPr>
-          <p:cNvPr id="16" name="TextBox 15"/>
+              <a:t>input vanuit HR en F&amp;C</a:t>
+            </a:r>
+          </a:p>
+        </p:txBody>
+      </p:sp>
+      <p:sp>
+        <p:nvSpPr>
+          <p:cNvPr id="12" name="TextBox 11"/>
           <p:cNvSpPr txBox="1"/>
           <p:nvPr/>
         </p:nvSpPr>
         <p:spPr>
           <a:xfrm>
-            <a:off x="5249753" y="1828800"/>
-            <a:ext cx="1692188" cy="310896"/>
+            <a:off x="2864815" y="1719072"/>
+            <a:ext cx="1828800" cy="402336"/>
           </a:xfrm>
           <a:prstGeom prst="rect">
             <a:avLst/>
@@ -7542,7 +8276,7 @@
           </a:bodyPr>
           <a:lstStyle/>
           <a:p>
-            <a:pPr algn="ctr">
+            <a:pPr algn="r">
               <a:lnSpc>
                 <a:spcPct val="120000"/>
               </a:lnSpc>
@@ -7551,27 +8285,27 @@
               </a:spcAft>
             </a:pPr>
             <a:r>
-              <a:rPr sz="1650" b="1">
+              <a:rPr sz="2600" b="1">
                 <a:solidFill>
-                  <a:srgbClr val="1F6FB2"/>
+                  <a:srgbClr val="0E9A87"/>
                 </a:solidFill>
                 <a:latin typeface="Calibri"/>
               </a:rPr>
-              <a:t>Netto</a:t>
-            </a:r>
-          </a:p>
-        </p:txBody>
-      </p:sp>
-      <p:sp>
-        <p:nvSpPr>
-          <p:cNvPr id="17" name="TextBox 16"/>
+              <a:t>1.878</a:t>
+            </a:r>
+          </a:p>
+        </p:txBody>
+      </p:sp>
+      <p:sp>
+        <p:nvSpPr>
+          <p:cNvPr id="13" name="TextBox 12"/>
           <p:cNvSpPr txBox="1"/>
           <p:nvPr/>
         </p:nvSpPr>
         <p:spPr>
           <a:xfrm>
-            <a:off x="5249753" y="2212848"/>
-            <a:ext cx="1692188" cy="310896"/>
+            <a:off x="2864815" y="2103120"/>
+            <a:ext cx="1828800" cy="201168"/>
           </a:xfrm>
           <a:prstGeom prst="rect">
             <a:avLst/>
@@ -7584,147 +8318,7 @@
           </a:bodyPr>
           <a:lstStyle/>
           <a:p>
-            <a:pPr algn="ctr">
-              <a:lnSpc>
-                <a:spcPct val="116000"/>
-              </a:lnSpc>
-              <a:spcAft>
-                <a:spcPts val="0"/>
-              </a:spcAft>
-            </a:pPr>
-            <a:r>
-              <a:rPr sz="950" b="0">
-                <a:solidFill>
-                  <a:srgbClr val="55677C"/>
-                </a:solidFill>
-                <a:latin typeface="Calibri"/>
-              </a:rPr>
-              <a:t>bruto min afwezigheid</a:t>
-            </a:r>
-          </a:p>
-        </p:txBody>
-      </p:sp>
-      <p:sp>
-        <p:nvSpPr>
-          <p:cNvPr id="18" name="Right Arrow 17"/>
-          <p:cNvSpPr/>
-          <p:nvPr/>
-        </p:nvSpPr>
-        <p:spPr>
-          <a:xfrm>
-            <a:off x="7129393" y="2084832"/>
-            <a:ext cx="155448" cy="155448"/>
-          </a:xfrm>
-          <a:prstGeom prst="rightArrow">
-            <a:avLst/>
-          </a:prstGeom>
-          <a:solidFill>
-            <a:srgbClr val="1F6FB2">
-              <a:alpha val="55000"/>
-            </a:srgbClr>
-          </a:solidFill>
-          <a:ln>
-            <a:noFill/>
-          </a:ln>
-          <a:effectLst/>
-        </p:spPr>
-        <p:style>
-          <a:lnRef idx="1">
-            <a:schemeClr val="accent1"/>
-          </a:lnRef>
-          <a:fillRef idx="3">
-            <a:schemeClr val="accent1"/>
-          </a:fillRef>
-          <a:effectRef idx="2">
-            <a:schemeClr val="accent1"/>
-          </a:effectRef>
-          <a:fontRef idx="minor">
-            <a:schemeClr val="lt1"/>
-          </a:fontRef>
-        </p:style>
-        <p:txBody>
-          <a:bodyPr rtlCol="0" anchor="ctr"/>
-          <a:lstStyle/>
-          <a:p>
-            <a:pPr algn="ctr"/>
-          </a:p>
-        </p:txBody>
-      </p:sp>
-      <p:sp>
-        <p:nvSpPr>
-          <p:cNvPr id="19" name="Rounded Rectangle 18"/>
-          <p:cNvSpPr/>
-          <p:nvPr/>
-        </p:nvSpPr>
-        <p:spPr>
-          <a:xfrm>
-            <a:off x="7307701" y="1700784"/>
-            <a:ext cx="2021372" cy="932688"/>
-          </a:xfrm>
-          <a:prstGeom prst="roundRect">
-            <a:avLst>
-              <a:gd name="adj" fmla="val 3000"/>
-            </a:avLst>
-          </a:prstGeom>
-          <a:solidFill>
-            <a:srgbClr val="E1E1F2"/>
-          </a:solidFill>
-          <a:ln w="15875">
-            <a:solidFill>
-              <a:srgbClr val="BEB5DC"/>
-            </a:solidFill>
-          </a:ln>
-          <a:effectLst>
-            <a:outerShdw blurRad="60000" dist="18000" dir="5400000" rotWithShape="0">
-              <a:srgbClr val="1B3A5C">
-                <a:alpha val="7000"/>
-              </a:srgbClr>
-            </a:outerShdw>
-          </a:effectLst>
-        </p:spPr>
-        <p:style>
-          <a:lnRef idx="1">
-            <a:schemeClr val="accent1"/>
-          </a:lnRef>
-          <a:fillRef idx="3">
-            <a:schemeClr val="accent1"/>
-          </a:fillRef>
-          <a:effectRef idx="2">
-            <a:schemeClr val="accent1"/>
-          </a:effectRef>
-          <a:fontRef idx="minor">
-            <a:schemeClr val="lt1"/>
-          </a:fontRef>
-        </p:style>
-        <p:txBody>
-          <a:bodyPr rtlCol="0" anchor="ctr"/>
-          <a:lstStyle/>
-          <a:p/>
-        </p:txBody>
-      </p:sp>
-      <p:sp>
-        <p:nvSpPr>
-          <p:cNvPr id="20" name="TextBox 19"/>
-          <p:cNvSpPr txBox="1"/>
-          <p:nvPr/>
-        </p:nvSpPr>
-        <p:spPr>
-          <a:xfrm>
-            <a:off x="7472293" y="1828800"/>
-            <a:ext cx="1692188" cy="310896"/>
-          </a:xfrm>
-          <a:prstGeom prst="rect">
-            <a:avLst/>
-          </a:prstGeom>
-          <a:noFill/>
-        </p:spPr>
-        <p:txBody>
-          <a:bodyPr wrap="square" lIns="0" rIns="0" tIns="0" bIns="0" anchor="t">
-            <a:spAutoFit/>
-          </a:bodyPr>
-          <a:lstStyle/>
-          <a:p>
-            <a:pPr algn="ctr">
+            <a:pPr algn="r">
               <a:lnSpc>
                 <a:spcPct val="120000"/>
               </a:lnSpc>
@@ -7733,77 +8327,103 @@
               </a:spcAft>
             </a:pPr>
             <a:r>
-              <a:rPr sz="1650" b="1">
+              <a:rPr sz="850" b="1" spc="120">
                 <a:solidFill>
-                  <a:srgbClr val="6B4BA8"/>
+                  <a:srgbClr val="8B9AAA"/>
                 </a:solidFill>
                 <a:latin typeface="Calibri"/>
               </a:rPr>
-              <a:t>Benodigd</a:t>
-            </a:r>
-          </a:p>
-        </p:txBody>
-      </p:sp>
-      <p:sp>
-        <p:nvSpPr>
-          <p:cNvPr id="21" name="TextBox 20"/>
-          <p:cNvSpPr txBox="1"/>
-          <p:nvPr/>
-        </p:nvSpPr>
-        <p:spPr>
-          <a:xfrm>
-            <a:off x="7472293" y="2212848"/>
-            <a:ext cx="1692188" cy="310896"/>
+              <a:t>BRUTO UREN PER FTE</a:t>
+            </a:r>
+          </a:p>
+        </p:txBody>
+      </p:sp>
+      <p:pic>
+        <p:nvPicPr>
+          <p:cNvPr id="14" name="Picture 13" descr="2-afwezigheid.png"/>
+          <p:cNvPicPr>
+            <a:picLocks noChangeAspect="1"/>
+          </p:cNvPicPr>
+          <p:nvPr/>
+        </p:nvPicPr>
+        <p:blipFill>
+          <a:blip r:embed="rId3"/>
+          <a:stretch>
+            <a:fillRect/>
+          </a:stretch>
+        </p:blipFill>
+        <p:spPr>
+          <a:xfrm>
+            <a:off x="5242255" y="3036690"/>
+            <a:ext cx="6309360" cy="2265925"/>
           </a:xfrm>
           <a:prstGeom prst="rect">
             <a:avLst/>
           </a:prstGeom>
+        </p:spPr>
+      </p:pic>
+      <p:sp>
+        <p:nvSpPr>
+          <p:cNvPr id="15" name="Rounded Rectangle 14"/>
+          <p:cNvSpPr/>
+          <p:nvPr/>
+        </p:nvSpPr>
+        <p:spPr>
+          <a:xfrm>
+            <a:off x="5205679" y="3000114"/>
+            <a:ext cx="6382512" cy="2339077"/>
+          </a:xfrm>
+          <a:prstGeom prst="roundRect">
+            <a:avLst>
+              <a:gd name="adj" fmla="val 2000"/>
+            </a:avLst>
+          </a:prstGeom>
           <a:noFill/>
-        </p:spPr>
-        <p:txBody>
-          <a:bodyPr wrap="square" lIns="0" rIns="0" tIns="0" bIns="0" anchor="t">
-            <a:spAutoFit/>
-          </a:bodyPr>
-          <a:lstStyle/>
-          <a:p>
-            <a:pPr algn="ctr">
-              <a:lnSpc>
-                <a:spcPct val="116000"/>
-              </a:lnSpc>
-              <a:spcAft>
-                <a:spcPts val="0"/>
-              </a:spcAft>
-            </a:pPr>
-            <a:r>
-              <a:rPr sz="950" b="0">
-                <a:solidFill>
-                  <a:srgbClr val="55677C"/>
-                </a:solidFill>
-                <a:latin typeface="Calibri"/>
-              </a:rPr>
-              <a:t>vanuit BIC</a:t>
-            </a:r>
-          </a:p>
-        </p:txBody>
-      </p:sp>
-      <p:sp>
-        <p:nvSpPr>
-          <p:cNvPr id="22" name="Right Arrow 21"/>
+          <a:ln w="12700">
+            <a:solidFill>
+              <a:srgbClr val="E2E9F1"/>
+            </a:solidFill>
+          </a:ln>
+          <a:effectLst/>
+        </p:spPr>
+        <p:style>
+          <a:lnRef idx="1">
+            <a:schemeClr val="accent1"/>
+          </a:lnRef>
+          <a:fillRef idx="3">
+            <a:schemeClr val="accent1"/>
+          </a:fillRef>
+          <a:effectRef idx="2">
+            <a:schemeClr val="accent1"/>
+          </a:effectRef>
+          <a:fontRef idx="minor">
+            <a:schemeClr val="lt1"/>
+          </a:fontRef>
+        </p:style>
+        <p:txBody>
+          <a:bodyPr rtlCol="0" anchor="ctr"/>
+          <a:lstStyle/>
+          <a:p/>
+        </p:txBody>
+      </p:sp>
+      <p:sp>
+        <p:nvSpPr>
+          <p:cNvPr id="16" name="Rounded Rectangle 15"/>
           <p:cNvSpPr/>
           <p:nvPr/>
         </p:nvSpPr>
         <p:spPr>
           <a:xfrm>
-            <a:off x="9351934" y="2084832"/>
-            <a:ext cx="155448" cy="155448"/>
-          </a:xfrm>
-          <a:prstGeom prst="rightArrow">
-            <a:avLst/>
+            <a:off x="640080" y="3036690"/>
+            <a:ext cx="50292" cy="2265925"/>
+          </a:xfrm>
+          <a:prstGeom prst="roundRect">
+            <a:avLst>
+              <a:gd name="adj" fmla="val 50000"/>
+            </a:avLst>
           </a:prstGeom>
           <a:solidFill>
-            <a:srgbClr val="6B4BA8">
-              <a:alpha val="55000"/>
-            </a:srgbClr>
+            <a:srgbClr val="C87E12"/>
           </a:solidFill>
           <a:ln>
             <a:noFill/>
@@ -7827,73 +8447,19 @@
         <p:txBody>
           <a:bodyPr rtlCol="0" anchor="ctr"/>
           <a:lstStyle/>
-          <a:p>
-            <a:pPr algn="ctr"/>
-          </a:p>
-        </p:txBody>
-      </p:sp>
-      <p:sp>
-        <p:nvSpPr>
-          <p:cNvPr id="23" name="Rounded Rectangle 22"/>
-          <p:cNvSpPr/>
-          <p:nvPr/>
-        </p:nvSpPr>
-        <p:spPr>
-          <a:xfrm>
-            <a:off x="9530242" y="1700784"/>
-            <a:ext cx="2021372" cy="932688"/>
-          </a:xfrm>
-          <a:prstGeom prst="roundRect">
-            <a:avLst>
-              <a:gd name="adj" fmla="val 3000"/>
-            </a:avLst>
-          </a:prstGeom>
-          <a:solidFill>
-            <a:srgbClr val="ECDFE3"/>
-          </a:solidFill>
-          <a:ln w="15875">
-            <a:solidFill>
-              <a:srgbClr val="E0AEAD"/>
-            </a:solidFill>
-          </a:ln>
-          <a:effectLst>
-            <a:outerShdw blurRad="60000" dist="18000" dir="5400000" rotWithShape="0">
-              <a:srgbClr val="1B3A5C">
-                <a:alpha val="7000"/>
-              </a:srgbClr>
-            </a:outerShdw>
-          </a:effectLst>
-        </p:spPr>
-        <p:style>
-          <a:lnRef idx="1">
-            <a:schemeClr val="accent1"/>
-          </a:lnRef>
-          <a:fillRef idx="3">
-            <a:schemeClr val="accent1"/>
-          </a:fillRef>
-          <a:effectRef idx="2">
-            <a:schemeClr val="accent1"/>
-          </a:effectRef>
-          <a:fontRef idx="minor">
-            <a:schemeClr val="lt1"/>
-          </a:fontRef>
-        </p:style>
-        <p:txBody>
-          <a:bodyPr rtlCol="0" anchor="ctr"/>
-          <a:lstStyle/>
           <a:p/>
         </p:txBody>
       </p:sp>
       <p:sp>
         <p:nvSpPr>
-          <p:cNvPr id="24" name="TextBox 23"/>
+          <p:cNvPr id="17" name="TextBox 16"/>
           <p:cNvSpPr txBox="1"/>
           <p:nvPr/>
         </p:nvSpPr>
         <p:spPr>
           <a:xfrm>
-            <a:off x="9694834" y="1828800"/>
-            <a:ext cx="1692188" cy="310896"/>
+            <a:off x="877824" y="3164706"/>
+            <a:ext cx="4053535" cy="365760"/>
           </a:xfrm>
           <a:prstGeom prst="rect">
             <a:avLst/>
@@ -7906,7 +8472,7 @@
           </a:bodyPr>
           <a:lstStyle/>
           <a:p>
-            <a:pPr algn="ctr">
+            <a:pPr algn="l">
               <a:lnSpc>
                 <a:spcPct val="120000"/>
               </a:lnSpc>
@@ -7915,27 +8481,27 @@
               </a:spcAft>
             </a:pPr>
             <a:r>
-              <a:rPr sz="1650" b="1">
+              <a:rPr sz="1900" b="1">
                 <a:solidFill>
-                  <a:srgbClr val="C4392D"/>
+                  <a:srgbClr val="C87E12"/>
                 </a:solidFill>
                 <a:latin typeface="Calibri"/>
               </a:rPr>
-              <a:t>Resultaat</a:t>
-            </a:r>
-          </a:p>
-        </p:txBody>
-      </p:sp>
-      <p:sp>
-        <p:nvSpPr>
-          <p:cNvPr id="25" name="TextBox 24"/>
+              <a:t>Afwezigheid</a:t>
+            </a:r>
+          </a:p>
+        </p:txBody>
+      </p:sp>
+      <p:sp>
+        <p:nvSpPr>
+          <p:cNvPr id="18" name="TextBox 17"/>
           <p:cNvSpPr txBox="1"/>
           <p:nvPr/>
         </p:nvSpPr>
         <p:spPr>
           <a:xfrm>
-            <a:off x="9694834" y="2212848"/>
-            <a:ext cx="1692188" cy="310896"/>
+            <a:off x="877824" y="3548754"/>
+            <a:ext cx="4053535" cy="219456"/>
           </a:xfrm>
           <a:prstGeom prst="rect">
             <a:avLst/>
@@ -7948,36 +8514,790 @@
           </a:bodyPr>
           <a:lstStyle/>
           <a:p>
-            <a:pPr algn="ctr">
+            <a:pPr algn="l">
               <a:lnSpc>
-                <a:spcPct val="116000"/>
+                <a:spcPct val="120000"/>
               </a:lnSpc>
               <a:spcAft>
                 <a:spcPts val="0"/>
               </a:spcAft>
             </a:pPr>
             <a:r>
-              <a:rPr sz="950" b="0">
+              <a:rPr sz="1000" b="0">
                 <a:solidFill>
                   <a:srgbClr val="55677C"/>
                 </a:solidFill>
                 <a:latin typeface="Calibri"/>
               </a:rPr>
-              <a:t>naar de begroting</a:t>
-            </a:r>
-          </a:p>
-        </p:txBody>
-      </p:sp>
-      <p:sp>
-        <p:nvSpPr>
-          <p:cNvPr id="26" name="Rounded Rectangle 25"/>
+              <a:t>input vanuit HR en F&amp;C</a:t>
+            </a:r>
+          </a:p>
+        </p:txBody>
+      </p:sp>
+      <p:sp>
+        <p:nvSpPr>
+          <p:cNvPr id="19" name="TextBox 18"/>
+          <p:cNvSpPr txBox="1"/>
+          <p:nvPr/>
+        </p:nvSpPr>
+        <p:spPr>
+          <a:xfrm>
+            <a:off x="877824" y="3951090"/>
+            <a:ext cx="4053535" cy="548640"/>
+          </a:xfrm>
+          <a:prstGeom prst="rect">
+            <a:avLst/>
+          </a:prstGeom>
+          <a:noFill/>
+        </p:spPr>
+        <p:txBody>
+          <a:bodyPr wrap="square" lIns="0" rIns="0" tIns="0" bIns="0" anchor="t">
+            <a:spAutoFit/>
+          </a:bodyPr>
+          <a:lstStyle/>
+          <a:p>
+            <a:pPr algn="l">
+              <a:lnSpc>
+                <a:spcPct val="120000"/>
+              </a:lnSpc>
+              <a:spcAft>
+                <a:spcPts val="0"/>
+              </a:spcAft>
+            </a:pPr>
+            <a:r>
+              <a:rPr sz="3400" b="1">
+                <a:solidFill>
+                  <a:srgbClr val="C87E12"/>
+                </a:solidFill>
+                <a:latin typeface="Calibri"/>
+              </a:rPr>
+              <a:t>300</a:t>
+            </a:r>
+          </a:p>
+        </p:txBody>
+      </p:sp>
+      <p:sp>
+        <p:nvSpPr>
+          <p:cNvPr id="20" name="TextBox 19"/>
+          <p:cNvSpPr txBox="1"/>
+          <p:nvPr/>
+        </p:nvSpPr>
+        <p:spPr>
+          <a:xfrm>
+            <a:off x="877824" y="4481442"/>
+            <a:ext cx="4053535" cy="219456"/>
+          </a:xfrm>
+          <a:prstGeom prst="rect">
+            <a:avLst/>
+          </a:prstGeom>
+          <a:noFill/>
+        </p:spPr>
+        <p:txBody>
+          <a:bodyPr wrap="square" lIns="0" rIns="0" tIns="0" bIns="0" anchor="t">
+            <a:spAutoFit/>
+          </a:bodyPr>
+          <a:lstStyle/>
+          <a:p>
+            <a:pPr algn="l">
+              <a:lnSpc>
+                <a:spcPct val="120000"/>
+              </a:lnSpc>
+              <a:spcAft>
+                <a:spcPts val="0"/>
+              </a:spcAft>
+            </a:pPr>
+            <a:r>
+              <a:rPr sz="900" b="1" spc="120">
+                <a:solidFill>
+                  <a:srgbClr val="8B9AAA"/>
+                </a:solidFill>
+                <a:latin typeface="Calibri"/>
+              </a:rPr>
+              <a:t>UREN AFWEZIGHEID · 15,9%</a:t>
+            </a:r>
+          </a:p>
+        </p:txBody>
+      </p:sp>
+      <p:sp>
+        <p:nvSpPr>
+          <p:cNvPr id="21" name="TextBox 20"/>
+          <p:cNvSpPr txBox="1"/>
+          <p:nvPr/>
+        </p:nvSpPr>
+        <p:spPr>
+          <a:xfrm>
+            <a:off x="877824" y="4737474"/>
+            <a:ext cx="4053535" cy="365760"/>
+          </a:xfrm>
+          <a:prstGeom prst="rect">
+            <a:avLst/>
+          </a:prstGeom>
+          <a:noFill/>
+        </p:spPr>
+        <p:txBody>
+          <a:bodyPr wrap="square" lIns="0" rIns="0" tIns="0" bIns="0" anchor="t">
+            <a:spAutoFit/>
+          </a:bodyPr>
+          <a:lstStyle/>
+          <a:p>
+            <a:pPr algn="l">
+              <a:lnSpc>
+                <a:spcPct val="120000"/>
+              </a:lnSpc>
+              <a:spcAft>
+                <a:spcPts val="0"/>
+              </a:spcAft>
+            </a:pPr>
+            <a:r>
+              <a:rPr sz="1000" b="0">
+                <a:solidFill>
+                  <a:srgbClr val="55677C"/>
+                </a:solidFill>
+                <a:latin typeface="Calibri"/>
+              </a:rPr>
+              <a:t>vakantie, ziek, bijzonder verlof, PLB en feestdagen</a:t>
+            </a:r>
+          </a:p>
+        </p:txBody>
+      </p:sp>
+      <p:pic>
+        <p:nvPicPr>
+          <p:cNvPr id="22" name="Picture 21" descr="3-netto.png"/>
+          <p:cNvPicPr>
+            <a:picLocks noChangeAspect="1"/>
+          </p:cNvPicPr>
+          <p:nvPr/>
+        </p:nvPicPr>
+        <p:blipFill>
+          <a:blip r:embed="rId4"/>
+          <a:stretch>
+            <a:fillRect/>
+          </a:stretch>
+        </p:blipFill>
+        <p:spPr>
+          <a:xfrm>
+            <a:off x="5242255" y="5421487"/>
+            <a:ext cx="6309360" cy="704599"/>
+          </a:xfrm>
+          <a:prstGeom prst="rect">
+            <a:avLst/>
+          </a:prstGeom>
+        </p:spPr>
+      </p:pic>
+      <p:sp>
+        <p:nvSpPr>
+          <p:cNvPr id="23" name="Rounded Rectangle 22"/>
           <p:cNvSpPr/>
           <p:nvPr/>
         </p:nvSpPr>
         <p:spPr>
           <a:xfrm>
-            <a:off x="640080" y="2907792"/>
-            <a:ext cx="3454298" cy="1700784"/>
+            <a:off x="5205679" y="5384911"/>
+            <a:ext cx="6382512" cy="777750"/>
+          </a:xfrm>
+          <a:prstGeom prst="roundRect">
+            <a:avLst>
+              <a:gd name="adj" fmla="val 2000"/>
+            </a:avLst>
+          </a:prstGeom>
+          <a:noFill/>
+          <a:ln w="12700">
+            <a:solidFill>
+              <a:srgbClr val="E2E9F1"/>
+            </a:solidFill>
+          </a:ln>
+          <a:effectLst/>
+        </p:spPr>
+        <p:style>
+          <a:lnRef idx="1">
+            <a:schemeClr val="accent1"/>
+          </a:lnRef>
+          <a:fillRef idx="3">
+            <a:schemeClr val="accent1"/>
+          </a:fillRef>
+          <a:effectRef idx="2">
+            <a:schemeClr val="accent1"/>
+          </a:effectRef>
+          <a:fontRef idx="minor">
+            <a:schemeClr val="lt1"/>
+          </a:fontRef>
+        </p:style>
+        <p:txBody>
+          <a:bodyPr rtlCol="0" anchor="ctr"/>
+          <a:lstStyle/>
+          <a:p/>
+        </p:txBody>
+      </p:sp>
+      <p:sp>
+        <p:nvSpPr>
+          <p:cNvPr id="24" name="Rounded Rectangle 23"/>
+          <p:cNvSpPr/>
+          <p:nvPr/>
+        </p:nvSpPr>
+        <p:spPr>
+          <a:xfrm>
+            <a:off x="640080" y="5421487"/>
+            <a:ext cx="50292" cy="704599"/>
+          </a:xfrm>
+          <a:prstGeom prst="roundRect">
+            <a:avLst>
+              <a:gd name="adj" fmla="val 50000"/>
+            </a:avLst>
+          </a:prstGeom>
+          <a:solidFill>
+            <a:srgbClr val="1F6FB2"/>
+          </a:solidFill>
+          <a:ln>
+            <a:noFill/>
+          </a:ln>
+          <a:effectLst/>
+        </p:spPr>
+        <p:style>
+          <a:lnRef idx="1">
+            <a:schemeClr val="accent1"/>
+          </a:lnRef>
+          <a:fillRef idx="3">
+            <a:schemeClr val="accent1"/>
+          </a:fillRef>
+          <a:effectRef idx="2">
+            <a:schemeClr val="accent1"/>
+          </a:effectRef>
+          <a:fontRef idx="minor">
+            <a:schemeClr val="lt1"/>
+          </a:fontRef>
+        </p:style>
+        <p:txBody>
+          <a:bodyPr rtlCol="0" anchor="ctr"/>
+          <a:lstStyle/>
+          <a:p/>
+        </p:txBody>
+      </p:sp>
+      <p:sp>
+        <p:nvSpPr>
+          <p:cNvPr id="25" name="TextBox 24"/>
+          <p:cNvSpPr txBox="1"/>
+          <p:nvPr/>
+        </p:nvSpPr>
+        <p:spPr>
+          <a:xfrm>
+            <a:off x="877824" y="5458063"/>
+            <a:ext cx="4053535" cy="365760"/>
+          </a:xfrm>
+          <a:prstGeom prst="rect">
+            <a:avLst/>
+          </a:prstGeom>
+          <a:noFill/>
+        </p:spPr>
+        <p:txBody>
+          <a:bodyPr wrap="square" lIns="0" rIns="0" tIns="0" bIns="0" anchor="t">
+            <a:spAutoFit/>
+          </a:bodyPr>
+          <a:lstStyle/>
+          <a:p>
+            <a:pPr algn="l">
+              <a:lnSpc>
+                <a:spcPct val="120000"/>
+              </a:lnSpc>
+              <a:spcAft>
+                <a:spcPts val="0"/>
+              </a:spcAft>
+            </a:pPr>
+            <a:r>
+              <a:rPr sz="1700" b="1">
+                <a:solidFill>
+                  <a:srgbClr val="1F6FB2"/>
+                </a:solidFill>
+                <a:latin typeface="Calibri"/>
+              </a:rPr>
+              <a:t>Netto</a:t>
+            </a:r>
+          </a:p>
+        </p:txBody>
+      </p:sp>
+      <p:sp>
+        <p:nvSpPr>
+          <p:cNvPr id="26" name="TextBox 25"/>
+          <p:cNvSpPr txBox="1"/>
+          <p:nvPr/>
+        </p:nvSpPr>
+        <p:spPr>
+          <a:xfrm>
+            <a:off x="877824" y="5787247"/>
+            <a:ext cx="4053535" cy="219456"/>
+          </a:xfrm>
+          <a:prstGeom prst="rect">
+            <a:avLst/>
+          </a:prstGeom>
+          <a:noFill/>
+        </p:spPr>
+        <p:txBody>
+          <a:bodyPr wrap="square" lIns="0" rIns="0" tIns="0" bIns="0" anchor="t">
+            <a:spAutoFit/>
+          </a:bodyPr>
+          <a:lstStyle/>
+          <a:p>
+            <a:pPr algn="l">
+              <a:lnSpc>
+                <a:spcPct val="120000"/>
+              </a:lnSpc>
+              <a:spcAft>
+                <a:spcPts val="0"/>
+              </a:spcAft>
+            </a:pPr>
+            <a:r>
+              <a:rPr sz="1000" b="0">
+                <a:solidFill>
+                  <a:srgbClr val="55677C"/>
+                </a:solidFill>
+                <a:latin typeface="Calibri"/>
+              </a:rPr>
+              <a:t>bruto min afwezigheid</a:t>
+            </a:r>
+          </a:p>
+        </p:txBody>
+      </p:sp>
+      <p:sp>
+        <p:nvSpPr>
+          <p:cNvPr id="27" name="TextBox 26"/>
+          <p:cNvSpPr txBox="1"/>
+          <p:nvPr/>
+        </p:nvSpPr>
+        <p:spPr>
+          <a:xfrm>
+            <a:off x="2864815" y="5439775"/>
+            <a:ext cx="1828800" cy="402336"/>
+          </a:xfrm>
+          <a:prstGeom prst="rect">
+            <a:avLst/>
+          </a:prstGeom>
+          <a:noFill/>
+        </p:spPr>
+        <p:txBody>
+          <a:bodyPr wrap="square" lIns="0" rIns="0" tIns="0" bIns="0" anchor="t">
+            <a:spAutoFit/>
+          </a:bodyPr>
+          <a:lstStyle/>
+          <a:p>
+            <a:pPr algn="r">
+              <a:lnSpc>
+                <a:spcPct val="120000"/>
+              </a:lnSpc>
+              <a:spcAft>
+                <a:spcPts val="0"/>
+              </a:spcAft>
+            </a:pPr>
+            <a:r>
+              <a:rPr sz="2600" b="1">
+                <a:solidFill>
+                  <a:srgbClr val="1F6FB2"/>
+                </a:solidFill>
+                <a:latin typeface="Calibri"/>
+              </a:rPr>
+              <a:t>1.579</a:t>
+            </a:r>
+          </a:p>
+        </p:txBody>
+      </p:sp>
+      <p:sp>
+        <p:nvSpPr>
+          <p:cNvPr id="28" name="TextBox 27"/>
+          <p:cNvSpPr txBox="1"/>
+          <p:nvPr/>
+        </p:nvSpPr>
+        <p:spPr>
+          <a:xfrm>
+            <a:off x="2864815" y="5823823"/>
+            <a:ext cx="1828800" cy="201168"/>
+          </a:xfrm>
+          <a:prstGeom prst="rect">
+            <a:avLst/>
+          </a:prstGeom>
+          <a:noFill/>
+        </p:spPr>
+        <p:txBody>
+          <a:bodyPr wrap="square" lIns="0" rIns="0" tIns="0" bIns="0" anchor="t">
+            <a:spAutoFit/>
+          </a:bodyPr>
+          <a:lstStyle/>
+          <a:p>
+            <a:pPr algn="r">
+              <a:lnSpc>
+                <a:spcPct val="120000"/>
+              </a:lnSpc>
+              <a:spcAft>
+                <a:spcPts val="0"/>
+              </a:spcAft>
+            </a:pPr>
+            <a:r>
+              <a:rPr sz="850" b="1" spc="120">
+                <a:solidFill>
+                  <a:srgbClr val="8B9AAA"/>
+                </a:solidFill>
+                <a:latin typeface="Calibri"/>
+              </a:rPr>
+              <a:t>NETTO INZETBAAR · 84,1%</a:t>
+            </a:r>
+          </a:p>
+        </p:txBody>
+      </p:sp>
+      <p:cxnSp>
+        <p:nvCxnSpPr>
+          <p:cNvPr id="29" name="Connector 28"/>
+          <p:cNvCxnSpPr/>
+          <p:nvPr/>
+        </p:nvCxnSpPr>
+        <p:spPr>
+          <a:xfrm>
+            <a:off x="640080" y="6291072"/>
+            <a:ext cx="10911535" cy="0"/>
+          </a:xfrm>
+          <a:prstGeom prst="line">
+            <a:avLst/>
+          </a:prstGeom>
+          <a:ln w="9525">
+            <a:solidFill>
+              <a:srgbClr val="E2E9F1"/>
+            </a:solidFill>
+          </a:ln>
+        </p:spPr>
+        <p:style>
+          <a:lnRef idx="2">
+            <a:schemeClr val="accent1"/>
+          </a:lnRef>
+          <a:fillRef idx="0">
+            <a:schemeClr val="accent1"/>
+          </a:fillRef>
+          <a:effectRef idx="1">
+            <a:schemeClr val="accent1"/>
+          </a:effectRef>
+          <a:fontRef idx="minor">
+            <a:schemeClr val="tx1"/>
+          </a:fontRef>
+        </p:style>
+      </p:cxnSp>
+      <p:sp>
+        <p:nvSpPr>
+          <p:cNvPr id="30" name="TextBox 29"/>
+          <p:cNvSpPr txBox="1"/>
+          <p:nvPr/>
+        </p:nvSpPr>
+        <p:spPr>
+          <a:xfrm>
+            <a:off x="640080" y="6382512"/>
+            <a:ext cx="5486400" cy="237744"/>
+          </a:xfrm>
+          <a:prstGeom prst="rect">
+            <a:avLst/>
+          </a:prstGeom>
+          <a:noFill/>
+        </p:spPr>
+        <p:txBody>
+          <a:bodyPr wrap="square" lIns="0" rIns="0" tIns="0" bIns="0" anchor="t">
+            <a:spAutoFit/>
+          </a:bodyPr>
+          <a:lstStyle/>
+          <a:p>
+            <a:pPr algn="l">
+              <a:lnSpc>
+                <a:spcPct val="120000"/>
+              </a:lnSpc>
+              <a:spcAft>
+                <a:spcPts val="0"/>
+              </a:spcAft>
+            </a:pPr>
+            <a:r>
+              <a:rPr sz="900" b="0" spc="80">
+                <a:solidFill>
+                  <a:srgbClr val="8B9AAA"/>
+                </a:solidFill>
+                <a:latin typeface="Calibri"/>
+              </a:rPr>
+              <a:t>Acute poort en Hotfloor</a:t>
+            </a:r>
+          </a:p>
+        </p:txBody>
+      </p:sp>
+      <p:sp>
+        <p:nvSpPr>
+          <p:cNvPr id="31" name="TextBox 30"/>
+          <p:cNvSpPr txBox="1"/>
+          <p:nvPr/>
+        </p:nvSpPr>
+        <p:spPr>
+          <a:xfrm>
+            <a:off x="10637215" y="6382512"/>
+            <a:ext cx="914400" cy="237744"/>
+          </a:xfrm>
+          <a:prstGeom prst="rect">
+            <a:avLst/>
+          </a:prstGeom>
+          <a:noFill/>
+        </p:spPr>
+        <p:txBody>
+          <a:bodyPr wrap="square" lIns="0" rIns="0" tIns="0" bIns="0" anchor="t">
+            <a:spAutoFit/>
+          </a:bodyPr>
+          <a:lstStyle/>
+          <a:p>
+            <a:pPr algn="r">
+              <a:lnSpc>
+                <a:spcPct val="120000"/>
+              </a:lnSpc>
+              <a:spcAft>
+                <a:spcPts val="0"/>
+              </a:spcAft>
+            </a:pPr>
+            <a:r>
+              <a:rPr sz="950" b="1">
+                <a:solidFill>
+                  <a:srgbClr val="0E9A87"/>
+                </a:solidFill>
+                <a:latin typeface="Calibri"/>
+              </a:rPr>
+              <a:t>02</a:t>
+            </a:r>
+          </a:p>
+        </p:txBody>
+      </p:sp>
+    </p:spTree>
+  </p:cSld>
+  <p:clrMapOvr>
+    <a:masterClrMapping/>
+  </p:clrMapOvr>
+</p:sld>
+</file>
+
+<file path=ppt/slides/slide3.xml><?xml version="1.0" encoding="utf-8"?>
+<p:sld xmlns:a="http://schemas.openxmlformats.org/drawingml/2006/main" xmlns:p="http://schemas.openxmlformats.org/presentationml/2006/main" xmlns:r="http://schemas.openxmlformats.org/officeDocument/2006/relationships">
+  <p:cSld>
+    <p:spTree>
+      <p:nvGrpSpPr>
+        <p:cNvPr id="1" name=""/>
+        <p:cNvGrpSpPr/>
+        <p:nvPr/>
+      </p:nvGrpSpPr>
+      <p:grpSpPr/>
+      <p:sp>
+        <p:nvSpPr>
+          <p:cNvPr id="2" name="Rectangle 1"/>
+          <p:cNvSpPr/>
+          <p:nvPr/>
+        </p:nvSpPr>
+        <p:spPr>
+          <a:xfrm>
+            <a:off x="0" y="0"/>
+            <a:ext cx="12191695" cy="6858000"/>
+          </a:xfrm>
+          <a:prstGeom prst="rect">
+            <a:avLst/>
+          </a:prstGeom>
+          <a:gradFill rotWithShape="1">
+            <a:gsLst>
+              <a:gs pos="0">
+                <a:srgbClr val="FFFFFF"/>
+              </a:gs>
+              <a:gs pos="100000">
+                <a:srgbClr val="F1F6FC"/>
+              </a:gs>
+            </a:gsLst>
+            <a:lin scaled="0" ang="18900000"/>
+          </a:gradFill>
+          <a:ln>
+            <a:noFill/>
+          </a:ln>
+          <a:effectLst/>
+        </p:spPr>
+        <p:style>
+          <a:lnRef idx="1">
+            <a:schemeClr val="accent1"/>
+          </a:lnRef>
+          <a:fillRef idx="3">
+            <a:schemeClr val="accent1"/>
+          </a:fillRef>
+          <a:effectRef idx="2">
+            <a:schemeClr val="accent1"/>
+          </a:effectRef>
+          <a:fontRef idx="minor">
+            <a:schemeClr val="lt1"/>
+          </a:fontRef>
+        </p:style>
+        <p:txBody>
+          <a:bodyPr rtlCol="0" anchor="ctr"/>
+          <a:lstStyle/>
+          <a:p/>
+        </p:txBody>
+      </p:sp>
+      <p:sp>
+        <p:nvSpPr>
+          <p:cNvPr id="3" name="TextBox 2"/>
+          <p:cNvSpPr txBox="1"/>
+          <p:nvPr/>
+        </p:nvSpPr>
+        <p:spPr>
+          <a:xfrm>
+            <a:off x="640080" y="566928"/>
+            <a:ext cx="10911535" cy="219456"/>
+          </a:xfrm>
+          <a:prstGeom prst="rect">
+            <a:avLst/>
+          </a:prstGeom>
+          <a:noFill/>
+        </p:spPr>
+        <p:txBody>
+          <a:bodyPr wrap="square" lIns="0" rIns="0" tIns="0" bIns="0" anchor="t">
+            <a:spAutoFit/>
+          </a:bodyPr>
+          <a:lstStyle/>
+          <a:p>
+            <a:pPr algn="l">
+              <a:lnSpc>
+                <a:spcPct val="120000"/>
+              </a:lnSpc>
+              <a:spcAft>
+                <a:spcPts val="0"/>
+              </a:spcAft>
+            </a:pPr>
+            <a:r>
+              <a:rPr sz="1050" b="1" spc="220">
+                <a:solidFill>
+                  <a:srgbClr val="6B4BA8"/>
+                </a:solidFill>
+                <a:latin typeface="Calibri"/>
+              </a:rPr>
+              <a:t>PROCES  ·  STRATEGISCH CAPACITEITSJAARPLAN</a:t>
+            </a:r>
+          </a:p>
+        </p:txBody>
+      </p:sp>
+      <p:sp>
+        <p:nvSpPr>
+          <p:cNvPr id="4" name="TextBox 3"/>
+          <p:cNvSpPr txBox="1"/>
+          <p:nvPr/>
+        </p:nvSpPr>
+        <p:spPr>
+          <a:xfrm>
+            <a:off x="640080" y="859536"/>
+            <a:ext cx="10911535" cy="566928"/>
+          </a:xfrm>
+          <a:prstGeom prst="rect">
+            <a:avLst/>
+          </a:prstGeom>
+          <a:noFill/>
+        </p:spPr>
+        <p:txBody>
+          <a:bodyPr wrap="square" lIns="0" rIns="0" tIns="0" bIns="0" anchor="t">
+            <a:spAutoFit/>
+          </a:bodyPr>
+          <a:lstStyle/>
+          <a:p>
+            <a:pPr algn="l">
+              <a:lnSpc>
+                <a:spcPct val="120000"/>
+              </a:lnSpc>
+              <a:spcAft>
+                <a:spcPts val="0"/>
+              </a:spcAft>
+            </a:pPr>
+            <a:r>
+              <a:rPr sz="3400" b="1">
+                <a:solidFill>
+                  <a:srgbClr val="0D1B2A"/>
+                </a:solidFill>
+                <a:latin typeface="Calibri"/>
+              </a:rPr>
+              <a:t>Formatieberekening · 2</a:t>
+            </a:r>
+          </a:p>
+        </p:txBody>
+      </p:sp>
+      <p:sp>
+        <p:nvSpPr>
+          <p:cNvPr id="5" name="TextBox 4"/>
+          <p:cNvSpPr txBox="1"/>
+          <p:nvPr/>
+        </p:nvSpPr>
+        <p:spPr>
+          <a:xfrm>
+            <a:off x="640080" y="1335024"/>
+            <a:ext cx="8510997" cy="274320"/>
+          </a:xfrm>
+          <a:prstGeom prst="rect">
+            <a:avLst/>
+          </a:prstGeom>
+          <a:noFill/>
+        </p:spPr>
+        <p:txBody>
+          <a:bodyPr wrap="square" lIns="0" rIns="0" tIns="0" bIns="0" anchor="t">
+            <a:spAutoFit/>
+          </a:bodyPr>
+          <a:lstStyle/>
+          <a:p>
+            <a:pPr algn="l">
+              <a:lnSpc>
+                <a:spcPct val="120000"/>
+              </a:lnSpc>
+              <a:spcAft>
+                <a:spcPts val="0"/>
+              </a:spcAft>
+            </a:pPr>
+            <a:r>
+              <a:rPr sz="1300" b="0">
+                <a:solidFill>
+                  <a:srgbClr val="55677C"/>
+                </a:solidFill>
+                <a:latin typeface="Calibri"/>
+              </a:rPr>
+              <a:t>Voorbeeld radiologie — van de benodigde uren naar de fte-(mis)match</a:t>
+            </a:r>
+          </a:p>
+        </p:txBody>
+      </p:sp>
+      <p:cxnSp>
+        <p:nvCxnSpPr>
+          <p:cNvPr id="6" name="Connector 5"/>
+          <p:cNvCxnSpPr/>
+          <p:nvPr/>
+        </p:nvCxnSpPr>
+        <p:spPr>
+          <a:xfrm>
+            <a:off x="640080" y="1609344"/>
+            <a:ext cx="10911535" cy="0"/>
+          </a:xfrm>
+          <a:prstGeom prst="line">
+            <a:avLst/>
+          </a:prstGeom>
+          <a:ln w="12700">
+            <a:solidFill>
+              <a:srgbClr val="E2E9F1"/>
+            </a:solidFill>
+          </a:ln>
+        </p:spPr>
+        <p:style>
+          <a:lnRef idx="2">
+            <a:schemeClr val="accent1"/>
+          </a:lnRef>
+          <a:fillRef idx="0">
+            <a:schemeClr val="accent1"/>
+          </a:fillRef>
+          <a:effectRef idx="1">
+            <a:schemeClr val="accent1"/>
+          </a:effectRef>
+          <a:fontRef idx="minor">
+            <a:schemeClr val="tx1"/>
+          </a:fontRef>
+        </p:style>
+      </p:cxnSp>
+      <p:sp>
+        <p:nvSpPr>
+          <p:cNvPr id="7" name="Rounded Rectangle 6"/>
+          <p:cNvSpPr/>
+          <p:nvPr/>
+        </p:nvSpPr>
+        <p:spPr>
+          <a:xfrm>
+            <a:off x="640080" y="1700784"/>
+            <a:ext cx="5300319" cy="3406796"/>
           </a:xfrm>
           <a:prstGeom prst="roundRect">
             <a:avLst>
@@ -8022,14 +9342,14 @@
       </p:sp>
       <p:sp>
         <p:nvSpPr>
-          <p:cNvPr id="27" name="Rounded Rectangle 26"/>
+          <p:cNvPr id="8" name="Rounded Rectangle 7"/>
           <p:cNvSpPr/>
           <p:nvPr/>
         </p:nvSpPr>
         <p:spPr>
           <a:xfrm>
-            <a:off x="640080" y="2907792"/>
-            <a:ext cx="3454298" cy="50292"/>
+            <a:off x="640080" y="1700784"/>
+            <a:ext cx="5300319" cy="50292"/>
           </a:xfrm>
           <a:prstGeom prst="roundRect">
             <a:avLst>
@@ -8037,7 +9357,7 @@
             </a:avLst>
           </a:prstGeom>
           <a:solidFill>
-            <a:srgbClr val="0E9A87"/>
+            <a:srgbClr val="6B4BA8"/>
           </a:solidFill>
           <a:ln>
             <a:noFill/>
@@ -8066,14 +9386,14 @@
       </p:sp>
       <p:sp>
         <p:nvSpPr>
-          <p:cNvPr id="28" name="TextBox 27"/>
+          <p:cNvPr id="9" name="TextBox 8"/>
           <p:cNvSpPr txBox="1"/>
           <p:nvPr/>
         </p:nvSpPr>
         <p:spPr>
           <a:xfrm>
-            <a:off x="914400" y="3127248"/>
-            <a:ext cx="2905658" cy="694944"/>
+            <a:off x="859536" y="1865376"/>
+            <a:ext cx="3197199" cy="274320"/>
           </a:xfrm>
           <a:prstGeom prst="rect">
             <a:avLst/>
@@ -8095,27 +9415,27 @@
               </a:spcAft>
             </a:pPr>
             <a:r>
-              <a:rPr sz="4200" b="1">
+              <a:rPr sz="1400" b="1">
                 <a:solidFill>
-                  <a:srgbClr val="0E9A87"/>
+                  <a:srgbClr val="6B4BA8"/>
                 </a:solidFill>
                 <a:latin typeface="Calibri"/>
               </a:rPr>
-              <a:t>1.878</a:t>
-            </a:r>
-          </a:p>
-        </p:txBody>
-      </p:sp>
-      <p:sp>
-        <p:nvSpPr>
-          <p:cNvPr id="29" name="TextBox 28"/>
+              <a:t>Benodigde uren</a:t>
+            </a:r>
+          </a:p>
+        </p:txBody>
+      </p:sp>
+      <p:sp>
+        <p:nvSpPr>
+          <p:cNvPr id="10" name="TextBox 9"/>
           <p:cNvSpPr txBox="1"/>
           <p:nvPr/>
         </p:nvSpPr>
         <p:spPr>
           <a:xfrm>
-            <a:off x="914400" y="3822191"/>
-            <a:ext cx="2905658" cy="237744"/>
+            <a:off x="3983583" y="1883664"/>
+            <a:ext cx="1737360" cy="237744"/>
           </a:xfrm>
           <a:prstGeom prst="rect">
             <a:avLst/>
@@ -8128,7 +9448,7 @@
           </a:bodyPr>
           <a:lstStyle/>
           <a:p>
-            <a:pPr algn="l">
+            <a:pPr algn="r">
               <a:lnSpc>
                 <a:spcPct val="120000"/>
               </a:lnSpc>
@@ -8137,69 +9457,95 @@
               </a:spcAft>
             </a:pPr>
             <a:r>
-              <a:rPr sz="950" b="1" spc="120">
+              <a:rPr sz="950" b="0">
                 <a:solidFill>
                   <a:srgbClr val="8B9AAA"/>
                 </a:solidFill>
                 <a:latin typeface="Calibri"/>
               </a:rPr>
-              <a:t>BRUTO UREN PER FTE</a:t>
-            </a:r>
-          </a:p>
-        </p:txBody>
-      </p:sp>
-      <p:sp>
-        <p:nvSpPr>
-          <p:cNvPr id="30" name="TextBox 29"/>
-          <p:cNvSpPr txBox="1"/>
-          <p:nvPr/>
-        </p:nvSpPr>
-        <p:spPr>
-          <a:xfrm>
-            <a:off x="914400" y="4096512"/>
-            <a:ext cx="2905658" cy="420624"/>
+              <a:t>vanuit BIC</a:t>
+            </a:r>
+          </a:p>
+        </p:txBody>
+      </p:sp>
+      <p:pic>
+        <p:nvPicPr>
+          <p:cNvPr id="11" name="Picture 10" descr="4-benodigd.png"/>
+          <p:cNvPicPr>
+            <a:picLocks noChangeAspect="1"/>
+          </p:cNvPicPr>
+          <p:nvPr/>
+        </p:nvPicPr>
+        <p:blipFill>
+          <a:blip r:embed="rId2"/>
+          <a:stretch>
+            <a:fillRect/>
+          </a:stretch>
+        </p:blipFill>
+        <p:spPr>
+          <a:xfrm>
+            <a:off x="859536" y="2395728"/>
+            <a:ext cx="4861407" cy="2492396"/>
           </a:xfrm>
           <a:prstGeom prst="rect">
             <a:avLst/>
           </a:prstGeom>
+        </p:spPr>
+      </p:pic>
+      <p:sp>
+        <p:nvSpPr>
+          <p:cNvPr id="12" name="Rounded Rectangle 11"/>
+          <p:cNvSpPr/>
+          <p:nvPr/>
+        </p:nvSpPr>
+        <p:spPr>
+          <a:xfrm>
+            <a:off x="822959" y="2359152"/>
+            <a:ext cx="4934559" cy="2565548"/>
+          </a:xfrm>
+          <a:prstGeom prst="roundRect">
+            <a:avLst>
+              <a:gd name="adj" fmla="val 2000"/>
+            </a:avLst>
+          </a:prstGeom>
           <a:noFill/>
-        </p:spPr>
-        <p:txBody>
-          <a:bodyPr wrap="square" lIns="0" rIns="0" tIns="0" bIns="0" anchor="t">
-            <a:spAutoFit/>
-          </a:bodyPr>
-          <a:lstStyle/>
-          <a:p>
-            <a:pPr algn="l">
-              <a:lnSpc>
-                <a:spcPct val="120000"/>
-              </a:lnSpc>
-              <a:spcAft>
-                <a:spcPts val="0"/>
-              </a:spcAft>
-            </a:pPr>
-            <a:r>
-              <a:rPr sz="1000" b="0">
-                <a:solidFill>
-                  <a:srgbClr val="55677C"/>
-                </a:solidFill>
-                <a:latin typeface="Calibri"/>
-              </a:rPr>
-              <a:t>36,0 uur per week · 52,17 weken</a:t>
-            </a:r>
-          </a:p>
-        </p:txBody>
-      </p:sp>
-      <p:sp>
-        <p:nvSpPr>
-          <p:cNvPr id="31" name="Rounded Rectangle 30"/>
+          <a:ln w="12700">
+            <a:solidFill>
+              <a:srgbClr val="E2E9F1"/>
+            </a:solidFill>
+          </a:ln>
+          <a:effectLst/>
+        </p:spPr>
+        <p:style>
+          <a:lnRef idx="1">
+            <a:schemeClr val="accent1"/>
+          </a:lnRef>
+          <a:fillRef idx="3">
+            <a:schemeClr val="accent1"/>
+          </a:fillRef>
+          <a:effectRef idx="2">
+            <a:schemeClr val="accent1"/>
+          </a:effectRef>
+          <a:fontRef idx="minor">
+            <a:schemeClr val="lt1"/>
+          </a:fontRef>
+        </p:style>
+        <p:txBody>
+          <a:bodyPr rtlCol="0" anchor="ctr"/>
+          <a:lstStyle/>
+          <a:p/>
+        </p:txBody>
+      </p:sp>
+      <p:sp>
+        <p:nvSpPr>
+          <p:cNvPr id="13" name="Rounded Rectangle 12"/>
           <p:cNvSpPr/>
           <p:nvPr/>
         </p:nvSpPr>
         <p:spPr>
           <a:xfrm>
-            <a:off x="4368698" y="2907792"/>
-            <a:ext cx="3454298" cy="1700784"/>
+            <a:off x="6251295" y="1700784"/>
+            <a:ext cx="5300319" cy="2185275"/>
           </a:xfrm>
           <a:prstGeom prst="roundRect">
             <a:avLst>
@@ -8244,14 +9590,14 @@
       </p:sp>
       <p:sp>
         <p:nvSpPr>
-          <p:cNvPr id="32" name="Rounded Rectangle 31"/>
+          <p:cNvPr id="14" name="Rounded Rectangle 13"/>
           <p:cNvSpPr/>
           <p:nvPr/>
         </p:nvSpPr>
         <p:spPr>
           <a:xfrm>
-            <a:off x="4368698" y="2907792"/>
-            <a:ext cx="3454298" cy="50292"/>
+            <a:off x="6251295" y="1700784"/>
+            <a:ext cx="5300319" cy="50292"/>
           </a:xfrm>
           <a:prstGeom prst="roundRect">
             <a:avLst>
@@ -8259,7 +9605,7 @@
             </a:avLst>
           </a:prstGeom>
           <a:solidFill>
-            <a:srgbClr val="C87E12"/>
+            <a:srgbClr val="C4392D"/>
           </a:solidFill>
           <a:ln>
             <a:noFill/>
@@ -8288,14 +9634,14 @@
       </p:sp>
       <p:sp>
         <p:nvSpPr>
-          <p:cNvPr id="33" name="TextBox 32"/>
+          <p:cNvPr id="15" name="TextBox 14"/>
           <p:cNvSpPr txBox="1"/>
           <p:nvPr/>
         </p:nvSpPr>
         <p:spPr>
           <a:xfrm>
-            <a:off x="4643018" y="3127248"/>
-            <a:ext cx="2905658" cy="694944"/>
+            <a:off x="6470751" y="1865376"/>
+            <a:ext cx="3197199" cy="274320"/>
           </a:xfrm>
           <a:prstGeom prst="rect">
             <a:avLst/>
@@ -8317,27 +9663,27 @@
               </a:spcAft>
             </a:pPr>
             <a:r>
-              <a:rPr sz="4200" b="1">
+              <a:rPr sz="1400" b="1">
                 <a:solidFill>
-                  <a:srgbClr val="C87E12"/>
+                  <a:srgbClr val="C4392D"/>
                 </a:solidFill>
                 <a:latin typeface="Calibri"/>
               </a:rPr>
-              <a:t>300</a:t>
-            </a:r>
-          </a:p>
-        </p:txBody>
-      </p:sp>
-      <p:sp>
-        <p:nvSpPr>
-          <p:cNvPr id="34" name="TextBox 33"/>
+              <a:t>Personeelsformatie</a:t>
+            </a:r>
+          </a:p>
+        </p:txBody>
+      </p:sp>
+      <p:sp>
+        <p:nvSpPr>
+          <p:cNvPr id="16" name="TextBox 15"/>
           <p:cNvSpPr txBox="1"/>
           <p:nvPr/>
         </p:nvSpPr>
         <p:spPr>
           <a:xfrm>
-            <a:off x="4643018" y="3822191"/>
-            <a:ext cx="2905658" cy="237744"/>
+            <a:off x="9594799" y="1883664"/>
+            <a:ext cx="1737360" cy="237744"/>
           </a:xfrm>
           <a:prstGeom prst="rect">
             <a:avLst/>
@@ -8350,7 +9696,7 @@
           </a:bodyPr>
           <a:lstStyle/>
           <a:p>
-            <a:pPr algn="l">
+            <a:pPr algn="r">
               <a:lnSpc>
                 <a:spcPct val="120000"/>
               </a:lnSpc>
@@ -8359,69 +9705,95 @@
               </a:spcAft>
             </a:pPr>
             <a:r>
-              <a:rPr sz="950" b="1" spc="120">
+              <a:rPr sz="950" b="0">
                 <a:solidFill>
                   <a:srgbClr val="8B9AAA"/>
                 </a:solidFill>
                 <a:latin typeface="Calibri"/>
               </a:rPr>
-              <a:t>UREN AFWEZIGHEID  ·  15,9%</a:t>
-            </a:r>
-          </a:p>
-        </p:txBody>
-      </p:sp>
-      <p:sp>
-        <p:nvSpPr>
-          <p:cNvPr id="35" name="TextBox 34"/>
-          <p:cNvSpPr txBox="1"/>
-          <p:nvPr/>
-        </p:nvSpPr>
-        <p:spPr>
-          <a:xfrm>
-            <a:off x="4643018" y="4096512"/>
-            <a:ext cx="2905658" cy="420624"/>
+              <a:t>het resultaat</a:t>
+            </a:r>
+          </a:p>
+        </p:txBody>
+      </p:sp>
+      <p:pic>
+        <p:nvPicPr>
+          <p:cNvPr id="17" name="Picture 16" descr="5-formatie.png"/>
+          <p:cNvPicPr>
+            <a:picLocks noChangeAspect="1"/>
+          </p:cNvPicPr>
+          <p:nvPr/>
+        </p:nvPicPr>
+        <p:blipFill>
+          <a:blip r:embed="rId3"/>
+          <a:stretch>
+            <a:fillRect/>
+          </a:stretch>
+        </p:blipFill>
+        <p:spPr>
+          <a:xfrm>
+            <a:off x="6470751" y="2395728"/>
+            <a:ext cx="4861407" cy="1270875"/>
           </a:xfrm>
           <a:prstGeom prst="rect">
             <a:avLst/>
           </a:prstGeom>
+        </p:spPr>
+      </p:pic>
+      <p:sp>
+        <p:nvSpPr>
+          <p:cNvPr id="18" name="Rounded Rectangle 17"/>
+          <p:cNvSpPr/>
+          <p:nvPr/>
+        </p:nvSpPr>
+        <p:spPr>
+          <a:xfrm>
+            <a:off x="6434175" y="2359152"/>
+            <a:ext cx="4934559" cy="1344027"/>
+          </a:xfrm>
+          <a:prstGeom prst="roundRect">
+            <a:avLst>
+              <a:gd name="adj" fmla="val 2000"/>
+            </a:avLst>
+          </a:prstGeom>
           <a:noFill/>
-        </p:spPr>
-        <p:txBody>
-          <a:bodyPr wrap="square" lIns="0" rIns="0" tIns="0" bIns="0" anchor="t">
-            <a:spAutoFit/>
-          </a:bodyPr>
-          <a:lstStyle/>
-          <a:p>
-            <a:pPr algn="l">
-              <a:lnSpc>
-                <a:spcPct val="120000"/>
-              </a:lnSpc>
-              <a:spcAft>
-                <a:spcPts val="0"/>
-              </a:spcAft>
-            </a:pPr>
-            <a:r>
-              <a:rPr sz="1000" b="0">
-                <a:solidFill>
-                  <a:srgbClr val="55677C"/>
-                </a:solidFill>
-                <a:latin typeface="Calibri"/>
-              </a:rPr>
-              <a:t>vakantie 144,0 · ziek 75,1 · bijzonder 8,0 · PLB 22,0 · feestdagen 50,4</a:t>
-            </a:r>
-          </a:p>
-        </p:txBody>
-      </p:sp>
-      <p:sp>
-        <p:nvSpPr>
-          <p:cNvPr id="36" name="Rounded Rectangle 35"/>
+          <a:ln w="12700">
+            <a:solidFill>
+              <a:srgbClr val="E2E9F1"/>
+            </a:solidFill>
+          </a:ln>
+          <a:effectLst/>
+        </p:spPr>
+        <p:style>
+          <a:lnRef idx="1">
+            <a:schemeClr val="accent1"/>
+          </a:lnRef>
+          <a:fillRef idx="3">
+            <a:schemeClr val="accent1"/>
+          </a:fillRef>
+          <a:effectRef idx="2">
+            <a:schemeClr val="accent1"/>
+          </a:effectRef>
+          <a:fontRef idx="minor">
+            <a:schemeClr val="lt1"/>
+          </a:fontRef>
+        </p:style>
+        <p:txBody>
+          <a:bodyPr rtlCol="0" anchor="ctr"/>
+          <a:lstStyle/>
+          <a:p/>
+        </p:txBody>
+      </p:sp>
+      <p:sp>
+        <p:nvSpPr>
+          <p:cNvPr id="19" name="Rounded Rectangle 18"/>
           <p:cNvSpPr/>
           <p:nvPr/>
         </p:nvSpPr>
         <p:spPr>
           <a:xfrm>
-            <a:off x="8097316" y="2907792"/>
-            <a:ext cx="3454298" cy="1700784"/>
+            <a:off x="6251295" y="4050651"/>
+            <a:ext cx="5300319" cy="2037212"/>
           </a:xfrm>
           <a:prstGeom prst="roundRect">
             <a:avLst>
@@ -8466,14 +9838,14 @@
       </p:sp>
       <p:sp>
         <p:nvSpPr>
-          <p:cNvPr id="37" name="Rounded Rectangle 36"/>
+          <p:cNvPr id="20" name="Rounded Rectangle 19"/>
           <p:cNvSpPr/>
           <p:nvPr/>
         </p:nvSpPr>
         <p:spPr>
           <a:xfrm>
-            <a:off x="8097316" y="2907792"/>
-            <a:ext cx="3454298" cy="50292"/>
+            <a:off x="6251295" y="4050651"/>
+            <a:ext cx="5300319" cy="50292"/>
           </a:xfrm>
           <a:prstGeom prst="roundRect">
             <a:avLst>
@@ -8481,7 +9853,7 @@
             </a:avLst>
           </a:prstGeom>
           <a:solidFill>
-            <a:srgbClr val="1F6FB2"/>
+            <a:srgbClr val="C87E12"/>
           </a:solidFill>
           <a:ln>
             <a:noFill/>
@@ -8510,14 +9882,14 @@
       </p:sp>
       <p:sp>
         <p:nvSpPr>
-          <p:cNvPr id="38" name="TextBox 37"/>
+          <p:cNvPr id="21" name="TextBox 20"/>
           <p:cNvSpPr txBox="1"/>
           <p:nvPr/>
         </p:nvSpPr>
         <p:spPr>
           <a:xfrm>
-            <a:off x="8371636" y="3127248"/>
-            <a:ext cx="2905658" cy="694944"/>
+            <a:off x="6470751" y="4215243"/>
+            <a:ext cx="3197199" cy="274320"/>
           </a:xfrm>
           <a:prstGeom prst="rect">
             <a:avLst/>
@@ -8539,27 +9911,329 @@
               </a:spcAft>
             </a:pPr>
             <a:r>
-              <a:rPr sz="4200" b="1">
+              <a:rPr sz="1400" b="1">
                 <a:solidFill>
-                  <a:srgbClr val="1F6FB2"/>
+                  <a:srgbClr val="C87E12"/>
                 </a:solidFill>
                 <a:latin typeface="Calibri"/>
               </a:rPr>
-              <a:t>1.579</a:t>
-            </a:r>
-          </a:p>
-        </p:txBody>
-      </p:sp>
-      <p:sp>
-        <p:nvSpPr>
-          <p:cNvPr id="39" name="TextBox 38"/>
+              <a:t>Overige afwijkingen</a:t>
+            </a:r>
+          </a:p>
+        </p:txBody>
+      </p:sp>
+      <p:sp>
+        <p:nvSpPr>
+          <p:cNvPr id="22" name="TextBox 21"/>
           <p:cNvSpPr txBox="1"/>
           <p:nvPr/>
         </p:nvSpPr>
         <p:spPr>
           <a:xfrm>
-            <a:off x="8371636" y="3822191"/>
-            <a:ext cx="2905658" cy="237744"/>
+            <a:off x="9594799" y="4233531"/>
+            <a:ext cx="1737360" cy="237744"/>
+          </a:xfrm>
+          <a:prstGeom prst="rect">
+            <a:avLst/>
+          </a:prstGeom>
+          <a:noFill/>
+        </p:spPr>
+        <p:txBody>
+          <a:bodyPr wrap="square" lIns="0" rIns="0" tIns="0" bIns="0" anchor="t">
+            <a:spAutoFit/>
+          </a:bodyPr>
+          <a:lstStyle/>
+          <a:p>
+            <a:pPr algn="r">
+              <a:lnSpc>
+                <a:spcPct val="120000"/>
+              </a:lnSpc>
+              <a:spcAft>
+                <a:spcPts val="0"/>
+              </a:spcAft>
+            </a:pPr>
+            <a:r>
+              <a:rPr sz="950" b="0">
+                <a:solidFill>
+                  <a:srgbClr val="8B9AAA"/>
+                </a:solidFill>
+                <a:latin typeface="Calibri"/>
+              </a:rPr>
+              <a:t>bovenop de begroting</a:t>
+            </a:r>
+          </a:p>
+        </p:txBody>
+      </p:sp>
+      <p:pic>
+        <p:nvPicPr>
+          <p:cNvPr id="23" name="Picture 22" descr="6-overig.png"/>
+          <p:cNvPicPr>
+            <a:picLocks noChangeAspect="1"/>
+          </p:cNvPicPr>
+          <p:nvPr/>
+        </p:nvPicPr>
+        <p:blipFill>
+          <a:blip r:embed="rId4"/>
+          <a:stretch>
+            <a:fillRect/>
+          </a:stretch>
+        </p:blipFill>
+        <p:spPr>
+          <a:xfrm>
+            <a:off x="6470751" y="4745595"/>
+            <a:ext cx="4861407" cy="1122812"/>
+          </a:xfrm>
+          <a:prstGeom prst="rect">
+            <a:avLst/>
+          </a:prstGeom>
+        </p:spPr>
+      </p:pic>
+      <p:sp>
+        <p:nvSpPr>
+          <p:cNvPr id="24" name="Rounded Rectangle 23"/>
+          <p:cNvSpPr/>
+          <p:nvPr/>
+        </p:nvSpPr>
+        <p:spPr>
+          <a:xfrm>
+            <a:off x="6434175" y="4709019"/>
+            <a:ext cx="4934559" cy="1195964"/>
+          </a:xfrm>
+          <a:prstGeom prst="roundRect">
+            <a:avLst>
+              <a:gd name="adj" fmla="val 2000"/>
+            </a:avLst>
+          </a:prstGeom>
+          <a:noFill/>
+          <a:ln w="12700">
+            <a:solidFill>
+              <a:srgbClr val="E2E9F1"/>
+            </a:solidFill>
+          </a:ln>
+          <a:effectLst/>
+        </p:spPr>
+        <p:style>
+          <a:lnRef idx="1">
+            <a:schemeClr val="accent1"/>
+          </a:lnRef>
+          <a:fillRef idx="3">
+            <a:schemeClr val="accent1"/>
+          </a:fillRef>
+          <a:effectRef idx="2">
+            <a:schemeClr val="accent1"/>
+          </a:effectRef>
+          <a:fontRef idx="minor">
+            <a:schemeClr val="lt1"/>
+          </a:fontRef>
+        </p:style>
+        <p:txBody>
+          <a:bodyPr rtlCol="0" anchor="ctr"/>
+          <a:lstStyle/>
+          <a:p/>
+        </p:txBody>
+      </p:sp>
+      <p:sp>
+        <p:nvSpPr>
+          <p:cNvPr id="25" name="Rounded Rectangle 24"/>
+          <p:cNvSpPr/>
+          <p:nvPr/>
+        </p:nvSpPr>
+        <p:spPr>
+          <a:xfrm>
+            <a:off x="640080" y="5272172"/>
+            <a:ext cx="5300319" cy="872595"/>
+          </a:xfrm>
+          <a:prstGeom prst="roundRect">
+            <a:avLst>
+              <a:gd name="adj" fmla="val 3000"/>
+            </a:avLst>
+          </a:prstGeom>
+          <a:solidFill>
+            <a:srgbClr val="ECE3E7"/>
+          </a:solidFill>
+          <a:ln w="15875">
+            <a:solidFill>
+              <a:srgbClr val="E0AEAD"/>
+            </a:solidFill>
+          </a:ln>
+          <a:effectLst>
+            <a:outerShdw blurRad="60000" dist="18000" dir="5400000" rotWithShape="0">
+              <a:srgbClr val="1B3A5C">
+                <a:alpha val="7000"/>
+              </a:srgbClr>
+            </a:outerShdw>
+          </a:effectLst>
+        </p:spPr>
+        <p:style>
+          <a:lnRef idx="1">
+            <a:schemeClr val="accent1"/>
+          </a:lnRef>
+          <a:fillRef idx="3">
+            <a:schemeClr val="accent1"/>
+          </a:fillRef>
+          <a:effectRef idx="2">
+            <a:schemeClr val="accent1"/>
+          </a:effectRef>
+          <a:fontRef idx="minor">
+            <a:schemeClr val="lt1"/>
+          </a:fontRef>
+        </p:style>
+        <p:txBody>
+          <a:bodyPr rtlCol="0" anchor="ctr"/>
+          <a:lstStyle/>
+          <a:p/>
+        </p:txBody>
+      </p:sp>
+      <p:sp>
+        <p:nvSpPr>
+          <p:cNvPr id="26" name="Rounded Rectangle 25"/>
+          <p:cNvSpPr/>
+          <p:nvPr/>
+        </p:nvSpPr>
+        <p:spPr>
+          <a:xfrm>
+            <a:off x="640080" y="5272172"/>
+            <a:ext cx="50292" cy="872595"/>
+          </a:xfrm>
+          <a:prstGeom prst="roundRect">
+            <a:avLst>
+              <a:gd name="adj" fmla="val 50000"/>
+            </a:avLst>
+          </a:prstGeom>
+          <a:solidFill>
+            <a:srgbClr val="C4392D"/>
+          </a:solidFill>
+          <a:ln>
+            <a:noFill/>
+          </a:ln>
+          <a:effectLst/>
+        </p:spPr>
+        <p:style>
+          <a:lnRef idx="1">
+            <a:schemeClr val="accent1"/>
+          </a:lnRef>
+          <a:fillRef idx="3">
+            <a:schemeClr val="accent1"/>
+          </a:fillRef>
+          <a:effectRef idx="2">
+            <a:schemeClr val="accent1"/>
+          </a:effectRef>
+          <a:fontRef idx="minor">
+            <a:schemeClr val="lt1"/>
+          </a:fontRef>
+        </p:style>
+        <p:txBody>
+          <a:bodyPr rtlCol="0" anchor="ctr"/>
+          <a:lstStyle/>
+          <a:p/>
+        </p:txBody>
+      </p:sp>
+      <p:sp>
+        <p:nvSpPr>
+          <p:cNvPr id="27" name="TextBox 26"/>
+          <p:cNvSpPr txBox="1"/>
+          <p:nvPr/>
+        </p:nvSpPr>
+        <p:spPr>
+          <a:xfrm>
+            <a:off x="914400" y="5381900"/>
+            <a:ext cx="4751679" cy="653139"/>
+          </a:xfrm>
+          <a:prstGeom prst="rect">
+            <a:avLst/>
+          </a:prstGeom>
+          <a:noFill/>
+        </p:spPr>
+        <p:txBody>
+          <a:bodyPr wrap="square" lIns="0" rIns="0" tIns="0" bIns="0" anchor="t">
+            <a:spAutoFit/>
+          </a:bodyPr>
+          <a:lstStyle/>
+          <a:p>
+            <a:pPr algn="l">
+              <a:lnSpc>
+                <a:spcPct val="120000"/>
+              </a:lnSpc>
+              <a:spcAft>
+                <a:spcPts val="300"/>
+              </a:spcAft>
+            </a:pPr>
+            <a:r>
+              <a:rPr sz="800" b="1" spc="160">
+                <a:solidFill>
+                  <a:srgbClr val="C4392D"/>
+                </a:solidFill>
+                <a:latin typeface="Calibri"/>
+              </a:rPr>
+              <a:t>DE FTE-(MIS)MATCH</a:t>
+            </a:r>
+          </a:p>
+          <a:p>
+            <a:pPr algn="l">
+              <a:lnSpc>
+                <a:spcPct val="122000"/>
+              </a:lnSpc>
+              <a:spcAft>
+                <a:spcPts val="0"/>
+              </a:spcAft>
+            </a:pPr>
+            <a:r>
+              <a:rPr sz="1000" b="0">
+                <a:solidFill>
+                  <a:srgbClr val="0D1B2A"/>
+                </a:solidFill>
+                <a:latin typeface="Calibri"/>
+              </a:rPr>
+              <a:t>Benodigde capaciteit in uren tegenover de bruto beschikbare formatie. Het verschil is wat er aan fte bij moet of over is — dat is de uitkomst die naar de financiële begroting gaat.</a:t>
+            </a:r>
+          </a:p>
+        </p:txBody>
+      </p:sp>
+      <p:cxnSp>
+        <p:nvCxnSpPr>
+          <p:cNvPr id="28" name="Connector 27"/>
+          <p:cNvCxnSpPr/>
+          <p:nvPr/>
+        </p:nvCxnSpPr>
+        <p:spPr>
+          <a:xfrm>
+            <a:off x="640080" y="6291072"/>
+            <a:ext cx="10911535" cy="0"/>
+          </a:xfrm>
+          <a:prstGeom prst="line">
+            <a:avLst/>
+          </a:prstGeom>
+          <a:ln w="9525">
+            <a:solidFill>
+              <a:srgbClr val="E2E9F1"/>
+            </a:solidFill>
+          </a:ln>
+        </p:spPr>
+        <p:style>
+          <a:lnRef idx="2">
+            <a:schemeClr val="accent1"/>
+          </a:lnRef>
+          <a:fillRef idx="0">
+            <a:schemeClr val="accent1"/>
+          </a:fillRef>
+          <a:effectRef idx="1">
+            <a:schemeClr val="accent1"/>
+          </a:effectRef>
+          <a:fontRef idx="minor">
+            <a:schemeClr val="tx1"/>
+          </a:fontRef>
+        </p:style>
+      </p:cxnSp>
+      <p:sp>
+        <p:nvSpPr>
+          <p:cNvPr id="29" name="TextBox 28"/>
+          <p:cNvSpPr txBox="1"/>
+          <p:nvPr/>
+        </p:nvSpPr>
+        <p:spPr>
+          <a:xfrm>
+            <a:off x="640080" y="6382512"/>
+            <a:ext cx="5486400" cy="237744"/>
           </a:xfrm>
           <a:prstGeom prst="rect">
             <a:avLst/>
@@ -8581,829 +10255,6 @@
               </a:spcAft>
             </a:pPr>
             <a:r>
-              <a:rPr sz="950" b="1" spc="120">
-                <a:solidFill>
-                  <a:srgbClr val="8B9AAA"/>
-                </a:solidFill>
-                <a:latin typeface="Calibri"/>
-              </a:rPr>
-              <a:t>NETTO INZETBAAR  ·  84,1%</a:t>
-            </a:r>
-          </a:p>
-        </p:txBody>
-      </p:sp>
-      <p:sp>
-        <p:nvSpPr>
-          <p:cNvPr id="40" name="TextBox 39"/>
-          <p:cNvSpPr txBox="1"/>
-          <p:nvPr/>
-        </p:nvSpPr>
-        <p:spPr>
-          <a:xfrm>
-            <a:off x="8371636" y="4096512"/>
-            <a:ext cx="2905658" cy="420624"/>
-          </a:xfrm>
-          <a:prstGeom prst="rect">
-            <a:avLst/>
-          </a:prstGeom>
-          <a:noFill/>
-        </p:spPr>
-        <p:txBody>
-          <a:bodyPr wrap="square" lIns="0" rIns="0" tIns="0" bIns="0" anchor="t">
-            <a:spAutoFit/>
-          </a:bodyPr>
-          <a:lstStyle/>
-          <a:p>
-            <a:pPr algn="l">
-              <a:lnSpc>
-                <a:spcPct val="120000"/>
-              </a:lnSpc>
-              <a:spcAft>
-                <a:spcPts val="0"/>
-              </a:spcAft>
-            </a:pPr>
-            <a:r>
-              <a:rPr sz="1000" b="0">
-                <a:solidFill>
-                  <a:srgbClr val="55677C"/>
-                </a:solidFill>
-                <a:latin typeface="Calibri"/>
-              </a:rPr>
-              <a:t>30,3 uur per week</a:t>
-            </a:r>
-          </a:p>
-        </p:txBody>
-      </p:sp>
-      <p:sp>
-        <p:nvSpPr>
-          <p:cNvPr id="41" name="Rounded Rectangle 40"/>
-          <p:cNvSpPr/>
-          <p:nvPr/>
-        </p:nvSpPr>
-        <p:spPr>
-          <a:xfrm>
-            <a:off x="640080" y="4773168"/>
-            <a:ext cx="5291175" cy="1060704"/>
-          </a:xfrm>
-          <a:prstGeom prst="roundRect">
-            <a:avLst>
-              <a:gd name="adj" fmla="val 3000"/>
-            </a:avLst>
-          </a:prstGeom>
-          <a:solidFill>
-            <a:srgbClr val="FFFFFF"/>
-          </a:solidFill>
-          <a:ln w="12700">
-            <a:solidFill>
-              <a:srgbClr val="E2E9F1"/>
-            </a:solidFill>
-          </a:ln>
-          <a:effectLst>
-            <a:outerShdw blurRad="70000" dist="22000" dir="5400000" rotWithShape="0">
-              <a:srgbClr val="1B3A5C">
-                <a:alpha val="9000"/>
-              </a:srgbClr>
-            </a:outerShdw>
-          </a:effectLst>
-        </p:spPr>
-        <p:style>
-          <a:lnRef idx="1">
-            <a:schemeClr val="accent1"/>
-          </a:lnRef>
-          <a:fillRef idx="3">
-            <a:schemeClr val="accent1"/>
-          </a:fillRef>
-          <a:effectRef idx="2">
-            <a:schemeClr val="accent1"/>
-          </a:effectRef>
-          <a:fontRef idx="minor">
-            <a:schemeClr val="lt1"/>
-          </a:fontRef>
-        </p:style>
-        <p:txBody>
-          <a:bodyPr rtlCol="0" anchor="ctr"/>
-          <a:lstStyle/>
-          <a:p/>
-        </p:txBody>
-      </p:sp>
-      <p:sp>
-        <p:nvSpPr>
-          <p:cNvPr id="42" name="TextBox 41"/>
-          <p:cNvSpPr txBox="1"/>
-          <p:nvPr/>
-        </p:nvSpPr>
-        <p:spPr>
-          <a:xfrm>
-            <a:off x="914400" y="4919472"/>
-            <a:ext cx="4742535" cy="256032"/>
-          </a:xfrm>
-          <a:prstGeom prst="rect">
-            <a:avLst/>
-          </a:prstGeom>
-          <a:noFill/>
-        </p:spPr>
-        <p:txBody>
-          <a:bodyPr wrap="square" lIns="0" rIns="0" tIns="0" bIns="0" anchor="t">
-            <a:spAutoFit/>
-          </a:bodyPr>
-          <a:lstStyle/>
-          <a:p>
-            <a:pPr algn="l">
-              <a:lnSpc>
-                <a:spcPct val="120000"/>
-              </a:lnSpc>
-              <a:spcAft>
-                <a:spcPts val="0"/>
-              </a:spcAft>
-            </a:pPr>
-            <a:r>
-              <a:rPr sz="1250" b="1">
-                <a:solidFill>
-                  <a:srgbClr val="6B4BA8"/>
-                </a:solidFill>
-                <a:latin typeface="Calibri"/>
-              </a:rPr>
-              <a:t>Benodigde uren bestaan uit</a:t>
-            </a:r>
-          </a:p>
-        </p:txBody>
-      </p:sp>
-      <p:sp>
-        <p:nvSpPr>
-          <p:cNvPr id="43" name="Oval 42"/>
-          <p:cNvSpPr/>
-          <p:nvPr/>
-        </p:nvSpPr>
-        <p:spPr>
-          <a:xfrm>
-            <a:off x="928116" y="5298948"/>
-            <a:ext cx="82296" cy="82296"/>
-          </a:xfrm>
-          <a:prstGeom prst="ellipse">
-            <a:avLst/>
-          </a:prstGeom>
-          <a:solidFill>
-            <a:srgbClr val="6B4BA8"/>
-          </a:solidFill>
-          <a:ln>
-            <a:noFill/>
-          </a:ln>
-          <a:effectLst/>
-        </p:spPr>
-        <p:style>
-          <a:lnRef idx="1">
-            <a:schemeClr val="accent1"/>
-          </a:lnRef>
-          <a:fillRef idx="3">
-            <a:schemeClr val="accent1"/>
-          </a:fillRef>
-          <a:effectRef idx="2">
-            <a:schemeClr val="accent1"/>
-          </a:effectRef>
-          <a:fontRef idx="minor">
-            <a:schemeClr val="lt1"/>
-          </a:fontRef>
-        </p:style>
-        <p:txBody>
-          <a:bodyPr rtlCol="0" anchor="ctr"/>
-          <a:lstStyle/>
-          <a:p>
-            <a:pPr algn="ctr"/>
-          </a:p>
-        </p:txBody>
-      </p:sp>
-      <p:sp>
-        <p:nvSpPr>
-          <p:cNvPr id="44" name="TextBox 43"/>
-          <p:cNvSpPr txBox="1"/>
-          <p:nvPr/>
-        </p:nvSpPr>
-        <p:spPr>
-          <a:xfrm>
-            <a:off x="1152144" y="5230368"/>
-            <a:ext cx="4504791" cy="219456"/>
-          </a:xfrm>
-          <a:prstGeom prst="rect">
-            <a:avLst/>
-          </a:prstGeom>
-          <a:noFill/>
-        </p:spPr>
-        <p:txBody>
-          <a:bodyPr wrap="square" lIns="0" rIns="0" tIns="0" bIns="0" anchor="t">
-            <a:spAutoFit/>
-          </a:bodyPr>
-          <a:lstStyle/>
-          <a:p>
-            <a:pPr algn="l">
-              <a:lnSpc>
-                <a:spcPct val="114000"/>
-              </a:lnSpc>
-              <a:spcAft>
-                <a:spcPts val="0"/>
-              </a:spcAft>
-            </a:pPr>
-            <a:r>
-              <a:rPr sz="950" b="0">
-                <a:solidFill>
-                  <a:srgbClr val="55677C"/>
-                </a:solidFill>
-                <a:latin typeface="Calibri"/>
-              </a:rPr>
-              <a:t>indirecte uren per afdeling</a:t>
-            </a:r>
-          </a:p>
-        </p:txBody>
-      </p:sp>
-      <p:sp>
-        <p:nvSpPr>
-          <p:cNvPr id="45" name="Oval 44"/>
-          <p:cNvSpPr/>
-          <p:nvPr/>
-        </p:nvSpPr>
-        <p:spPr>
-          <a:xfrm>
-            <a:off x="928116" y="5490972"/>
-            <a:ext cx="82296" cy="82296"/>
-          </a:xfrm>
-          <a:prstGeom prst="ellipse">
-            <a:avLst/>
-          </a:prstGeom>
-          <a:solidFill>
-            <a:srgbClr val="6B4BA8"/>
-          </a:solidFill>
-          <a:ln>
-            <a:noFill/>
-          </a:ln>
-          <a:effectLst/>
-        </p:spPr>
-        <p:style>
-          <a:lnRef idx="1">
-            <a:schemeClr val="accent1"/>
-          </a:lnRef>
-          <a:fillRef idx="3">
-            <a:schemeClr val="accent1"/>
-          </a:fillRef>
-          <a:effectRef idx="2">
-            <a:schemeClr val="accent1"/>
-          </a:effectRef>
-          <a:fontRef idx="minor">
-            <a:schemeClr val="lt1"/>
-          </a:fontRef>
-        </p:style>
-        <p:txBody>
-          <a:bodyPr rtlCol="0" anchor="ctr"/>
-          <a:lstStyle/>
-          <a:p>
-            <a:pPr algn="ctr"/>
-          </a:p>
-        </p:txBody>
-      </p:sp>
-      <p:sp>
-        <p:nvSpPr>
-          <p:cNvPr id="46" name="TextBox 45"/>
-          <p:cNvSpPr txBox="1"/>
-          <p:nvPr/>
-        </p:nvSpPr>
-        <p:spPr>
-          <a:xfrm>
-            <a:off x="1152144" y="5422392"/>
-            <a:ext cx="4504791" cy="219456"/>
-          </a:xfrm>
-          <a:prstGeom prst="rect">
-            <a:avLst/>
-          </a:prstGeom>
-          <a:noFill/>
-        </p:spPr>
-        <p:txBody>
-          <a:bodyPr wrap="square" lIns="0" rIns="0" tIns="0" bIns="0" anchor="t">
-            <a:spAutoFit/>
-          </a:bodyPr>
-          <a:lstStyle/>
-          <a:p>
-            <a:pPr algn="l">
-              <a:lnSpc>
-                <a:spcPct val="114000"/>
-              </a:lnSpc>
-              <a:spcAft>
-                <a:spcPts val="0"/>
-              </a:spcAft>
-            </a:pPr>
-            <a:r>
-              <a:rPr sz="950" b="0">
-                <a:solidFill>
-                  <a:srgbClr val="55677C"/>
-                </a:solidFill>
-                <a:latin typeface="Calibri"/>
-              </a:rPr>
-              <a:t>directe uren o.b.v. roostersleutel of sessierooster</a:t>
-            </a:r>
-          </a:p>
-        </p:txBody>
-      </p:sp>
-      <p:sp>
-        <p:nvSpPr>
-          <p:cNvPr id="47" name="Oval 46"/>
-          <p:cNvSpPr/>
-          <p:nvPr/>
-        </p:nvSpPr>
-        <p:spPr>
-          <a:xfrm>
-            <a:off x="928116" y="5682996"/>
-            <a:ext cx="82296" cy="82296"/>
-          </a:xfrm>
-          <a:prstGeom prst="ellipse">
-            <a:avLst/>
-          </a:prstGeom>
-          <a:solidFill>
-            <a:srgbClr val="6B4BA8"/>
-          </a:solidFill>
-          <a:ln>
-            <a:noFill/>
-          </a:ln>
-          <a:effectLst/>
-        </p:spPr>
-        <p:style>
-          <a:lnRef idx="1">
-            <a:schemeClr val="accent1"/>
-          </a:lnRef>
-          <a:fillRef idx="3">
-            <a:schemeClr val="accent1"/>
-          </a:fillRef>
-          <a:effectRef idx="2">
-            <a:schemeClr val="accent1"/>
-          </a:effectRef>
-          <a:fontRef idx="minor">
-            <a:schemeClr val="lt1"/>
-          </a:fontRef>
-        </p:style>
-        <p:txBody>
-          <a:bodyPr rtlCol="0" anchor="ctr"/>
-          <a:lstStyle/>
-          <a:p>
-            <a:pPr algn="ctr"/>
-          </a:p>
-        </p:txBody>
-      </p:sp>
-      <p:sp>
-        <p:nvSpPr>
-          <p:cNvPr id="48" name="TextBox 47"/>
-          <p:cNvSpPr txBox="1"/>
-          <p:nvPr/>
-        </p:nvSpPr>
-        <p:spPr>
-          <a:xfrm>
-            <a:off x="1152144" y="5614416"/>
-            <a:ext cx="4504791" cy="219456"/>
-          </a:xfrm>
-          <a:prstGeom prst="rect">
-            <a:avLst/>
-          </a:prstGeom>
-          <a:noFill/>
-        </p:spPr>
-        <p:txBody>
-          <a:bodyPr wrap="square" lIns="0" rIns="0" tIns="0" bIns="0" anchor="t">
-            <a:spAutoFit/>
-          </a:bodyPr>
-          <a:lstStyle/>
-          <a:p>
-            <a:pPr algn="l">
-              <a:lnSpc>
-                <a:spcPct val="114000"/>
-              </a:lnSpc>
-              <a:spcAft>
-                <a:spcPts val="0"/>
-              </a:spcAft>
-            </a:pPr>
-            <a:r>
-              <a:rPr sz="950" b="0">
-                <a:solidFill>
-                  <a:srgbClr val="55677C"/>
-                </a:solidFill>
-                <a:latin typeface="Calibri"/>
-              </a:rPr>
-              <a:t>spoedmodaliteiten en bereikbaarheidsdiensten</a:t>
-            </a:r>
-          </a:p>
-        </p:txBody>
-      </p:sp>
-      <p:sp>
-        <p:nvSpPr>
-          <p:cNvPr id="49" name="Rounded Rectangle 48"/>
-          <p:cNvSpPr/>
-          <p:nvPr/>
-        </p:nvSpPr>
-        <p:spPr>
-          <a:xfrm>
-            <a:off x="6260439" y="4773168"/>
-            <a:ext cx="5291175" cy="1060704"/>
-          </a:xfrm>
-          <a:prstGeom prst="roundRect">
-            <a:avLst>
-              <a:gd name="adj" fmla="val 3000"/>
-            </a:avLst>
-          </a:prstGeom>
-          <a:solidFill>
-            <a:srgbClr val="FFFFFF"/>
-          </a:solidFill>
-          <a:ln w="12700">
-            <a:solidFill>
-              <a:srgbClr val="E2E9F1"/>
-            </a:solidFill>
-          </a:ln>
-          <a:effectLst>
-            <a:outerShdw blurRad="70000" dist="22000" dir="5400000" rotWithShape="0">
-              <a:srgbClr val="1B3A5C">
-                <a:alpha val="9000"/>
-              </a:srgbClr>
-            </a:outerShdw>
-          </a:effectLst>
-        </p:spPr>
-        <p:style>
-          <a:lnRef idx="1">
-            <a:schemeClr val="accent1"/>
-          </a:lnRef>
-          <a:fillRef idx="3">
-            <a:schemeClr val="accent1"/>
-          </a:fillRef>
-          <a:effectRef idx="2">
-            <a:schemeClr val="accent1"/>
-          </a:effectRef>
-          <a:fontRef idx="minor">
-            <a:schemeClr val="lt1"/>
-          </a:fontRef>
-        </p:style>
-        <p:txBody>
-          <a:bodyPr rtlCol="0" anchor="ctr"/>
-          <a:lstStyle/>
-          <a:p/>
-        </p:txBody>
-      </p:sp>
-      <p:sp>
-        <p:nvSpPr>
-          <p:cNvPr id="50" name="TextBox 49"/>
-          <p:cNvSpPr txBox="1"/>
-          <p:nvPr/>
-        </p:nvSpPr>
-        <p:spPr>
-          <a:xfrm>
-            <a:off x="6534759" y="4919472"/>
-            <a:ext cx="4742535" cy="256032"/>
-          </a:xfrm>
-          <a:prstGeom prst="rect">
-            <a:avLst/>
-          </a:prstGeom>
-          <a:noFill/>
-        </p:spPr>
-        <p:txBody>
-          <a:bodyPr wrap="square" lIns="0" rIns="0" tIns="0" bIns="0" anchor="t">
-            <a:spAutoFit/>
-          </a:bodyPr>
-          <a:lstStyle/>
-          <a:p>
-            <a:pPr algn="l">
-              <a:lnSpc>
-                <a:spcPct val="120000"/>
-              </a:lnSpc>
-              <a:spcAft>
-                <a:spcPts val="0"/>
-              </a:spcAft>
-            </a:pPr>
-            <a:r>
-              <a:rPr sz="1250" b="1">
-                <a:solidFill>
-                  <a:srgbClr val="C87E12"/>
-                </a:solidFill>
-                <a:latin typeface="Calibri"/>
-              </a:rPr>
-              <a:t>Overige afwijkingen komen er bovenop</a:t>
-            </a:r>
-          </a:p>
-        </p:txBody>
-      </p:sp>
-      <p:sp>
-        <p:nvSpPr>
-          <p:cNvPr id="51" name="Oval 50"/>
-          <p:cNvSpPr/>
-          <p:nvPr/>
-        </p:nvSpPr>
-        <p:spPr>
-          <a:xfrm>
-            <a:off x="6548475" y="5298948"/>
-            <a:ext cx="82296" cy="82296"/>
-          </a:xfrm>
-          <a:prstGeom prst="ellipse">
-            <a:avLst/>
-          </a:prstGeom>
-          <a:solidFill>
-            <a:srgbClr val="C87E12"/>
-          </a:solidFill>
-          <a:ln>
-            <a:noFill/>
-          </a:ln>
-          <a:effectLst/>
-        </p:spPr>
-        <p:style>
-          <a:lnRef idx="1">
-            <a:schemeClr val="accent1"/>
-          </a:lnRef>
-          <a:fillRef idx="3">
-            <a:schemeClr val="accent1"/>
-          </a:fillRef>
-          <a:effectRef idx="2">
-            <a:schemeClr val="accent1"/>
-          </a:effectRef>
-          <a:fontRef idx="minor">
-            <a:schemeClr val="lt1"/>
-          </a:fontRef>
-        </p:style>
-        <p:txBody>
-          <a:bodyPr rtlCol="0" anchor="ctr"/>
-          <a:lstStyle/>
-          <a:p>
-            <a:pPr algn="ctr"/>
-          </a:p>
-        </p:txBody>
-      </p:sp>
-      <p:sp>
-        <p:nvSpPr>
-          <p:cNvPr id="52" name="TextBox 51"/>
-          <p:cNvSpPr txBox="1"/>
-          <p:nvPr/>
-        </p:nvSpPr>
-        <p:spPr>
-          <a:xfrm>
-            <a:off x="6772503" y="5230368"/>
-            <a:ext cx="4504791" cy="219456"/>
-          </a:xfrm>
-          <a:prstGeom prst="rect">
-            <a:avLst/>
-          </a:prstGeom>
-          <a:noFill/>
-        </p:spPr>
-        <p:txBody>
-          <a:bodyPr wrap="square" lIns="0" rIns="0" tIns="0" bIns="0" anchor="t">
-            <a:spAutoFit/>
-          </a:bodyPr>
-          <a:lstStyle/>
-          <a:p>
-            <a:pPr algn="l">
-              <a:lnSpc>
-                <a:spcPct val="114000"/>
-              </a:lnSpc>
-              <a:spcAft>
-                <a:spcPts val="0"/>
-              </a:spcAft>
-            </a:pPr>
-            <a:r>
-              <a:rPr sz="950" b="0">
-                <a:solidFill>
-                  <a:srgbClr val="55677C"/>
-                </a:solidFill>
-                <a:latin typeface="Calibri"/>
-              </a:rPr>
-              <a:t>zwangerschapsverlof</a:t>
-            </a:r>
-          </a:p>
-        </p:txBody>
-      </p:sp>
-      <p:sp>
-        <p:nvSpPr>
-          <p:cNvPr id="53" name="Oval 52"/>
-          <p:cNvSpPr/>
-          <p:nvPr/>
-        </p:nvSpPr>
-        <p:spPr>
-          <a:xfrm>
-            <a:off x="6548475" y="5490972"/>
-            <a:ext cx="82296" cy="82296"/>
-          </a:xfrm>
-          <a:prstGeom prst="ellipse">
-            <a:avLst/>
-          </a:prstGeom>
-          <a:solidFill>
-            <a:srgbClr val="C87E12"/>
-          </a:solidFill>
-          <a:ln>
-            <a:noFill/>
-          </a:ln>
-          <a:effectLst/>
-        </p:spPr>
-        <p:style>
-          <a:lnRef idx="1">
-            <a:schemeClr val="accent1"/>
-          </a:lnRef>
-          <a:fillRef idx="3">
-            <a:schemeClr val="accent1"/>
-          </a:fillRef>
-          <a:effectRef idx="2">
-            <a:schemeClr val="accent1"/>
-          </a:effectRef>
-          <a:fontRef idx="minor">
-            <a:schemeClr val="lt1"/>
-          </a:fontRef>
-        </p:style>
-        <p:txBody>
-          <a:bodyPr rtlCol="0" anchor="ctr"/>
-          <a:lstStyle/>
-          <a:p>
-            <a:pPr algn="ctr"/>
-          </a:p>
-        </p:txBody>
-      </p:sp>
-      <p:sp>
-        <p:nvSpPr>
-          <p:cNvPr id="54" name="TextBox 53"/>
-          <p:cNvSpPr txBox="1"/>
-          <p:nvPr/>
-        </p:nvSpPr>
-        <p:spPr>
-          <a:xfrm>
-            <a:off x="6772503" y="5422392"/>
-            <a:ext cx="4504791" cy="219456"/>
-          </a:xfrm>
-          <a:prstGeom prst="rect">
-            <a:avLst/>
-          </a:prstGeom>
-          <a:noFill/>
-        </p:spPr>
-        <p:txBody>
-          <a:bodyPr wrap="square" lIns="0" rIns="0" tIns="0" bIns="0" anchor="t">
-            <a:spAutoFit/>
-          </a:bodyPr>
-          <a:lstStyle/>
-          <a:p>
-            <a:pPr algn="l">
-              <a:lnSpc>
-                <a:spcPct val="114000"/>
-              </a:lnSpc>
-              <a:spcAft>
-                <a:spcPts val="0"/>
-              </a:spcAft>
-            </a:pPr>
-            <a:r>
-              <a:rPr sz="950" b="0">
-                <a:solidFill>
-                  <a:srgbClr val="55677C"/>
-                </a:solidFill>
-                <a:latin typeface="Calibri"/>
-              </a:rPr>
-              <a:t>ouderschapsverlof</a:t>
-            </a:r>
-          </a:p>
-        </p:txBody>
-      </p:sp>
-      <p:sp>
-        <p:nvSpPr>
-          <p:cNvPr id="55" name="Oval 54"/>
-          <p:cNvSpPr/>
-          <p:nvPr/>
-        </p:nvSpPr>
-        <p:spPr>
-          <a:xfrm>
-            <a:off x="6548475" y="5682996"/>
-            <a:ext cx="82296" cy="82296"/>
-          </a:xfrm>
-          <a:prstGeom prst="ellipse">
-            <a:avLst/>
-          </a:prstGeom>
-          <a:solidFill>
-            <a:srgbClr val="C87E12"/>
-          </a:solidFill>
-          <a:ln>
-            <a:noFill/>
-          </a:ln>
-          <a:effectLst/>
-        </p:spPr>
-        <p:style>
-          <a:lnRef idx="1">
-            <a:schemeClr val="accent1"/>
-          </a:lnRef>
-          <a:fillRef idx="3">
-            <a:schemeClr val="accent1"/>
-          </a:fillRef>
-          <a:effectRef idx="2">
-            <a:schemeClr val="accent1"/>
-          </a:effectRef>
-          <a:fontRef idx="minor">
-            <a:schemeClr val="lt1"/>
-          </a:fontRef>
-        </p:style>
-        <p:txBody>
-          <a:bodyPr rtlCol="0" anchor="ctr"/>
-          <a:lstStyle/>
-          <a:p>
-            <a:pPr algn="ctr"/>
-          </a:p>
-        </p:txBody>
-      </p:sp>
-      <p:sp>
-        <p:nvSpPr>
-          <p:cNvPr id="56" name="TextBox 55"/>
-          <p:cNvSpPr txBox="1"/>
-          <p:nvPr/>
-        </p:nvSpPr>
-        <p:spPr>
-          <a:xfrm>
-            <a:off x="6772503" y="5614416"/>
-            <a:ext cx="4504791" cy="219456"/>
-          </a:xfrm>
-          <a:prstGeom prst="rect">
-            <a:avLst/>
-          </a:prstGeom>
-          <a:noFill/>
-        </p:spPr>
-        <p:txBody>
-          <a:bodyPr wrap="square" lIns="0" rIns="0" tIns="0" bIns="0" anchor="t">
-            <a:spAutoFit/>
-          </a:bodyPr>
-          <a:lstStyle/>
-          <a:p>
-            <a:pPr algn="l">
-              <a:lnSpc>
-                <a:spcPct val="114000"/>
-              </a:lnSpc>
-              <a:spcAft>
-                <a:spcPts val="0"/>
-              </a:spcAft>
-            </a:pPr>
-            <a:r>
-              <a:rPr sz="950" b="0">
-                <a:solidFill>
-                  <a:srgbClr val="55677C"/>
-                </a:solidFill>
-                <a:latin typeface="Calibri"/>
-              </a:rPr>
-              <a:t>ziekteverzuim boven de 4 procent</a:t>
-            </a:r>
-          </a:p>
-        </p:txBody>
-      </p:sp>
-      <p:cxnSp>
-        <p:nvCxnSpPr>
-          <p:cNvPr id="57" name="Connector 56"/>
-          <p:cNvCxnSpPr/>
-          <p:nvPr/>
-        </p:nvCxnSpPr>
-        <p:spPr>
-          <a:xfrm>
-            <a:off x="640080" y="6291072"/>
-            <a:ext cx="10911535" cy="0"/>
-          </a:xfrm>
-          <a:prstGeom prst="line">
-            <a:avLst/>
-          </a:prstGeom>
-          <a:ln w="9525">
-            <a:solidFill>
-              <a:srgbClr val="E2E9F1"/>
-            </a:solidFill>
-          </a:ln>
-        </p:spPr>
-        <p:style>
-          <a:lnRef idx="2">
-            <a:schemeClr val="accent1"/>
-          </a:lnRef>
-          <a:fillRef idx="0">
-            <a:schemeClr val="accent1"/>
-          </a:fillRef>
-          <a:effectRef idx="1">
-            <a:schemeClr val="accent1"/>
-          </a:effectRef>
-          <a:fontRef idx="minor">
-            <a:schemeClr val="tx1"/>
-          </a:fontRef>
-        </p:style>
-      </p:cxnSp>
-      <p:sp>
-        <p:nvSpPr>
-          <p:cNvPr id="58" name="TextBox 57"/>
-          <p:cNvSpPr txBox="1"/>
-          <p:nvPr/>
-        </p:nvSpPr>
-        <p:spPr>
-          <a:xfrm>
-            <a:off x="640080" y="6382512"/>
-            <a:ext cx="5486400" cy="237744"/>
-          </a:xfrm>
-          <a:prstGeom prst="rect">
-            <a:avLst/>
-          </a:prstGeom>
-          <a:noFill/>
-        </p:spPr>
-        <p:txBody>
-          <a:bodyPr wrap="square" lIns="0" rIns="0" tIns="0" bIns="0" anchor="t">
-            <a:spAutoFit/>
-          </a:bodyPr>
-          <a:lstStyle/>
-          <a:p>
-            <a:pPr algn="l">
-              <a:lnSpc>
-                <a:spcPct val="120000"/>
-              </a:lnSpc>
-              <a:spcAft>
-                <a:spcPts val="0"/>
-              </a:spcAft>
-            </a:pPr>
-            <a:r>
               <a:rPr sz="900" b="0" spc="80">
                 <a:solidFill>
                   <a:srgbClr val="8B9AAA"/>
@@ -9417,7 +10268,7 @@
       </p:sp>
       <p:sp>
         <p:nvSpPr>
-          <p:cNvPr id="59" name="TextBox 58"/>
+          <p:cNvPr id="30" name="TextBox 29"/>
           <p:cNvSpPr txBox="1"/>
           <p:nvPr/>
         </p:nvSpPr>
@@ -9452,7 +10303,7 @@
                 </a:solidFill>
                 <a:latin typeface="Calibri"/>
               </a:rPr>
-              <a:t>02</a:t>
+              <a:t>03</a:t>
             </a:r>
           </a:p>
         </p:txBody>
